--- a/Lec-33-36-VM.pptx
+++ b/Lec-33-36-VM.pptx
@@ -5,7 +5,7 @@
     <p:sldMasterId id="2147483648" r:id="rId1"/>
   </p:sldMasterIdLst>
   <p:notesMasterIdLst>
-    <p:notesMasterId r:id="rId47"/>
+    <p:notesMasterId r:id="rId48"/>
   </p:notesMasterIdLst>
   <p:sldIdLst>
     <p:sldId id="337" r:id="rId2"/>
@@ -40,19 +40,20 @@
     <p:sldId id="288" r:id="rId31"/>
     <p:sldId id="289" r:id="rId32"/>
     <p:sldId id="290" r:id="rId33"/>
-    <p:sldId id="291" r:id="rId34"/>
-    <p:sldId id="292" r:id="rId35"/>
-    <p:sldId id="293" r:id="rId36"/>
-    <p:sldId id="294" r:id="rId37"/>
-    <p:sldId id="295" r:id="rId38"/>
-    <p:sldId id="296" r:id="rId39"/>
-    <p:sldId id="297" r:id="rId40"/>
-    <p:sldId id="298" r:id="rId41"/>
-    <p:sldId id="299" r:id="rId42"/>
-    <p:sldId id="300" r:id="rId43"/>
-    <p:sldId id="301" r:id="rId44"/>
-    <p:sldId id="302" r:id="rId45"/>
-    <p:sldId id="303" r:id="rId46"/>
+    <p:sldId id="338" r:id="rId34"/>
+    <p:sldId id="291" r:id="rId35"/>
+    <p:sldId id="292" r:id="rId36"/>
+    <p:sldId id="339" r:id="rId37"/>
+    <p:sldId id="294" r:id="rId38"/>
+    <p:sldId id="295" r:id="rId39"/>
+    <p:sldId id="296" r:id="rId40"/>
+    <p:sldId id="297" r:id="rId41"/>
+    <p:sldId id="298" r:id="rId42"/>
+    <p:sldId id="299" r:id="rId43"/>
+    <p:sldId id="300" r:id="rId44"/>
+    <p:sldId id="301" r:id="rId45"/>
+    <p:sldId id="302" r:id="rId46"/>
+    <p:sldId id="303" r:id="rId47"/>
   </p:sldIdLst>
   <p:sldSz cx="9144000" cy="6858000" type="screen4x3"/>
   <p:notesSz cx="6858000" cy="9144000"/>
@@ -334,7 +335,7 @@
               <a:pPr>
                 <a:defRPr/>
               </a:pPr>
-              <a:t>4/15/2026</a:t>
+              <a:t>4/22/2026</a:t>
             </a:fld>
             <a:endParaRPr lang="en-US"/>
           </a:p>
@@ -2155,7 +2156,7 @@
           <a:p>
             <a:fld id="{07E0464C-7207-4298-A27C-0CEAF85D3DD1}" type="datetime3">
               <a:rPr lang="en-US" smtClean="0"/>
-              <a:t>15 April 2026</a:t>
+              <a:t>22 April 2026</a:t>
             </a:fld>
             <a:endParaRPr lang="en-US"/>
           </a:p>
@@ -2486,7 +2487,7 @@
           <a:p>
             <a:fld id="{07E0464C-7207-4298-A27C-0CEAF85D3DD1}" type="datetime3">
               <a:rPr lang="en-US" smtClean="0"/>
-              <a:t>15 April 2026</a:t>
+              <a:t>22 April 2026</a:t>
             </a:fld>
             <a:endParaRPr lang="en-US"/>
           </a:p>
@@ -2817,7 +2818,7 @@
           <a:p>
             <a:fld id="{07E0464C-7207-4298-A27C-0CEAF85D3DD1}" type="datetime3">
               <a:rPr lang="en-US" smtClean="0"/>
-              <a:t>15 April 2026</a:t>
+              <a:t>22 April 2026</a:t>
             </a:fld>
             <a:endParaRPr lang="en-US"/>
           </a:p>
@@ -3148,7 +3149,7 @@
           <a:p>
             <a:fld id="{07E0464C-7207-4298-A27C-0CEAF85D3DD1}" type="datetime3">
               <a:rPr lang="en-US" smtClean="0"/>
-              <a:t>15 April 2026</a:t>
+              <a:t>22 April 2026</a:t>
             </a:fld>
             <a:endParaRPr lang="en-US"/>
           </a:p>
@@ -7379,7 +7380,7 @@
           <a:p>
             <a:fld id="{B4B13859-67C5-4393-B6C2-556CF3F770C0}" type="datetime3">
               <a:rPr lang="en-US" smtClean="0"/>
-              <a:t>15 April 2026</a:t>
+              <a:t>22 April 2026</a:t>
             </a:fld>
             <a:endParaRPr lang="en-US"/>
           </a:p>
@@ -7537,7 +7538,7 @@
           <a:p>
             <a:fld id="{B4B13859-67C5-4393-B6C2-556CF3F770C0}" type="datetime3">
               <a:rPr lang="en-US" smtClean="0"/>
-              <a:t>15 April 2026</a:t>
+              <a:t>22 April 2026</a:t>
             </a:fld>
             <a:endParaRPr lang="en-US"/>
           </a:p>
@@ -7695,7 +7696,7 @@
           <a:p>
             <a:fld id="{B4B13859-67C5-4393-B6C2-556CF3F770C0}" type="datetime3">
               <a:rPr lang="en-US" smtClean="0"/>
-              <a:t>15 April 2026</a:t>
+              <a:t>22 April 2026</a:t>
             </a:fld>
             <a:endParaRPr lang="en-US"/>
           </a:p>
@@ -7982,7 +7983,7 @@
           <a:p>
             <a:fld id="{B4B13859-67C5-4393-B6C2-556CF3F770C0}" type="datetime3">
               <a:rPr lang="en-US" smtClean="0"/>
-              <a:t>15 April 2026</a:t>
+              <a:t>22 April 2026</a:t>
             </a:fld>
             <a:endParaRPr lang="en-US"/>
           </a:p>
@@ -8269,7 +8270,7 @@
           <a:p>
             <a:fld id="{B4B13859-67C5-4393-B6C2-556CF3F770C0}" type="datetime3">
               <a:rPr lang="en-US" smtClean="0"/>
-              <a:t>15 April 2026</a:t>
+              <a:t>22 April 2026</a:t>
             </a:fld>
             <a:endParaRPr lang="en-US"/>
           </a:p>
@@ -8427,7 +8428,7 @@
           <a:p>
             <a:fld id="{B4B13859-67C5-4393-B6C2-556CF3F770C0}" type="datetime3">
               <a:rPr lang="en-US" smtClean="0"/>
-              <a:t>15 April 2026</a:t>
+              <a:t>22 April 2026</a:t>
             </a:fld>
             <a:endParaRPr lang="en-US"/>
           </a:p>
@@ -8864,7 +8865,7 @@
           <a:p>
             <a:fld id="{B4B13859-67C5-4393-B6C2-556CF3F770C0}" type="datetime3">
               <a:rPr lang="en-US" smtClean="0"/>
-              <a:t>15 April 2026</a:t>
+              <a:t>22 April 2026</a:t>
             </a:fld>
             <a:endParaRPr lang="en-US"/>
           </a:p>
@@ -9022,7 +9023,7 @@
           <a:p>
             <a:fld id="{B4B13859-67C5-4393-B6C2-556CF3F770C0}" type="datetime3">
               <a:rPr lang="en-US" smtClean="0"/>
-              <a:t>15 April 2026</a:t>
+              <a:t>22 April 2026</a:t>
             </a:fld>
             <a:endParaRPr lang="en-US"/>
           </a:p>
@@ -9259,7 +9260,7 @@
           <a:p>
             <a:fld id="{B4B13859-67C5-4393-B6C2-556CF3F770C0}" type="datetime3">
               <a:rPr lang="en-US" smtClean="0"/>
-              <a:t>15 April 2026</a:t>
+              <a:t>22 April 2026</a:t>
             </a:fld>
             <a:endParaRPr lang="en-US"/>
           </a:p>
@@ -10074,7 +10075,7 @@
           <a:p>
             <a:fld id="{B4B13859-67C5-4393-B6C2-556CF3F770C0}" type="datetime3">
               <a:rPr lang="en-US" smtClean="0"/>
-              <a:t>15 April 2026</a:t>
+              <a:t>22 April 2026</a:t>
             </a:fld>
             <a:endParaRPr lang="en-US"/>
           </a:p>
@@ -10229,7 +10230,7 @@
           <a:p>
             <a:fld id="{80BB22E8-26ED-463F-B679-BA0BC002EC33}" type="datetime3">
               <a:rPr lang="en-US" smtClean="0"/>
-              <a:t>15 April 2026</a:t>
+              <a:t>22 April 2026</a:t>
             </a:fld>
             <a:endParaRPr lang="en-US"/>
           </a:p>
@@ -11116,7 +11117,7 @@
           <a:p>
             <a:fld id="{B4B13859-67C5-4393-B6C2-556CF3F770C0}" type="datetime3">
               <a:rPr lang="en-US" smtClean="0"/>
-              <a:t>15 April 2026</a:t>
+              <a:t>22 April 2026</a:t>
             </a:fld>
             <a:endParaRPr lang="en-US"/>
           </a:p>
@@ -11232,7 +11233,7 @@
           <a:p>
             <a:fld id="{B4B13859-67C5-4393-B6C2-556CF3F770C0}" type="datetime3">
               <a:rPr lang="en-US" smtClean="0"/>
-              <a:t>15 April 2026</a:t>
+              <a:t>22 April 2026</a:t>
             </a:fld>
             <a:endParaRPr lang="en-US"/>
           </a:p>
@@ -11543,7 +11544,7 @@
           <a:p>
             <a:fld id="{B4B13859-67C5-4393-B6C2-556CF3F770C0}" type="datetime3">
               <a:rPr lang="en-US" smtClean="0"/>
-              <a:t>15 April 2026</a:t>
+              <a:t>22 April 2026</a:t>
             </a:fld>
             <a:endParaRPr lang="en-US" dirty="0"/>
           </a:p>
@@ -12289,7 +12290,7 @@
           <a:p>
             <a:fld id="{B4B13859-67C5-4393-B6C2-556CF3F770C0}" type="datetime3">
               <a:rPr lang="en-US" smtClean="0"/>
-              <a:t>15 April 2026</a:t>
+              <a:t>22 April 2026</a:t>
             </a:fld>
             <a:endParaRPr lang="en-US"/>
           </a:p>
@@ -13032,7 +13033,7 @@
           <a:p>
             <a:fld id="{B4B13859-67C5-4393-B6C2-556CF3F770C0}" type="datetime3">
               <a:rPr lang="en-US" smtClean="0"/>
-              <a:t>15 April 2026</a:t>
+              <a:t>22 April 2026</a:t>
             </a:fld>
             <a:endParaRPr lang="en-US"/>
           </a:p>
@@ -13613,7 +13614,7 @@
           <a:p>
             <a:fld id="{B4B13859-67C5-4393-B6C2-556CF3F770C0}" type="datetime3">
               <a:rPr lang="en-US" smtClean="0"/>
-              <a:t>15 April 2026</a:t>
+              <a:t>22 April 2026</a:t>
             </a:fld>
             <a:endParaRPr lang="en-US"/>
           </a:p>
@@ -14232,7 +14233,7 @@
           <a:p>
             <a:fld id="{B4B13859-67C5-4393-B6C2-556CF3F770C0}" type="datetime3">
               <a:rPr lang="en-US" smtClean="0"/>
-              <a:t>15 April 2026</a:t>
+              <a:t>22 April 2026</a:t>
             </a:fld>
             <a:endParaRPr lang="en-US"/>
           </a:p>
@@ -14382,7 +14383,7 @@
           <a:p>
             <a:fld id="{B4B13859-67C5-4393-B6C2-556CF3F770C0}" type="datetime3">
               <a:rPr lang="en-US" smtClean="0"/>
-              <a:t>15 April 2026</a:t>
+              <a:t>22 April 2026</a:t>
             </a:fld>
             <a:endParaRPr lang="en-US"/>
           </a:p>
@@ -14603,7 +14604,7 @@
           <a:p>
             <a:fld id="{B4B13859-67C5-4393-B6C2-556CF3F770C0}" type="datetime3">
               <a:rPr lang="en-US" smtClean="0"/>
-              <a:t>15 April 2026</a:t>
+              <a:t>22 April 2026</a:t>
             </a:fld>
             <a:endParaRPr lang="en-US"/>
           </a:p>
@@ -15314,7 +15315,7 @@
           <a:p>
             <a:fld id="{B4B13859-67C5-4393-B6C2-556CF3F770C0}" type="datetime3">
               <a:rPr lang="en-US" smtClean="0"/>
-              <a:t>15 April 2026</a:t>
+              <a:t>22 April 2026</a:t>
             </a:fld>
             <a:endParaRPr lang="en-US"/>
           </a:p>
@@ -15873,7 +15874,7 @@
           <a:p>
             <a:fld id="{B4B13859-67C5-4393-B6C2-556CF3F770C0}" type="datetime3">
               <a:rPr lang="en-US" smtClean="0"/>
-              <a:t>15 April 2026</a:t>
+              <a:t>22 April 2026</a:t>
             </a:fld>
             <a:endParaRPr lang="en-US"/>
           </a:p>
@@ -16313,7 +16314,7 @@
           <a:p>
             <a:fld id="{B4B13859-67C5-4393-B6C2-556CF3F770C0}" type="datetime3">
               <a:rPr lang="en-US" smtClean="0"/>
-              <a:t>15 April 2026</a:t>
+              <a:t>22 April 2026</a:t>
             </a:fld>
             <a:endParaRPr lang="en-US"/>
           </a:p>
@@ -17018,7 +17019,7 @@
           <a:p>
             <a:fld id="{B4B13859-67C5-4393-B6C2-556CF3F770C0}" type="datetime3">
               <a:rPr lang="en-US" smtClean="0"/>
-              <a:t>15 April 2026</a:t>
+              <a:t>22 April 2026</a:t>
             </a:fld>
             <a:endParaRPr lang="en-US"/>
           </a:p>
@@ -18432,7 +18433,7 @@
           <a:p>
             <a:fld id="{B4B13859-67C5-4393-B6C2-556CF3F770C0}" type="datetime3">
               <a:rPr lang="en-US" smtClean="0"/>
-              <a:t>15 April 2026</a:t>
+              <a:t>22 April 2026</a:t>
             </a:fld>
             <a:endParaRPr lang="en-US"/>
           </a:p>
@@ -18502,6 +18503,2097 @@
           <p:cNvPr id="2" name="Title 1">
             <a:extLst>
               <a:ext uri="{FF2B5EF4-FFF2-40B4-BE49-F238E27FC236}">
+                <a16:creationId xmlns:a16="http://schemas.microsoft.com/office/drawing/2014/main" id="{C3853A16-6119-0BD1-0863-251671A2B60E}"/>
+              </a:ext>
+            </a:extLst>
+          </p:cNvPr>
+          <p:cNvSpPr>
+            <a:spLocks noGrp="1"/>
+          </p:cNvSpPr>
+          <p:nvPr>
+            <p:ph type="title"/>
+          </p:nvPr>
+        </p:nvSpPr>
+        <p:spPr/>
+        <p:txBody>
+          <a:bodyPr/>
+          <a:lstStyle/>
+          <a:p>
+            <a:r>
+              <a:rPr lang="en-US" dirty="0"/>
+              <a:t>Example</a:t>
+            </a:r>
+            <a:endParaRPr lang="en-IN" dirty="0"/>
+          </a:p>
+        </p:txBody>
+      </p:sp>
+      <p:sp>
+        <p:nvSpPr>
+          <p:cNvPr id="3" name="Content Placeholder 2">
+            <a:extLst>
+              <a:ext uri="{FF2B5EF4-FFF2-40B4-BE49-F238E27FC236}">
+                <a16:creationId xmlns:a16="http://schemas.microsoft.com/office/drawing/2014/main" id="{FFA0E9BE-8937-B209-3A09-368E2D2AE78E}"/>
+              </a:ext>
+            </a:extLst>
+          </p:cNvPr>
+          <p:cNvSpPr>
+            <a:spLocks noGrp="1"/>
+          </p:cNvSpPr>
+          <p:nvPr>
+            <p:ph idx="1"/>
+          </p:nvPr>
+        </p:nvSpPr>
+        <p:spPr>
+          <a:xfrm>
+            <a:off x="152400" y="1446211"/>
+            <a:ext cx="5867400" cy="5014912"/>
+          </a:xfrm>
+        </p:spPr>
+        <p:txBody>
+          <a:bodyPr/>
+          <a:lstStyle/>
+          <a:p>
+            <a:r>
+              <a:rPr lang="en-US" sz="2400" dirty="0"/>
+              <a:t>Virtual address space: 64 KB</a:t>
+            </a:r>
+          </a:p>
+          <a:p>
+            <a:r>
+              <a:rPr lang="en-US" sz="2400" dirty="0"/>
+              <a:t>Physical address space: 16 KB</a:t>
+            </a:r>
+          </a:p>
+          <a:p>
+            <a:r>
+              <a:rPr lang="en-US" sz="2400" dirty="0"/>
+              <a:t>Page size: 4 KB</a:t>
+            </a:r>
+          </a:p>
+          <a:p>
+            <a:pPr marL="0" indent="0">
+              <a:buNone/>
+            </a:pPr>
+            <a:endParaRPr lang="en-US" sz="2400" dirty="0"/>
+          </a:p>
+          <a:p>
+            <a:pPr marL="0" indent="0">
+              <a:buNone/>
+            </a:pPr>
+            <a:r>
+              <a:rPr lang="en-US" sz="2400" dirty="0"/>
+              <a:t>Page table for a process (</a:t>
+            </a:r>
+            <a:r>
+              <a:rPr lang="en-US" sz="1800" dirty="0">
+                <a:latin typeface="Cascadia Code" panose="020B0609020000020004" pitchFamily="49" charset="0"/>
+                <a:ea typeface="Cascadia Code" panose="020B0609020000020004" pitchFamily="49" charset="0"/>
+                <a:cs typeface="Cascadia Code" panose="020B0609020000020004" pitchFamily="49" charset="0"/>
+              </a:rPr>
+              <a:t>PTBR = 0x2000</a:t>
+            </a:r>
+            <a:r>
+              <a:rPr lang="en-US" sz="2400" dirty="0"/>
+              <a:t>):</a:t>
+            </a:r>
+          </a:p>
+          <a:p>
+            <a:pPr marL="0" indent="0">
+              <a:buNone/>
+            </a:pPr>
+            <a:endParaRPr lang="en-IN" sz="2400" dirty="0"/>
+          </a:p>
+          <a:p>
+            <a:pPr marL="0" indent="0">
+              <a:buNone/>
+            </a:pPr>
+            <a:r>
+              <a:rPr lang="en-IN" sz="2400" dirty="0"/>
+              <a:t>PT Entry format:</a:t>
+            </a:r>
+          </a:p>
+        </p:txBody>
+      </p:sp>
+      <p:sp>
+        <p:nvSpPr>
+          <p:cNvPr id="4" name="Date Placeholder 3">
+            <a:extLst>
+              <a:ext uri="{FF2B5EF4-FFF2-40B4-BE49-F238E27FC236}">
+                <a16:creationId xmlns:a16="http://schemas.microsoft.com/office/drawing/2014/main" id="{5812A151-2156-4149-8851-E2AE3C17C163}"/>
+              </a:ext>
+            </a:extLst>
+          </p:cNvPr>
+          <p:cNvSpPr>
+            <a:spLocks noGrp="1"/>
+          </p:cNvSpPr>
+          <p:nvPr>
+            <p:ph type="dt" sz="half" idx="10"/>
+          </p:nvPr>
+        </p:nvSpPr>
+        <p:spPr/>
+        <p:txBody>
+          <a:bodyPr/>
+          <a:lstStyle/>
+          <a:p>
+            <a:pPr>
+              <a:defRPr/>
+            </a:pPr>
+            <a:r>
+              <a:rPr lang="en-US"/>
+              <a:t>21/12/2020</a:t>
+            </a:r>
+          </a:p>
+        </p:txBody>
+      </p:sp>
+      <p:sp>
+        <p:nvSpPr>
+          <p:cNvPr id="5" name="Slide Number Placeholder 4">
+            <a:extLst>
+              <a:ext uri="{FF2B5EF4-FFF2-40B4-BE49-F238E27FC236}">
+                <a16:creationId xmlns:a16="http://schemas.microsoft.com/office/drawing/2014/main" id="{8BF55759-0324-583A-865F-0CFB93AD37E9}"/>
+              </a:ext>
+            </a:extLst>
+          </p:cNvPr>
+          <p:cNvSpPr>
+            <a:spLocks noGrp="1"/>
+          </p:cNvSpPr>
+          <p:nvPr>
+            <p:ph type="sldNum" sz="quarter" idx="12"/>
+          </p:nvPr>
+        </p:nvSpPr>
+        <p:spPr/>
+        <p:txBody>
+          <a:bodyPr/>
+          <a:lstStyle/>
+          <a:p>
+            <a:pPr>
+              <a:defRPr/>
+            </a:pPr>
+            <a:fld id="{CA887A73-1AE0-46F8-856A-18EA1CF30A1B}" type="slidenum">
+              <a:rPr lang="en-US" altLang="en-US" smtClean="0"/>
+              <a:pPr>
+                <a:defRPr/>
+              </a:pPr>
+              <a:t>33</a:t>
+            </a:fld>
+            <a:endParaRPr lang="en-US" altLang="en-US"/>
+          </a:p>
+        </p:txBody>
+      </p:sp>
+      <p:graphicFrame>
+        <p:nvGraphicFramePr>
+          <p:cNvPr id="6" name="Table 5">
+            <a:extLst>
+              <a:ext uri="{FF2B5EF4-FFF2-40B4-BE49-F238E27FC236}">
+                <a16:creationId xmlns:a16="http://schemas.microsoft.com/office/drawing/2014/main" id="{3C82A54D-AE82-32E8-63F0-FD4678DF1B1C}"/>
+              </a:ext>
+            </a:extLst>
+          </p:cNvPr>
+          <p:cNvGraphicFramePr>
+            <a:graphicFrameLocks noGrp="1"/>
+          </p:cNvGraphicFramePr>
+          <p:nvPr>
+            <p:extLst>
+              <p:ext uri="{D42A27DB-BD31-4B8C-83A1-F6EECF244321}">
+                <p14:modId xmlns:p14="http://schemas.microsoft.com/office/powerpoint/2010/main" val="660622050"/>
+              </p:ext>
+            </p:extLst>
+          </p:nvPr>
+        </p:nvGraphicFramePr>
+        <p:xfrm>
+          <a:off x="129493" y="4572000"/>
+          <a:ext cx="6324598" cy="853440"/>
+        </p:xfrm>
+        <a:graphic>
+          <a:graphicData uri="http://schemas.openxmlformats.org/drawingml/2006/table">
+            <a:tbl>
+              <a:tblPr/>
+              <a:tblGrid>
+                <a:gridCol w="1394507">
+                  <a:extLst>
+                    <a:ext uri="{9D8B030D-6E8A-4147-A177-3AD203B41FA5}">
+                      <a16:colId xmlns:a16="http://schemas.microsoft.com/office/drawing/2014/main" val="3231488245"/>
+                    </a:ext>
+                  </a:extLst>
+                </a:gridCol>
+                <a:gridCol w="1143000">
+                  <a:extLst>
+                    <a:ext uri="{9D8B030D-6E8A-4147-A177-3AD203B41FA5}">
+                      <a16:colId xmlns:a16="http://schemas.microsoft.com/office/drawing/2014/main" val="2074514989"/>
+                    </a:ext>
+                  </a:extLst>
+                </a:gridCol>
+                <a:gridCol w="1219200">
+                  <a:extLst>
+                    <a:ext uri="{9D8B030D-6E8A-4147-A177-3AD203B41FA5}">
+                      <a16:colId xmlns:a16="http://schemas.microsoft.com/office/drawing/2014/main" val="1495270305"/>
+                    </a:ext>
+                  </a:extLst>
+                </a:gridCol>
+                <a:gridCol w="1295400">
+                  <a:extLst>
+                    <a:ext uri="{9D8B030D-6E8A-4147-A177-3AD203B41FA5}">
+                      <a16:colId xmlns:a16="http://schemas.microsoft.com/office/drawing/2014/main" val="2698488881"/>
+                    </a:ext>
+                  </a:extLst>
+                </a:gridCol>
+                <a:gridCol w="1272491">
+                  <a:extLst>
+                    <a:ext uri="{9D8B030D-6E8A-4147-A177-3AD203B41FA5}">
+                      <a16:colId xmlns:a16="http://schemas.microsoft.com/office/drawing/2014/main" val="3512334544"/>
+                    </a:ext>
+                  </a:extLst>
+                </a:gridCol>
+              </a:tblGrid>
+              <a:tr h="0">
+                <a:tc>
+                  <a:txBody>
+                    <a:bodyPr/>
+                    <a:lstStyle/>
+                    <a:p>
+                      <a:pPr rtl="0">
+                        <a:buNone/>
+                      </a:pPr>
+                      <a:r>
+                        <a:rPr lang="en-IN" b="1" dirty="0">
+                          <a:solidFill>
+                            <a:schemeClr val="tx1">
+                              <a:lumMod val="50000"/>
+                              <a:lumOff val="50000"/>
+                            </a:schemeClr>
+                          </a:solidFill>
+                          <a:effectLst/>
+                          <a:latin typeface="Google Sans Text"/>
+                        </a:rPr>
+                        <a:t>Bits [7:4]</a:t>
+                      </a:r>
+                      <a:endParaRPr lang="en-IN" dirty="0">
+                        <a:solidFill>
+                          <a:schemeClr val="tx1">
+                            <a:lumMod val="50000"/>
+                            <a:lumOff val="50000"/>
+                          </a:schemeClr>
+                        </a:solidFill>
+                        <a:effectLst/>
+                        <a:latin typeface="Google Sans Text"/>
+                      </a:endParaRPr>
+                    </a:p>
+                  </a:txBody>
+                  <a:tcPr marR="57150" marT="76200" marB="76200" anchor="ctr">
+                    <a:lnL w="4763" cap="flat" cmpd="sng" algn="ctr">
+                      <a:solidFill>
+                        <a:schemeClr val="bg1"/>
+                      </a:solidFill>
+                      <a:prstDash val="solid"/>
+                      <a:round/>
+                      <a:headEnd type="none" w="med" len="med"/>
+                      <a:tailEnd type="none" w="med" len="med"/>
+                    </a:lnL>
+                    <a:lnR w="4763" cap="flat" cmpd="sng" algn="ctr">
+                      <a:solidFill>
+                        <a:schemeClr val="bg1"/>
+                      </a:solidFill>
+                      <a:prstDash val="solid"/>
+                      <a:round/>
+                      <a:headEnd type="none" w="med" len="med"/>
+                      <a:tailEnd type="none" w="med" len="med"/>
+                    </a:lnR>
+                    <a:lnT w="4763" cap="flat" cmpd="sng" algn="ctr">
+                      <a:solidFill>
+                        <a:schemeClr val="bg1"/>
+                      </a:solidFill>
+                      <a:prstDash val="solid"/>
+                      <a:round/>
+                      <a:headEnd type="none" w="med" len="med"/>
+                      <a:tailEnd type="none" w="med" len="med"/>
+                    </a:lnT>
+                    <a:lnB w="4763" cap="flat" cmpd="sng" algn="ctr">
+                      <a:solidFill>
+                        <a:schemeClr val="bg1"/>
+                      </a:solidFill>
+                      <a:prstDash val="solid"/>
+                      <a:round/>
+                      <a:headEnd type="none" w="med" len="med"/>
+                      <a:tailEnd type="none" w="med" len="med"/>
+                    </a:lnB>
+                    <a:noFill/>
+                  </a:tcPr>
+                </a:tc>
+                <a:tc>
+                  <a:txBody>
+                    <a:bodyPr/>
+                    <a:lstStyle/>
+                    <a:p>
+                      <a:pPr rtl="0">
+                        <a:buNone/>
+                      </a:pPr>
+                      <a:r>
+                        <a:rPr lang="en-IN" b="1">
+                          <a:solidFill>
+                            <a:schemeClr val="tx1">
+                              <a:lumMod val="50000"/>
+                              <a:lumOff val="50000"/>
+                            </a:schemeClr>
+                          </a:solidFill>
+                          <a:effectLst/>
+                          <a:latin typeface="Google Sans Text"/>
+                        </a:rPr>
+                        <a:t>Bit 3</a:t>
+                      </a:r>
+                      <a:endParaRPr lang="en-IN">
+                        <a:solidFill>
+                          <a:schemeClr val="tx1">
+                            <a:lumMod val="50000"/>
+                            <a:lumOff val="50000"/>
+                          </a:schemeClr>
+                        </a:solidFill>
+                        <a:effectLst/>
+                        <a:latin typeface="Google Sans Text"/>
+                      </a:endParaRPr>
+                    </a:p>
+                  </a:txBody>
+                  <a:tcPr marR="57150" marT="76200" marB="76200" anchor="ctr">
+                    <a:lnL w="4763" cap="flat" cmpd="sng" algn="ctr">
+                      <a:solidFill>
+                        <a:schemeClr val="bg1"/>
+                      </a:solidFill>
+                      <a:prstDash val="solid"/>
+                      <a:round/>
+                      <a:headEnd type="none" w="med" len="med"/>
+                      <a:tailEnd type="none" w="med" len="med"/>
+                    </a:lnL>
+                    <a:lnR w="4763" cap="flat" cmpd="sng" algn="ctr">
+                      <a:solidFill>
+                        <a:schemeClr val="bg1"/>
+                      </a:solidFill>
+                      <a:prstDash val="solid"/>
+                      <a:round/>
+                      <a:headEnd type="none" w="med" len="med"/>
+                      <a:tailEnd type="none" w="med" len="med"/>
+                    </a:lnR>
+                    <a:lnT w="4763" cap="flat" cmpd="sng" algn="ctr">
+                      <a:solidFill>
+                        <a:schemeClr val="bg1"/>
+                      </a:solidFill>
+                      <a:prstDash val="solid"/>
+                      <a:round/>
+                      <a:headEnd type="none" w="med" len="med"/>
+                      <a:tailEnd type="none" w="med" len="med"/>
+                    </a:lnT>
+                    <a:lnB w="4763" cap="flat" cmpd="sng" algn="ctr">
+                      <a:solidFill>
+                        <a:schemeClr val="bg1"/>
+                      </a:solidFill>
+                      <a:prstDash val="solid"/>
+                      <a:round/>
+                      <a:headEnd type="none" w="med" len="med"/>
+                      <a:tailEnd type="none" w="med" len="med"/>
+                    </a:lnB>
+                    <a:noFill/>
+                  </a:tcPr>
+                </a:tc>
+                <a:tc>
+                  <a:txBody>
+                    <a:bodyPr/>
+                    <a:lstStyle/>
+                    <a:p>
+                      <a:pPr rtl="0">
+                        <a:buNone/>
+                      </a:pPr>
+                      <a:r>
+                        <a:rPr lang="en-IN" b="1">
+                          <a:solidFill>
+                            <a:schemeClr val="tx1">
+                              <a:lumMod val="50000"/>
+                              <a:lumOff val="50000"/>
+                            </a:schemeClr>
+                          </a:solidFill>
+                          <a:effectLst/>
+                          <a:latin typeface="Google Sans Text"/>
+                        </a:rPr>
+                        <a:t>Bit 2</a:t>
+                      </a:r>
+                      <a:endParaRPr lang="en-IN">
+                        <a:solidFill>
+                          <a:schemeClr val="tx1">
+                            <a:lumMod val="50000"/>
+                            <a:lumOff val="50000"/>
+                          </a:schemeClr>
+                        </a:solidFill>
+                        <a:effectLst/>
+                        <a:latin typeface="Google Sans Text"/>
+                      </a:endParaRPr>
+                    </a:p>
+                  </a:txBody>
+                  <a:tcPr marR="57150" marT="76200" marB="76200" anchor="ctr">
+                    <a:lnL w="4763" cap="flat" cmpd="sng" algn="ctr">
+                      <a:solidFill>
+                        <a:schemeClr val="bg1"/>
+                      </a:solidFill>
+                      <a:prstDash val="solid"/>
+                      <a:round/>
+                      <a:headEnd type="none" w="med" len="med"/>
+                      <a:tailEnd type="none" w="med" len="med"/>
+                    </a:lnL>
+                    <a:lnR w="4763" cap="flat" cmpd="sng" algn="ctr">
+                      <a:solidFill>
+                        <a:schemeClr val="bg1"/>
+                      </a:solidFill>
+                      <a:prstDash val="solid"/>
+                      <a:round/>
+                      <a:headEnd type="none" w="med" len="med"/>
+                      <a:tailEnd type="none" w="med" len="med"/>
+                    </a:lnR>
+                    <a:lnT w="4763" cap="flat" cmpd="sng" algn="ctr">
+                      <a:solidFill>
+                        <a:schemeClr val="bg1"/>
+                      </a:solidFill>
+                      <a:prstDash val="solid"/>
+                      <a:round/>
+                      <a:headEnd type="none" w="med" len="med"/>
+                      <a:tailEnd type="none" w="med" len="med"/>
+                    </a:lnT>
+                    <a:lnB w="4763" cap="flat" cmpd="sng" algn="ctr">
+                      <a:solidFill>
+                        <a:schemeClr val="bg1"/>
+                      </a:solidFill>
+                      <a:prstDash val="solid"/>
+                      <a:round/>
+                      <a:headEnd type="none" w="med" len="med"/>
+                      <a:tailEnd type="none" w="med" len="med"/>
+                    </a:lnB>
+                    <a:noFill/>
+                  </a:tcPr>
+                </a:tc>
+                <a:tc>
+                  <a:txBody>
+                    <a:bodyPr/>
+                    <a:lstStyle/>
+                    <a:p>
+                      <a:pPr rtl="0">
+                        <a:buNone/>
+                      </a:pPr>
+                      <a:r>
+                        <a:rPr lang="en-IN" b="1">
+                          <a:solidFill>
+                            <a:schemeClr val="tx1">
+                              <a:lumMod val="50000"/>
+                              <a:lumOff val="50000"/>
+                            </a:schemeClr>
+                          </a:solidFill>
+                          <a:effectLst/>
+                          <a:latin typeface="Google Sans Text"/>
+                        </a:rPr>
+                        <a:t>Bit 1</a:t>
+                      </a:r>
+                      <a:endParaRPr lang="en-IN">
+                        <a:solidFill>
+                          <a:schemeClr val="tx1">
+                            <a:lumMod val="50000"/>
+                            <a:lumOff val="50000"/>
+                          </a:schemeClr>
+                        </a:solidFill>
+                        <a:effectLst/>
+                        <a:latin typeface="Google Sans Text"/>
+                      </a:endParaRPr>
+                    </a:p>
+                  </a:txBody>
+                  <a:tcPr marR="57150" marT="76200" marB="76200" anchor="ctr">
+                    <a:lnL w="4763" cap="flat" cmpd="sng" algn="ctr">
+                      <a:solidFill>
+                        <a:schemeClr val="bg1"/>
+                      </a:solidFill>
+                      <a:prstDash val="solid"/>
+                      <a:round/>
+                      <a:headEnd type="none" w="med" len="med"/>
+                      <a:tailEnd type="none" w="med" len="med"/>
+                    </a:lnL>
+                    <a:lnR w="4763" cap="flat" cmpd="sng" algn="ctr">
+                      <a:solidFill>
+                        <a:schemeClr val="bg1"/>
+                      </a:solidFill>
+                      <a:prstDash val="solid"/>
+                      <a:round/>
+                      <a:headEnd type="none" w="med" len="med"/>
+                      <a:tailEnd type="none" w="med" len="med"/>
+                    </a:lnR>
+                    <a:lnT w="4763" cap="flat" cmpd="sng" algn="ctr">
+                      <a:solidFill>
+                        <a:schemeClr val="bg1"/>
+                      </a:solidFill>
+                      <a:prstDash val="solid"/>
+                      <a:round/>
+                      <a:headEnd type="none" w="med" len="med"/>
+                      <a:tailEnd type="none" w="med" len="med"/>
+                    </a:lnT>
+                    <a:lnB w="4763" cap="flat" cmpd="sng" algn="ctr">
+                      <a:solidFill>
+                        <a:schemeClr val="bg1"/>
+                      </a:solidFill>
+                      <a:prstDash val="solid"/>
+                      <a:round/>
+                      <a:headEnd type="none" w="med" len="med"/>
+                      <a:tailEnd type="none" w="med" len="med"/>
+                    </a:lnB>
+                    <a:noFill/>
+                  </a:tcPr>
+                </a:tc>
+                <a:tc>
+                  <a:txBody>
+                    <a:bodyPr/>
+                    <a:lstStyle/>
+                    <a:p>
+                      <a:pPr rtl="0">
+                        <a:buNone/>
+                      </a:pPr>
+                      <a:r>
+                        <a:rPr lang="en-IN" b="1">
+                          <a:solidFill>
+                            <a:schemeClr val="tx1">
+                              <a:lumMod val="50000"/>
+                              <a:lumOff val="50000"/>
+                            </a:schemeClr>
+                          </a:solidFill>
+                          <a:effectLst/>
+                          <a:latin typeface="Google Sans Text"/>
+                        </a:rPr>
+                        <a:t>Bit 0</a:t>
+                      </a:r>
+                      <a:endParaRPr lang="en-IN">
+                        <a:solidFill>
+                          <a:schemeClr val="tx1">
+                            <a:lumMod val="50000"/>
+                            <a:lumOff val="50000"/>
+                          </a:schemeClr>
+                        </a:solidFill>
+                        <a:effectLst/>
+                        <a:latin typeface="Google Sans Text"/>
+                      </a:endParaRPr>
+                    </a:p>
+                  </a:txBody>
+                  <a:tcPr marT="76200" marB="76200" anchor="ctr">
+                    <a:lnL w="4763" cap="flat" cmpd="sng" algn="ctr">
+                      <a:solidFill>
+                        <a:schemeClr val="bg1"/>
+                      </a:solidFill>
+                      <a:prstDash val="solid"/>
+                      <a:round/>
+                      <a:headEnd type="none" w="med" len="med"/>
+                      <a:tailEnd type="none" w="med" len="med"/>
+                    </a:lnL>
+                    <a:lnR w="4763" cap="flat" cmpd="sng" algn="ctr">
+                      <a:solidFill>
+                        <a:schemeClr val="bg1"/>
+                      </a:solidFill>
+                      <a:prstDash val="solid"/>
+                      <a:round/>
+                      <a:headEnd type="none" w="med" len="med"/>
+                      <a:tailEnd type="none" w="med" len="med"/>
+                    </a:lnR>
+                    <a:lnT w="4763" cap="flat" cmpd="sng" algn="ctr">
+                      <a:solidFill>
+                        <a:schemeClr val="bg1"/>
+                      </a:solidFill>
+                      <a:prstDash val="solid"/>
+                      <a:round/>
+                      <a:headEnd type="none" w="med" len="med"/>
+                      <a:tailEnd type="none" w="med" len="med"/>
+                    </a:lnT>
+                    <a:lnB w="4763" cap="flat" cmpd="sng" algn="ctr">
+                      <a:solidFill>
+                        <a:schemeClr val="bg1"/>
+                      </a:solidFill>
+                      <a:prstDash val="solid"/>
+                      <a:round/>
+                      <a:headEnd type="none" w="med" len="med"/>
+                      <a:tailEnd type="none" w="med" len="med"/>
+                    </a:lnB>
+                    <a:noFill/>
+                  </a:tcPr>
+                </a:tc>
+                <a:extLst>
+                  <a:ext uri="{0D108BD9-81ED-4DB2-BD59-A6C34878D82A}">
+                    <a16:rowId xmlns:a16="http://schemas.microsoft.com/office/drawing/2014/main" val="1595683836"/>
+                  </a:ext>
+                </a:extLst>
+              </a:tr>
+              <a:tr h="0">
+                <a:tc>
+                  <a:txBody>
+                    <a:bodyPr/>
+                    <a:lstStyle/>
+                    <a:p>
+                      <a:pPr rtl="0">
+                        <a:buNone/>
+                      </a:pPr>
+                      <a:r>
+                        <a:rPr lang="en-IN" b="1">
+                          <a:solidFill>
+                            <a:schemeClr val="tx1">
+                              <a:lumMod val="50000"/>
+                              <a:lumOff val="50000"/>
+                            </a:schemeClr>
+                          </a:solidFill>
+                          <a:effectLst/>
+                          <a:latin typeface="Google Sans Text"/>
+                        </a:rPr>
+                        <a:t>PPN</a:t>
+                      </a:r>
+                      <a:r>
+                        <a:rPr lang="en-IN">
+                          <a:solidFill>
+                            <a:schemeClr val="tx1">
+                              <a:lumMod val="50000"/>
+                              <a:lumOff val="50000"/>
+                            </a:schemeClr>
+                          </a:solidFill>
+                          <a:effectLst/>
+                          <a:latin typeface="Google Sans Text"/>
+                        </a:rPr>
+                        <a:t> (4 bits)</a:t>
+                      </a:r>
+                    </a:p>
+                  </a:txBody>
+                  <a:tcPr marR="57150" marT="76200" marB="76200" anchor="ctr">
+                    <a:lnL w="4763" cap="flat" cmpd="sng" algn="ctr">
+                      <a:solidFill>
+                        <a:schemeClr val="bg1"/>
+                      </a:solidFill>
+                      <a:prstDash val="solid"/>
+                      <a:round/>
+                      <a:headEnd type="none" w="med" len="med"/>
+                      <a:tailEnd type="none" w="med" len="med"/>
+                    </a:lnL>
+                    <a:lnR w="4763" cap="flat" cmpd="sng" algn="ctr">
+                      <a:solidFill>
+                        <a:schemeClr val="bg1"/>
+                      </a:solidFill>
+                      <a:prstDash val="solid"/>
+                      <a:round/>
+                      <a:headEnd type="none" w="med" len="med"/>
+                      <a:tailEnd type="none" w="med" len="med"/>
+                    </a:lnR>
+                    <a:lnT w="4763" cap="flat" cmpd="sng" algn="ctr">
+                      <a:solidFill>
+                        <a:schemeClr val="bg1"/>
+                      </a:solidFill>
+                      <a:prstDash val="solid"/>
+                      <a:round/>
+                      <a:headEnd type="none" w="med" len="med"/>
+                      <a:tailEnd type="none" w="med" len="med"/>
+                    </a:lnT>
+                    <a:lnB w="4763" cap="flat" cmpd="sng" algn="ctr">
+                      <a:solidFill>
+                        <a:schemeClr val="bg1"/>
+                      </a:solidFill>
+                      <a:prstDash val="solid"/>
+                      <a:round/>
+                      <a:headEnd type="none" w="med" len="med"/>
+                      <a:tailEnd type="none" w="med" len="med"/>
+                    </a:lnB>
+                    <a:noFill/>
+                  </a:tcPr>
+                </a:tc>
+                <a:tc>
+                  <a:txBody>
+                    <a:bodyPr/>
+                    <a:lstStyle/>
+                    <a:p>
+                      <a:pPr rtl="0">
+                        <a:buNone/>
+                      </a:pPr>
+                      <a:r>
+                        <a:rPr lang="en-IN" b="1" dirty="0">
+                          <a:solidFill>
+                            <a:schemeClr val="tx1">
+                              <a:lumMod val="50000"/>
+                              <a:lumOff val="50000"/>
+                            </a:schemeClr>
+                          </a:solidFill>
+                          <a:effectLst/>
+                          <a:latin typeface="Google Sans Text"/>
+                        </a:rPr>
+                        <a:t>R</a:t>
+                      </a:r>
+                      <a:r>
+                        <a:rPr lang="en-IN" dirty="0">
+                          <a:solidFill>
+                            <a:schemeClr val="tx1">
+                              <a:lumMod val="50000"/>
+                              <a:lumOff val="50000"/>
+                            </a:schemeClr>
+                          </a:solidFill>
+                          <a:effectLst/>
+                          <a:latin typeface="Google Sans Text"/>
+                        </a:rPr>
+                        <a:t> (Read)</a:t>
+                      </a:r>
+                    </a:p>
+                  </a:txBody>
+                  <a:tcPr marR="57150" marT="76200" marB="76200" anchor="ctr">
+                    <a:lnL w="4763" cap="flat" cmpd="sng" algn="ctr">
+                      <a:solidFill>
+                        <a:schemeClr val="bg1"/>
+                      </a:solidFill>
+                      <a:prstDash val="solid"/>
+                      <a:round/>
+                      <a:headEnd type="none" w="med" len="med"/>
+                      <a:tailEnd type="none" w="med" len="med"/>
+                    </a:lnL>
+                    <a:lnR w="4763" cap="flat" cmpd="sng" algn="ctr">
+                      <a:solidFill>
+                        <a:schemeClr val="bg1"/>
+                      </a:solidFill>
+                      <a:prstDash val="solid"/>
+                      <a:round/>
+                      <a:headEnd type="none" w="med" len="med"/>
+                      <a:tailEnd type="none" w="med" len="med"/>
+                    </a:lnR>
+                    <a:lnT w="4763" cap="flat" cmpd="sng" algn="ctr">
+                      <a:solidFill>
+                        <a:schemeClr val="bg1"/>
+                      </a:solidFill>
+                      <a:prstDash val="solid"/>
+                      <a:round/>
+                      <a:headEnd type="none" w="med" len="med"/>
+                      <a:tailEnd type="none" w="med" len="med"/>
+                    </a:lnT>
+                    <a:lnB w="4763" cap="flat" cmpd="sng" algn="ctr">
+                      <a:solidFill>
+                        <a:schemeClr val="bg1"/>
+                      </a:solidFill>
+                      <a:prstDash val="solid"/>
+                      <a:round/>
+                      <a:headEnd type="none" w="med" len="med"/>
+                      <a:tailEnd type="none" w="med" len="med"/>
+                    </a:lnB>
+                    <a:noFill/>
+                  </a:tcPr>
+                </a:tc>
+                <a:tc>
+                  <a:txBody>
+                    <a:bodyPr/>
+                    <a:lstStyle/>
+                    <a:p>
+                      <a:pPr rtl="0">
+                        <a:buNone/>
+                      </a:pPr>
+                      <a:r>
+                        <a:rPr lang="en-IN" b="1">
+                          <a:solidFill>
+                            <a:schemeClr val="tx1">
+                              <a:lumMod val="50000"/>
+                              <a:lumOff val="50000"/>
+                            </a:schemeClr>
+                          </a:solidFill>
+                          <a:effectLst/>
+                          <a:latin typeface="Google Sans Text"/>
+                        </a:rPr>
+                        <a:t>W</a:t>
+                      </a:r>
+                      <a:r>
+                        <a:rPr lang="en-IN">
+                          <a:solidFill>
+                            <a:schemeClr val="tx1">
+                              <a:lumMod val="50000"/>
+                              <a:lumOff val="50000"/>
+                            </a:schemeClr>
+                          </a:solidFill>
+                          <a:effectLst/>
+                          <a:latin typeface="Google Sans Text"/>
+                        </a:rPr>
+                        <a:t> (Write)</a:t>
+                      </a:r>
+                    </a:p>
+                  </a:txBody>
+                  <a:tcPr marR="57150" marT="76200" marB="76200" anchor="ctr">
+                    <a:lnL w="4763" cap="flat" cmpd="sng" algn="ctr">
+                      <a:solidFill>
+                        <a:schemeClr val="bg1"/>
+                      </a:solidFill>
+                      <a:prstDash val="solid"/>
+                      <a:round/>
+                      <a:headEnd type="none" w="med" len="med"/>
+                      <a:tailEnd type="none" w="med" len="med"/>
+                    </a:lnL>
+                    <a:lnR w="4763" cap="flat" cmpd="sng" algn="ctr">
+                      <a:solidFill>
+                        <a:schemeClr val="bg1"/>
+                      </a:solidFill>
+                      <a:prstDash val="solid"/>
+                      <a:round/>
+                      <a:headEnd type="none" w="med" len="med"/>
+                      <a:tailEnd type="none" w="med" len="med"/>
+                    </a:lnR>
+                    <a:lnT w="4763" cap="flat" cmpd="sng" algn="ctr">
+                      <a:solidFill>
+                        <a:schemeClr val="bg1"/>
+                      </a:solidFill>
+                      <a:prstDash val="solid"/>
+                      <a:round/>
+                      <a:headEnd type="none" w="med" len="med"/>
+                      <a:tailEnd type="none" w="med" len="med"/>
+                    </a:lnT>
+                    <a:lnB w="4763" cap="flat" cmpd="sng" algn="ctr">
+                      <a:solidFill>
+                        <a:schemeClr val="bg1"/>
+                      </a:solidFill>
+                      <a:prstDash val="solid"/>
+                      <a:round/>
+                      <a:headEnd type="none" w="med" len="med"/>
+                      <a:tailEnd type="none" w="med" len="med"/>
+                    </a:lnB>
+                    <a:noFill/>
+                  </a:tcPr>
+                </a:tc>
+                <a:tc>
+                  <a:txBody>
+                    <a:bodyPr/>
+                    <a:lstStyle/>
+                    <a:p>
+                      <a:pPr rtl="0">
+                        <a:buNone/>
+                      </a:pPr>
+                      <a:r>
+                        <a:rPr lang="en-IN" b="1">
+                          <a:solidFill>
+                            <a:schemeClr val="tx1">
+                              <a:lumMod val="50000"/>
+                              <a:lumOff val="50000"/>
+                            </a:schemeClr>
+                          </a:solidFill>
+                          <a:effectLst/>
+                          <a:latin typeface="Google Sans Text"/>
+                        </a:rPr>
+                        <a:t>X</a:t>
+                      </a:r>
+                      <a:r>
+                        <a:rPr lang="en-IN">
+                          <a:solidFill>
+                            <a:schemeClr val="tx1">
+                              <a:lumMod val="50000"/>
+                              <a:lumOff val="50000"/>
+                            </a:schemeClr>
+                          </a:solidFill>
+                          <a:effectLst/>
+                          <a:latin typeface="Google Sans Text"/>
+                        </a:rPr>
+                        <a:t> (Execute)</a:t>
+                      </a:r>
+                    </a:p>
+                  </a:txBody>
+                  <a:tcPr marR="57150" marT="76200" marB="76200" anchor="ctr">
+                    <a:lnL w="4763" cap="flat" cmpd="sng" algn="ctr">
+                      <a:solidFill>
+                        <a:schemeClr val="bg1"/>
+                      </a:solidFill>
+                      <a:prstDash val="solid"/>
+                      <a:round/>
+                      <a:headEnd type="none" w="med" len="med"/>
+                      <a:tailEnd type="none" w="med" len="med"/>
+                    </a:lnL>
+                    <a:lnR w="4763" cap="flat" cmpd="sng" algn="ctr">
+                      <a:solidFill>
+                        <a:schemeClr val="bg1"/>
+                      </a:solidFill>
+                      <a:prstDash val="solid"/>
+                      <a:round/>
+                      <a:headEnd type="none" w="med" len="med"/>
+                      <a:tailEnd type="none" w="med" len="med"/>
+                    </a:lnR>
+                    <a:lnT w="4763" cap="flat" cmpd="sng" algn="ctr">
+                      <a:solidFill>
+                        <a:schemeClr val="bg1"/>
+                      </a:solidFill>
+                      <a:prstDash val="solid"/>
+                      <a:round/>
+                      <a:headEnd type="none" w="med" len="med"/>
+                      <a:tailEnd type="none" w="med" len="med"/>
+                    </a:lnT>
+                    <a:lnB w="4763" cap="flat" cmpd="sng" algn="ctr">
+                      <a:solidFill>
+                        <a:schemeClr val="bg1"/>
+                      </a:solidFill>
+                      <a:prstDash val="solid"/>
+                      <a:round/>
+                      <a:headEnd type="none" w="med" len="med"/>
+                      <a:tailEnd type="none" w="med" len="med"/>
+                    </a:lnB>
+                    <a:noFill/>
+                  </a:tcPr>
+                </a:tc>
+                <a:tc>
+                  <a:txBody>
+                    <a:bodyPr/>
+                    <a:lstStyle/>
+                    <a:p>
+                      <a:pPr rtl="0">
+                        <a:buNone/>
+                      </a:pPr>
+                      <a:r>
+                        <a:rPr lang="en-IN" b="1" dirty="0">
+                          <a:solidFill>
+                            <a:schemeClr val="tx1">
+                              <a:lumMod val="50000"/>
+                              <a:lumOff val="50000"/>
+                            </a:schemeClr>
+                          </a:solidFill>
+                          <a:effectLst/>
+                          <a:latin typeface="Google Sans Text"/>
+                        </a:rPr>
+                        <a:t>V</a:t>
+                      </a:r>
+                      <a:r>
+                        <a:rPr lang="en-IN" dirty="0">
+                          <a:solidFill>
+                            <a:schemeClr val="tx1">
+                              <a:lumMod val="50000"/>
+                              <a:lumOff val="50000"/>
+                            </a:schemeClr>
+                          </a:solidFill>
+                          <a:effectLst/>
+                          <a:latin typeface="Google Sans Text"/>
+                        </a:rPr>
+                        <a:t> (Valid)</a:t>
+                      </a:r>
+                    </a:p>
+                  </a:txBody>
+                  <a:tcPr marT="76200" marB="76200" anchor="ctr">
+                    <a:lnL w="4763" cap="flat" cmpd="sng" algn="ctr">
+                      <a:solidFill>
+                        <a:schemeClr val="bg1"/>
+                      </a:solidFill>
+                      <a:prstDash val="solid"/>
+                      <a:round/>
+                      <a:headEnd type="none" w="med" len="med"/>
+                      <a:tailEnd type="none" w="med" len="med"/>
+                    </a:lnL>
+                    <a:lnR w="4763" cap="flat" cmpd="sng" algn="ctr">
+                      <a:solidFill>
+                        <a:schemeClr val="bg1"/>
+                      </a:solidFill>
+                      <a:prstDash val="solid"/>
+                      <a:round/>
+                      <a:headEnd type="none" w="med" len="med"/>
+                      <a:tailEnd type="none" w="med" len="med"/>
+                    </a:lnR>
+                    <a:lnT w="4763" cap="flat" cmpd="sng" algn="ctr">
+                      <a:solidFill>
+                        <a:schemeClr val="bg1"/>
+                      </a:solidFill>
+                      <a:prstDash val="solid"/>
+                      <a:round/>
+                      <a:headEnd type="none" w="med" len="med"/>
+                      <a:tailEnd type="none" w="med" len="med"/>
+                    </a:lnT>
+                    <a:lnB w="4763" cap="flat" cmpd="sng" algn="ctr">
+                      <a:solidFill>
+                        <a:schemeClr val="bg1"/>
+                      </a:solidFill>
+                      <a:prstDash val="solid"/>
+                      <a:round/>
+                      <a:headEnd type="none" w="med" len="med"/>
+                      <a:tailEnd type="none" w="med" len="med"/>
+                    </a:lnB>
+                    <a:noFill/>
+                  </a:tcPr>
+                </a:tc>
+                <a:extLst>
+                  <a:ext uri="{0D108BD9-81ED-4DB2-BD59-A6C34878D82A}">
+                    <a16:rowId xmlns:a16="http://schemas.microsoft.com/office/drawing/2014/main" val="2079749567"/>
+                  </a:ext>
+                </a:extLst>
+              </a:tr>
+            </a:tbl>
+          </a:graphicData>
+        </a:graphic>
+      </p:graphicFrame>
+      <p:graphicFrame>
+        <p:nvGraphicFramePr>
+          <p:cNvPr id="7" name="Table 6">
+            <a:extLst>
+              <a:ext uri="{FF2B5EF4-FFF2-40B4-BE49-F238E27FC236}">
+                <a16:creationId xmlns:a16="http://schemas.microsoft.com/office/drawing/2014/main" id="{18B24EE8-55F6-DF21-0717-9E7C5BEEB98C}"/>
+              </a:ext>
+            </a:extLst>
+          </p:cNvPr>
+          <p:cNvGraphicFramePr>
+            <a:graphicFrameLocks noGrp="1"/>
+          </p:cNvGraphicFramePr>
+          <p:nvPr>
+            <p:extLst>
+              <p:ext uri="{D42A27DB-BD31-4B8C-83A1-F6EECF244321}">
+                <p14:modId xmlns:p14="http://schemas.microsoft.com/office/powerpoint/2010/main" val="2415586918"/>
+              </p:ext>
+            </p:extLst>
+          </p:nvPr>
+        </p:nvGraphicFramePr>
+        <p:xfrm>
+          <a:off x="6553200" y="1451821"/>
+          <a:ext cx="1981199" cy="4968240"/>
+        </p:xfrm>
+        <a:graphic>
+          <a:graphicData uri="http://schemas.openxmlformats.org/drawingml/2006/table">
+            <a:tbl>
+              <a:tblPr>
+                <a:tableStyleId>{073A0DAA-6AF3-43AB-8588-CEC1D06C72B9}</a:tableStyleId>
+              </a:tblPr>
+              <a:tblGrid>
+                <a:gridCol w="914399">
+                  <a:extLst>
+                    <a:ext uri="{9D8B030D-6E8A-4147-A177-3AD203B41FA5}">
+                      <a16:colId xmlns:a16="http://schemas.microsoft.com/office/drawing/2014/main" val="2224055261"/>
+                    </a:ext>
+                  </a:extLst>
+                </a:gridCol>
+                <a:gridCol w="1066800">
+                  <a:extLst>
+                    <a:ext uri="{9D8B030D-6E8A-4147-A177-3AD203B41FA5}">
+                      <a16:colId xmlns:a16="http://schemas.microsoft.com/office/drawing/2014/main" val="1976489020"/>
+                    </a:ext>
+                  </a:extLst>
+                </a:gridCol>
+              </a:tblGrid>
+              <a:tr h="426720">
+                <a:tc>
+                  <a:txBody>
+                    <a:bodyPr/>
+                    <a:lstStyle/>
+                    <a:p>
+                      <a:pPr rtl="0">
+                        <a:buNone/>
+                      </a:pPr>
+                      <a:r>
+                        <a:rPr lang="en-IN" sz="1800" b="1">
+                          <a:ln>
+                            <a:noFill/>
+                          </a:ln>
+                          <a:solidFill>
+                            <a:schemeClr val="tx1">
+                              <a:lumMod val="50000"/>
+                              <a:lumOff val="50000"/>
+                            </a:schemeClr>
+                          </a:solidFill>
+                          <a:effectLst/>
+                        </a:rPr>
+                        <a:t>Physical Address</a:t>
+                      </a:r>
+                      <a:endParaRPr lang="en-IN" sz="1800" b="1">
+                        <a:ln>
+                          <a:noFill/>
+                        </a:ln>
+                        <a:solidFill>
+                          <a:schemeClr val="tx1">
+                            <a:lumMod val="50000"/>
+                            <a:lumOff val="50000"/>
+                          </a:schemeClr>
+                        </a:solidFill>
+                        <a:effectLst/>
+                        <a:latin typeface="Google Sans Text"/>
+                      </a:endParaRPr>
+                    </a:p>
+                  </a:txBody>
+                  <a:tcPr marR="57150" marT="76200" marB="76200" anchor="ctr"/>
+                </a:tc>
+                <a:tc>
+                  <a:txBody>
+                    <a:bodyPr/>
+                    <a:lstStyle/>
+                    <a:p>
+                      <a:pPr algn="r" rtl="0">
+                        <a:buNone/>
+                      </a:pPr>
+                      <a:r>
+                        <a:rPr lang="en-IN" sz="1800" b="1" dirty="0">
+                          <a:ln>
+                            <a:noFill/>
+                          </a:ln>
+                          <a:solidFill>
+                            <a:schemeClr val="tx1">
+                              <a:lumMod val="50000"/>
+                              <a:lumOff val="50000"/>
+                            </a:schemeClr>
+                          </a:solidFill>
+                          <a:effectLst/>
+                        </a:rPr>
+                        <a:t>Data (Hex)</a:t>
+                      </a:r>
+                      <a:endParaRPr lang="en-IN" sz="1800" b="1" dirty="0">
+                        <a:ln>
+                          <a:noFill/>
+                        </a:ln>
+                        <a:solidFill>
+                          <a:schemeClr val="tx1">
+                            <a:lumMod val="50000"/>
+                            <a:lumOff val="50000"/>
+                          </a:schemeClr>
+                        </a:solidFill>
+                        <a:effectLst/>
+                        <a:latin typeface="Google Sans Text"/>
+                      </a:endParaRPr>
+                    </a:p>
+                  </a:txBody>
+                  <a:tcPr marR="57150" marT="76200" marB="76200" anchor="ctr"/>
+                </a:tc>
+                <a:extLst>
+                  <a:ext uri="{0D108BD9-81ED-4DB2-BD59-A6C34878D82A}">
+                    <a16:rowId xmlns:a16="http://schemas.microsoft.com/office/drawing/2014/main" val="2246725849"/>
+                  </a:ext>
+                </a:extLst>
+              </a:tr>
+              <a:tr h="426720">
+                <a:tc>
+                  <a:txBody>
+                    <a:bodyPr/>
+                    <a:lstStyle/>
+                    <a:p>
+                      <a:pPr rtl="0">
+                        <a:buNone/>
+                      </a:pPr>
+                      <a:r>
+                        <a:rPr lang="en-IN" sz="1800" b="1">
+                          <a:ln>
+                            <a:noFill/>
+                          </a:ln>
+                          <a:solidFill>
+                            <a:schemeClr val="tx1">
+                              <a:lumMod val="50000"/>
+                              <a:lumOff val="50000"/>
+                            </a:schemeClr>
+                          </a:solidFill>
+                          <a:effectLst/>
+                        </a:rPr>
+                        <a:t>0x1ABC</a:t>
+                      </a:r>
+                      <a:endParaRPr lang="en-IN" sz="1800" b="1">
+                        <a:ln>
+                          <a:noFill/>
+                        </a:ln>
+                        <a:solidFill>
+                          <a:schemeClr val="tx1">
+                            <a:lumMod val="50000"/>
+                            <a:lumOff val="50000"/>
+                          </a:schemeClr>
+                        </a:solidFill>
+                        <a:effectLst/>
+                        <a:latin typeface="Google Sans Text"/>
+                      </a:endParaRPr>
+                    </a:p>
+                  </a:txBody>
+                  <a:tcPr marR="57150" marT="76200" marB="76200" anchor="ctr"/>
+                </a:tc>
+                <a:tc>
+                  <a:txBody>
+                    <a:bodyPr/>
+                    <a:lstStyle/>
+                    <a:p>
+                      <a:pPr algn="r" rtl="0">
+                        <a:buNone/>
+                      </a:pPr>
+                      <a:r>
+                        <a:rPr lang="en-IN" sz="1800" b="1" dirty="0">
+                          <a:ln>
+                            <a:noFill/>
+                          </a:ln>
+                          <a:solidFill>
+                            <a:schemeClr val="tx1">
+                              <a:lumMod val="50000"/>
+                              <a:lumOff val="50000"/>
+                            </a:schemeClr>
+                          </a:solidFill>
+                          <a:effectLst/>
+                        </a:rPr>
+                        <a:t>0xDE</a:t>
+                      </a:r>
+                      <a:endParaRPr lang="en-IN" sz="1800" b="1" dirty="0">
+                        <a:ln>
+                          <a:noFill/>
+                        </a:ln>
+                        <a:solidFill>
+                          <a:schemeClr val="tx1">
+                            <a:lumMod val="50000"/>
+                            <a:lumOff val="50000"/>
+                          </a:schemeClr>
+                        </a:solidFill>
+                        <a:effectLst/>
+                        <a:latin typeface="Google Sans Text"/>
+                      </a:endParaRPr>
+                    </a:p>
+                  </a:txBody>
+                  <a:tcPr marR="57150" marT="76200" marB="76200" anchor="ctr"/>
+                </a:tc>
+                <a:extLst>
+                  <a:ext uri="{0D108BD9-81ED-4DB2-BD59-A6C34878D82A}">
+                    <a16:rowId xmlns:a16="http://schemas.microsoft.com/office/drawing/2014/main" val="524804924"/>
+                  </a:ext>
+                </a:extLst>
+              </a:tr>
+              <a:tr h="426720">
+                <a:tc>
+                  <a:txBody>
+                    <a:bodyPr/>
+                    <a:lstStyle/>
+                    <a:p>
+                      <a:pPr rtl="0">
+                        <a:buNone/>
+                      </a:pPr>
+                      <a:r>
+                        <a:rPr lang="en-IN" sz="1800" b="1">
+                          <a:ln>
+                            <a:noFill/>
+                          </a:ln>
+                          <a:solidFill>
+                            <a:schemeClr val="tx1">
+                              <a:lumMod val="50000"/>
+                              <a:lumOff val="50000"/>
+                            </a:schemeClr>
+                          </a:solidFill>
+                          <a:effectLst/>
+                        </a:rPr>
+                        <a:t>0x1ABD</a:t>
+                      </a:r>
+                      <a:endParaRPr lang="en-IN" sz="1800" b="1">
+                        <a:ln>
+                          <a:noFill/>
+                        </a:ln>
+                        <a:solidFill>
+                          <a:schemeClr val="tx1">
+                            <a:lumMod val="50000"/>
+                            <a:lumOff val="50000"/>
+                          </a:schemeClr>
+                        </a:solidFill>
+                        <a:effectLst/>
+                        <a:latin typeface="Google Sans Text"/>
+                      </a:endParaRPr>
+                    </a:p>
+                  </a:txBody>
+                  <a:tcPr marR="57150" marT="76200" marB="76200" anchor="ctr"/>
+                </a:tc>
+                <a:tc>
+                  <a:txBody>
+                    <a:bodyPr/>
+                    <a:lstStyle/>
+                    <a:p>
+                      <a:pPr algn="r" rtl="0">
+                        <a:buNone/>
+                      </a:pPr>
+                      <a:r>
+                        <a:rPr lang="en-IN" sz="1800" b="1" dirty="0">
+                          <a:ln>
+                            <a:noFill/>
+                          </a:ln>
+                          <a:solidFill>
+                            <a:schemeClr val="tx1">
+                              <a:lumMod val="50000"/>
+                              <a:lumOff val="50000"/>
+                            </a:schemeClr>
+                          </a:solidFill>
+                          <a:effectLst/>
+                        </a:rPr>
+                        <a:t>0xBE</a:t>
+                      </a:r>
+                      <a:endParaRPr lang="en-IN" sz="1800" b="1" dirty="0">
+                        <a:ln>
+                          <a:noFill/>
+                        </a:ln>
+                        <a:solidFill>
+                          <a:schemeClr val="tx1">
+                            <a:lumMod val="50000"/>
+                            <a:lumOff val="50000"/>
+                          </a:schemeClr>
+                        </a:solidFill>
+                        <a:effectLst/>
+                        <a:latin typeface="Google Sans Text"/>
+                      </a:endParaRPr>
+                    </a:p>
+                  </a:txBody>
+                  <a:tcPr marR="57150" marT="76200" marB="76200" anchor="ctr"/>
+                </a:tc>
+                <a:extLst>
+                  <a:ext uri="{0D108BD9-81ED-4DB2-BD59-A6C34878D82A}">
+                    <a16:rowId xmlns:a16="http://schemas.microsoft.com/office/drawing/2014/main" val="1837368384"/>
+                  </a:ext>
+                </a:extLst>
+              </a:tr>
+              <a:tr h="426720">
+                <a:tc>
+                  <a:txBody>
+                    <a:bodyPr/>
+                    <a:lstStyle/>
+                    <a:p>
+                      <a:pPr rtl="0">
+                        <a:buNone/>
+                      </a:pPr>
+                      <a:r>
+                        <a:rPr lang="en-IN" sz="1800" b="1">
+                          <a:ln>
+                            <a:noFill/>
+                          </a:ln>
+                          <a:solidFill>
+                            <a:schemeClr val="tx1">
+                              <a:lumMod val="50000"/>
+                              <a:lumOff val="50000"/>
+                            </a:schemeClr>
+                          </a:solidFill>
+                          <a:effectLst/>
+                        </a:rPr>
+                        <a:t>...</a:t>
+                      </a:r>
+                      <a:endParaRPr lang="en-IN" sz="1800" b="1">
+                        <a:ln>
+                          <a:noFill/>
+                        </a:ln>
+                        <a:solidFill>
+                          <a:schemeClr val="tx1">
+                            <a:lumMod val="50000"/>
+                            <a:lumOff val="50000"/>
+                          </a:schemeClr>
+                        </a:solidFill>
+                        <a:effectLst/>
+                        <a:latin typeface="Google Sans Text"/>
+                      </a:endParaRPr>
+                    </a:p>
+                  </a:txBody>
+                  <a:tcPr marR="57150" marT="76200" marB="76200" anchor="ctr"/>
+                </a:tc>
+                <a:tc>
+                  <a:txBody>
+                    <a:bodyPr/>
+                    <a:lstStyle/>
+                    <a:p>
+                      <a:pPr algn="r" rtl="0">
+                        <a:buNone/>
+                      </a:pPr>
+                      <a:r>
+                        <a:rPr lang="en-IN" sz="1800" b="1" dirty="0">
+                          <a:ln>
+                            <a:noFill/>
+                          </a:ln>
+                          <a:solidFill>
+                            <a:schemeClr val="tx1">
+                              <a:lumMod val="50000"/>
+                              <a:lumOff val="50000"/>
+                            </a:schemeClr>
+                          </a:solidFill>
+                          <a:effectLst/>
+                        </a:rPr>
+                        <a:t>...</a:t>
+                      </a:r>
+                      <a:endParaRPr lang="en-IN" sz="1800" b="1" dirty="0">
+                        <a:ln>
+                          <a:noFill/>
+                        </a:ln>
+                        <a:solidFill>
+                          <a:schemeClr val="tx1">
+                            <a:lumMod val="50000"/>
+                            <a:lumOff val="50000"/>
+                          </a:schemeClr>
+                        </a:solidFill>
+                        <a:effectLst/>
+                        <a:latin typeface="Google Sans Text"/>
+                      </a:endParaRPr>
+                    </a:p>
+                  </a:txBody>
+                  <a:tcPr marR="57150" marT="76200" marB="76200" anchor="ctr"/>
+                </a:tc>
+                <a:extLst>
+                  <a:ext uri="{0D108BD9-81ED-4DB2-BD59-A6C34878D82A}">
+                    <a16:rowId xmlns:a16="http://schemas.microsoft.com/office/drawing/2014/main" val="961545377"/>
+                  </a:ext>
+                </a:extLst>
+              </a:tr>
+              <a:tr h="426720">
+                <a:tc>
+                  <a:txBody>
+                    <a:bodyPr/>
+                    <a:lstStyle/>
+                    <a:p>
+                      <a:pPr rtl="0">
+                        <a:buNone/>
+                      </a:pPr>
+                      <a:r>
+                        <a:rPr lang="en-IN" sz="1800" b="1">
+                          <a:ln>
+                            <a:noFill/>
+                          </a:ln>
+                          <a:solidFill>
+                            <a:schemeClr val="tx1">
+                              <a:lumMod val="50000"/>
+                              <a:lumOff val="50000"/>
+                            </a:schemeClr>
+                          </a:solidFill>
+                          <a:effectLst/>
+                        </a:rPr>
+                        <a:t>0x2000</a:t>
+                      </a:r>
+                      <a:endParaRPr lang="en-IN" sz="1800" b="1">
+                        <a:ln>
+                          <a:noFill/>
+                        </a:ln>
+                        <a:solidFill>
+                          <a:schemeClr val="tx1">
+                            <a:lumMod val="50000"/>
+                            <a:lumOff val="50000"/>
+                          </a:schemeClr>
+                        </a:solidFill>
+                        <a:effectLst/>
+                        <a:latin typeface="Google Sans Text"/>
+                      </a:endParaRPr>
+                    </a:p>
+                  </a:txBody>
+                  <a:tcPr marR="57150" marT="76200" marB="76200" anchor="ctr"/>
+                </a:tc>
+                <a:tc>
+                  <a:txBody>
+                    <a:bodyPr/>
+                    <a:lstStyle/>
+                    <a:p>
+                      <a:pPr algn="r" rtl="0">
+                        <a:buNone/>
+                      </a:pPr>
+                      <a:r>
+                        <a:rPr lang="en-IN" sz="1800" b="1" dirty="0">
+                          <a:ln>
+                            <a:noFill/>
+                          </a:ln>
+                          <a:solidFill>
+                            <a:schemeClr val="tx1">
+                              <a:lumMod val="50000"/>
+                              <a:lumOff val="50000"/>
+                            </a:schemeClr>
+                          </a:solidFill>
+                          <a:effectLst/>
+                        </a:rPr>
+                        <a:t>0x29</a:t>
+                      </a:r>
+                      <a:endParaRPr lang="en-IN" sz="1800" b="1" dirty="0">
+                        <a:ln>
+                          <a:noFill/>
+                        </a:ln>
+                        <a:solidFill>
+                          <a:schemeClr val="tx1">
+                            <a:lumMod val="50000"/>
+                            <a:lumOff val="50000"/>
+                          </a:schemeClr>
+                        </a:solidFill>
+                        <a:effectLst/>
+                        <a:latin typeface="Google Sans Text"/>
+                      </a:endParaRPr>
+                    </a:p>
+                  </a:txBody>
+                  <a:tcPr marR="57150" marT="76200" marB="76200" anchor="ctr"/>
+                </a:tc>
+                <a:extLst>
+                  <a:ext uri="{0D108BD9-81ED-4DB2-BD59-A6C34878D82A}">
+                    <a16:rowId xmlns:a16="http://schemas.microsoft.com/office/drawing/2014/main" val="1109901606"/>
+                  </a:ext>
+                </a:extLst>
+              </a:tr>
+              <a:tr h="426720">
+                <a:tc>
+                  <a:txBody>
+                    <a:bodyPr/>
+                    <a:lstStyle/>
+                    <a:p>
+                      <a:pPr rtl="0">
+                        <a:buNone/>
+                      </a:pPr>
+                      <a:r>
+                        <a:rPr lang="en-IN" sz="1800" b="1" dirty="0">
+                          <a:ln>
+                            <a:noFill/>
+                          </a:ln>
+                          <a:solidFill>
+                            <a:schemeClr val="tx1">
+                              <a:lumMod val="50000"/>
+                              <a:lumOff val="50000"/>
+                            </a:schemeClr>
+                          </a:solidFill>
+                          <a:effectLst/>
+                        </a:rPr>
+                        <a:t>0x2001</a:t>
+                      </a:r>
+                      <a:endParaRPr lang="en-IN" sz="1800" b="1" dirty="0">
+                        <a:ln>
+                          <a:noFill/>
+                        </a:ln>
+                        <a:solidFill>
+                          <a:schemeClr val="tx1">
+                            <a:lumMod val="50000"/>
+                            <a:lumOff val="50000"/>
+                          </a:schemeClr>
+                        </a:solidFill>
+                        <a:effectLst/>
+                        <a:latin typeface="Google Sans Text"/>
+                      </a:endParaRPr>
+                    </a:p>
+                  </a:txBody>
+                  <a:tcPr marR="57150" marT="76200" marB="76200" anchor="ctr"/>
+                </a:tc>
+                <a:tc>
+                  <a:txBody>
+                    <a:bodyPr/>
+                    <a:lstStyle/>
+                    <a:p>
+                      <a:pPr algn="r" rtl="0">
+                        <a:buNone/>
+                      </a:pPr>
+                      <a:r>
+                        <a:rPr lang="en-IN" sz="1800" b="1" dirty="0">
+                          <a:ln>
+                            <a:noFill/>
+                          </a:ln>
+                          <a:solidFill>
+                            <a:schemeClr val="tx1">
+                              <a:lumMod val="50000"/>
+                              <a:lumOff val="50000"/>
+                            </a:schemeClr>
+                          </a:solidFill>
+                          <a:effectLst/>
+                        </a:rPr>
+                        <a:t>0x5D</a:t>
+                      </a:r>
+                      <a:endParaRPr lang="en-IN" sz="1800" b="1" dirty="0">
+                        <a:ln>
+                          <a:noFill/>
+                        </a:ln>
+                        <a:solidFill>
+                          <a:schemeClr val="tx1">
+                            <a:lumMod val="50000"/>
+                            <a:lumOff val="50000"/>
+                          </a:schemeClr>
+                        </a:solidFill>
+                        <a:effectLst/>
+                        <a:latin typeface="Google Sans Text"/>
+                      </a:endParaRPr>
+                    </a:p>
+                  </a:txBody>
+                  <a:tcPr marR="57150" marT="76200" marB="76200" anchor="ctr"/>
+                </a:tc>
+                <a:extLst>
+                  <a:ext uri="{0D108BD9-81ED-4DB2-BD59-A6C34878D82A}">
+                    <a16:rowId xmlns:a16="http://schemas.microsoft.com/office/drawing/2014/main" val="2100264396"/>
+                  </a:ext>
+                </a:extLst>
+              </a:tr>
+              <a:tr h="426720">
+                <a:tc>
+                  <a:txBody>
+                    <a:bodyPr/>
+                    <a:lstStyle/>
+                    <a:p>
+                      <a:pPr rtl="0">
+                        <a:buNone/>
+                      </a:pPr>
+                      <a:r>
+                        <a:rPr lang="en-IN" sz="1800" b="1" dirty="0">
+                          <a:ln>
+                            <a:noFill/>
+                          </a:ln>
+                          <a:solidFill>
+                            <a:schemeClr val="tx1">
+                              <a:lumMod val="50000"/>
+                              <a:lumOff val="50000"/>
+                            </a:schemeClr>
+                          </a:solidFill>
+                          <a:effectLst/>
+                        </a:rPr>
+                        <a:t>0x2002</a:t>
+                      </a:r>
+                      <a:endParaRPr lang="en-IN" sz="1800" b="1" dirty="0">
+                        <a:ln>
+                          <a:noFill/>
+                        </a:ln>
+                        <a:solidFill>
+                          <a:schemeClr val="tx1">
+                            <a:lumMod val="50000"/>
+                            <a:lumOff val="50000"/>
+                          </a:schemeClr>
+                        </a:solidFill>
+                        <a:effectLst/>
+                        <a:latin typeface="Google Sans Text"/>
+                      </a:endParaRPr>
+                    </a:p>
+                  </a:txBody>
+                  <a:tcPr marR="57150" marT="76200" marB="76200" anchor="ctr"/>
+                </a:tc>
+                <a:tc>
+                  <a:txBody>
+                    <a:bodyPr/>
+                    <a:lstStyle/>
+                    <a:p>
+                      <a:pPr algn="r" rtl="0">
+                        <a:buNone/>
+                      </a:pPr>
+                      <a:r>
+                        <a:rPr lang="en-IN" sz="1800" b="1" dirty="0">
+                          <a:ln>
+                            <a:noFill/>
+                          </a:ln>
+                          <a:solidFill>
+                            <a:schemeClr val="tx1">
+                              <a:lumMod val="50000"/>
+                              <a:lumOff val="50000"/>
+                            </a:schemeClr>
+                          </a:solidFill>
+                          <a:effectLst/>
+                        </a:rPr>
+                        <a:t>0x00</a:t>
+                      </a:r>
+                      <a:endParaRPr lang="en-IN" sz="1800" b="1" dirty="0">
+                        <a:ln>
+                          <a:noFill/>
+                        </a:ln>
+                        <a:solidFill>
+                          <a:schemeClr val="tx1">
+                            <a:lumMod val="50000"/>
+                            <a:lumOff val="50000"/>
+                          </a:schemeClr>
+                        </a:solidFill>
+                        <a:effectLst/>
+                        <a:latin typeface="Google Sans Text"/>
+                      </a:endParaRPr>
+                    </a:p>
+                  </a:txBody>
+                  <a:tcPr marR="57150" marT="76200" marB="76200" anchor="ctr"/>
+                </a:tc>
+                <a:extLst>
+                  <a:ext uri="{0D108BD9-81ED-4DB2-BD59-A6C34878D82A}">
+                    <a16:rowId xmlns:a16="http://schemas.microsoft.com/office/drawing/2014/main" val="2439511584"/>
+                  </a:ext>
+                </a:extLst>
+              </a:tr>
+              <a:tr h="426720">
+                <a:tc>
+                  <a:txBody>
+                    <a:bodyPr/>
+                    <a:lstStyle/>
+                    <a:p>
+                      <a:pPr rtl="0">
+                        <a:buNone/>
+                      </a:pPr>
+                      <a:r>
+                        <a:rPr lang="en-IN" sz="1800" b="1" dirty="0">
+                          <a:ln>
+                            <a:noFill/>
+                          </a:ln>
+                          <a:solidFill>
+                            <a:schemeClr val="tx1">
+                              <a:lumMod val="50000"/>
+                              <a:lumOff val="50000"/>
+                            </a:schemeClr>
+                          </a:solidFill>
+                          <a:effectLst/>
+                        </a:rPr>
+                        <a:t>0x2003</a:t>
+                      </a:r>
+                      <a:endParaRPr lang="en-IN" sz="1800" b="1" dirty="0">
+                        <a:ln>
+                          <a:noFill/>
+                        </a:ln>
+                        <a:solidFill>
+                          <a:schemeClr val="tx1">
+                            <a:lumMod val="50000"/>
+                            <a:lumOff val="50000"/>
+                          </a:schemeClr>
+                        </a:solidFill>
+                        <a:effectLst/>
+                        <a:latin typeface="Google Sans Text"/>
+                      </a:endParaRPr>
+                    </a:p>
+                  </a:txBody>
+                  <a:tcPr marR="57150" marT="76200" marB="76200" anchor="ctr"/>
+                </a:tc>
+                <a:tc>
+                  <a:txBody>
+                    <a:bodyPr/>
+                    <a:lstStyle/>
+                    <a:p>
+                      <a:pPr algn="r" rtl="0">
+                        <a:buNone/>
+                      </a:pPr>
+                      <a:r>
+                        <a:rPr lang="en-IN" sz="1800" b="1" dirty="0">
+                          <a:ln>
+                            <a:noFill/>
+                          </a:ln>
+                          <a:solidFill>
+                            <a:schemeClr val="tx1">
+                              <a:lumMod val="50000"/>
+                              <a:lumOff val="50000"/>
+                            </a:schemeClr>
+                          </a:solidFill>
+                          <a:effectLst/>
+                        </a:rPr>
+                        <a:t>0x19</a:t>
+                      </a:r>
+                      <a:endParaRPr lang="en-IN" sz="1800" b="1" dirty="0">
+                        <a:ln>
+                          <a:noFill/>
+                        </a:ln>
+                        <a:solidFill>
+                          <a:schemeClr val="tx1">
+                            <a:lumMod val="50000"/>
+                            <a:lumOff val="50000"/>
+                          </a:schemeClr>
+                        </a:solidFill>
+                        <a:effectLst/>
+                        <a:latin typeface="Google Sans Text"/>
+                      </a:endParaRPr>
+                    </a:p>
+                  </a:txBody>
+                  <a:tcPr marR="57150" marT="76200" marB="76200" anchor="ctr"/>
+                </a:tc>
+                <a:extLst>
+                  <a:ext uri="{0D108BD9-81ED-4DB2-BD59-A6C34878D82A}">
+                    <a16:rowId xmlns:a16="http://schemas.microsoft.com/office/drawing/2014/main" val="1355512020"/>
+                  </a:ext>
+                </a:extLst>
+              </a:tr>
+              <a:tr h="426720">
+                <a:tc>
+                  <a:txBody>
+                    <a:bodyPr/>
+                    <a:lstStyle/>
+                    <a:p>
+                      <a:pPr rtl="0">
+                        <a:buNone/>
+                      </a:pPr>
+                      <a:r>
+                        <a:rPr lang="en-IN" sz="1800" b="1" dirty="0">
+                          <a:ln>
+                            <a:noFill/>
+                          </a:ln>
+                          <a:solidFill>
+                            <a:schemeClr val="tx1">
+                              <a:lumMod val="50000"/>
+                              <a:lumOff val="50000"/>
+                            </a:schemeClr>
+                          </a:solidFill>
+                          <a:effectLst/>
+                        </a:rPr>
+                        <a:t>0x2004</a:t>
+                      </a:r>
+                      <a:endParaRPr lang="en-IN" sz="1800" b="1" dirty="0">
+                        <a:ln>
+                          <a:noFill/>
+                        </a:ln>
+                        <a:solidFill>
+                          <a:schemeClr val="tx1">
+                            <a:lumMod val="50000"/>
+                            <a:lumOff val="50000"/>
+                          </a:schemeClr>
+                        </a:solidFill>
+                        <a:effectLst/>
+                        <a:latin typeface="Google Sans Text"/>
+                      </a:endParaRPr>
+                    </a:p>
+                  </a:txBody>
+                  <a:tcPr marR="57150" marT="76200" marB="76200" anchor="ctr"/>
+                </a:tc>
+                <a:tc>
+                  <a:txBody>
+                    <a:bodyPr/>
+                    <a:lstStyle/>
+                    <a:p>
+                      <a:pPr algn="r" rtl="0">
+                        <a:buNone/>
+                      </a:pPr>
+                      <a:r>
+                        <a:rPr lang="en-IN" sz="1800" b="1" dirty="0">
+                          <a:ln>
+                            <a:noFill/>
+                          </a:ln>
+                          <a:solidFill>
+                            <a:schemeClr val="tx1">
+                              <a:lumMod val="50000"/>
+                              <a:lumOff val="50000"/>
+                            </a:schemeClr>
+                          </a:solidFill>
+                          <a:effectLst/>
+                        </a:rPr>
+                        <a:t>0x3F</a:t>
+                      </a:r>
+                      <a:endParaRPr lang="en-IN" sz="1800" b="1" dirty="0">
+                        <a:ln>
+                          <a:noFill/>
+                        </a:ln>
+                        <a:solidFill>
+                          <a:schemeClr val="tx1">
+                            <a:lumMod val="50000"/>
+                            <a:lumOff val="50000"/>
+                          </a:schemeClr>
+                        </a:solidFill>
+                        <a:effectLst/>
+                        <a:latin typeface="Google Sans Text"/>
+                      </a:endParaRPr>
+                    </a:p>
+                  </a:txBody>
+                  <a:tcPr marR="57150" marT="76200" marB="76200" anchor="ctr"/>
+                </a:tc>
+                <a:extLst>
+                  <a:ext uri="{0D108BD9-81ED-4DB2-BD59-A6C34878D82A}">
+                    <a16:rowId xmlns:a16="http://schemas.microsoft.com/office/drawing/2014/main" val="3624282594"/>
+                  </a:ext>
+                </a:extLst>
+              </a:tr>
+              <a:tr h="426720">
+                <a:tc>
+                  <a:txBody>
+                    <a:bodyPr/>
+                    <a:lstStyle/>
+                    <a:p>
+                      <a:pPr rtl="0">
+                        <a:buNone/>
+                      </a:pPr>
+                      <a:r>
+                        <a:rPr lang="en-IN" sz="1800" b="1">
+                          <a:ln>
+                            <a:noFill/>
+                          </a:ln>
+                          <a:solidFill>
+                            <a:schemeClr val="tx1">
+                              <a:lumMod val="50000"/>
+                              <a:lumOff val="50000"/>
+                            </a:schemeClr>
+                          </a:solidFill>
+                          <a:effectLst/>
+                        </a:rPr>
+                        <a:t>...</a:t>
+                      </a:r>
+                      <a:endParaRPr lang="en-IN" sz="1800" b="1">
+                        <a:ln>
+                          <a:noFill/>
+                        </a:ln>
+                        <a:solidFill>
+                          <a:schemeClr val="tx1">
+                            <a:lumMod val="50000"/>
+                            <a:lumOff val="50000"/>
+                          </a:schemeClr>
+                        </a:solidFill>
+                        <a:effectLst/>
+                        <a:latin typeface="Google Sans Text"/>
+                      </a:endParaRPr>
+                    </a:p>
+                  </a:txBody>
+                  <a:tcPr marR="57150" marT="76200" marB="76200" anchor="ctr"/>
+                </a:tc>
+                <a:tc>
+                  <a:txBody>
+                    <a:bodyPr/>
+                    <a:lstStyle/>
+                    <a:p>
+                      <a:pPr algn="r" rtl="0">
+                        <a:buNone/>
+                      </a:pPr>
+                      <a:r>
+                        <a:rPr lang="en-IN" sz="1800" b="1" dirty="0">
+                          <a:ln>
+                            <a:noFill/>
+                          </a:ln>
+                          <a:solidFill>
+                            <a:schemeClr val="tx1">
+                              <a:lumMod val="50000"/>
+                              <a:lumOff val="50000"/>
+                            </a:schemeClr>
+                          </a:solidFill>
+                          <a:effectLst/>
+                        </a:rPr>
+                        <a:t>...</a:t>
+                      </a:r>
+                      <a:endParaRPr lang="en-IN" sz="1800" b="1" dirty="0">
+                        <a:ln>
+                          <a:noFill/>
+                        </a:ln>
+                        <a:solidFill>
+                          <a:schemeClr val="tx1">
+                            <a:lumMod val="50000"/>
+                            <a:lumOff val="50000"/>
+                          </a:schemeClr>
+                        </a:solidFill>
+                        <a:effectLst/>
+                        <a:latin typeface="Google Sans Text"/>
+                      </a:endParaRPr>
+                    </a:p>
+                  </a:txBody>
+                  <a:tcPr marR="57150" marT="76200" marB="76200" anchor="ctr"/>
+                </a:tc>
+                <a:extLst>
+                  <a:ext uri="{0D108BD9-81ED-4DB2-BD59-A6C34878D82A}">
+                    <a16:rowId xmlns:a16="http://schemas.microsoft.com/office/drawing/2014/main" val="2609120174"/>
+                  </a:ext>
+                </a:extLst>
+              </a:tr>
+              <a:tr h="426720">
+                <a:tc>
+                  <a:txBody>
+                    <a:bodyPr/>
+                    <a:lstStyle/>
+                    <a:p>
+                      <a:pPr rtl="0">
+                        <a:buNone/>
+                      </a:pPr>
+                      <a:r>
+                        <a:rPr lang="en-IN" sz="1800" b="1" dirty="0">
+                          <a:ln>
+                            <a:noFill/>
+                          </a:ln>
+                          <a:solidFill>
+                            <a:schemeClr val="tx1">
+                              <a:lumMod val="50000"/>
+                              <a:lumOff val="50000"/>
+                            </a:schemeClr>
+                          </a:solidFill>
+                          <a:effectLst/>
+                        </a:rPr>
+                        <a:t>0x3ABC</a:t>
+                      </a:r>
+                      <a:endParaRPr lang="en-IN" sz="1800" b="1" dirty="0">
+                        <a:ln>
+                          <a:noFill/>
+                        </a:ln>
+                        <a:solidFill>
+                          <a:schemeClr val="tx1">
+                            <a:lumMod val="50000"/>
+                            <a:lumOff val="50000"/>
+                          </a:schemeClr>
+                        </a:solidFill>
+                        <a:effectLst/>
+                        <a:latin typeface="Google Sans Text"/>
+                      </a:endParaRPr>
+                    </a:p>
+                  </a:txBody>
+                  <a:tcPr marR="57150" marT="76200" marB="76200" anchor="ctr"/>
+                </a:tc>
+                <a:tc>
+                  <a:txBody>
+                    <a:bodyPr/>
+                    <a:lstStyle/>
+                    <a:p>
+                      <a:pPr algn="r" rtl="0">
+                        <a:buNone/>
+                      </a:pPr>
+                      <a:r>
+                        <a:rPr lang="en-IN" sz="1800" b="1" dirty="0">
+                          <a:ln>
+                            <a:noFill/>
+                          </a:ln>
+                          <a:solidFill>
+                            <a:schemeClr val="tx1">
+                              <a:lumMod val="50000"/>
+                              <a:lumOff val="50000"/>
+                            </a:schemeClr>
+                          </a:solidFill>
+                          <a:effectLst/>
+                        </a:rPr>
+                        <a:t>0xFE</a:t>
+                      </a:r>
+                      <a:endParaRPr lang="en-IN" sz="1800" b="1" dirty="0">
+                        <a:ln>
+                          <a:noFill/>
+                        </a:ln>
+                        <a:solidFill>
+                          <a:schemeClr val="tx1">
+                            <a:lumMod val="50000"/>
+                            <a:lumOff val="50000"/>
+                          </a:schemeClr>
+                        </a:solidFill>
+                        <a:effectLst/>
+                        <a:latin typeface="Google Sans Text"/>
+                      </a:endParaRPr>
+                    </a:p>
+                  </a:txBody>
+                  <a:tcPr marR="57150" marT="76200" marB="76200" anchor="ctr"/>
+                </a:tc>
+                <a:extLst>
+                  <a:ext uri="{0D108BD9-81ED-4DB2-BD59-A6C34878D82A}">
+                    <a16:rowId xmlns:a16="http://schemas.microsoft.com/office/drawing/2014/main" val="1687588137"/>
+                  </a:ext>
+                </a:extLst>
+              </a:tr>
+            </a:tbl>
+          </a:graphicData>
+        </a:graphic>
+      </p:graphicFrame>
+      <p:sp>
+        <p:nvSpPr>
+          <p:cNvPr id="9" name="TextBox 8">
+            <a:extLst>
+              <a:ext uri="{FF2B5EF4-FFF2-40B4-BE49-F238E27FC236}">
+                <a16:creationId xmlns:a16="http://schemas.microsoft.com/office/drawing/2014/main" id="{5B2539E7-4EA1-7BF2-6422-60E620F5ABE6}"/>
+              </a:ext>
+            </a:extLst>
+          </p:cNvPr>
+          <p:cNvSpPr txBox="1"/>
+          <p:nvPr/>
+        </p:nvSpPr>
+        <p:spPr>
+          <a:xfrm>
+            <a:off x="7073977" y="1064695"/>
+            <a:ext cx="939644" cy="369332"/>
+          </a:xfrm>
+          <a:prstGeom prst="rect">
+            <a:avLst/>
+          </a:prstGeom>
+          <a:noFill/>
+        </p:spPr>
+        <p:txBody>
+          <a:bodyPr wrap="square">
+            <a:spAutoFit/>
+          </a:bodyPr>
+          <a:lstStyle/>
+          <a:p>
+            <a:r>
+              <a:rPr lang="en-US" b="1" dirty="0">
+                <a:solidFill>
+                  <a:srgbClr val="FF0000"/>
+                </a:solidFill>
+              </a:rPr>
+              <a:t>RAM</a:t>
+            </a:r>
+            <a:endParaRPr lang="en-IN" b="1" dirty="0">
+              <a:solidFill>
+                <a:srgbClr val="FF0000"/>
+              </a:solidFill>
+            </a:endParaRPr>
+          </a:p>
+        </p:txBody>
+      </p:sp>
+    </p:spTree>
+    <p:extLst>
+      <p:ext uri="{BB962C8B-B14F-4D97-AF65-F5344CB8AC3E}">
+        <p14:creationId xmlns:p14="http://schemas.microsoft.com/office/powerpoint/2010/main" val="3503260817"/>
+      </p:ext>
+    </p:extLst>
+  </p:cSld>
+  <p:clrMapOvr>
+    <a:masterClrMapping/>
+  </p:clrMapOvr>
+</p:sld>
+</file>
+
+<file path=ppt/slides/slide34.xml><?xml version="1.0" encoding="utf-8"?>
+<p:sld xmlns:a="http://schemas.openxmlformats.org/drawingml/2006/main" xmlns:r="http://schemas.openxmlformats.org/officeDocument/2006/relationships" xmlns:p="http://schemas.openxmlformats.org/presentationml/2006/main">
+  <p:cSld>
+    <p:spTree>
+      <p:nvGrpSpPr>
+        <p:cNvPr id="1" name=""/>
+        <p:cNvGrpSpPr/>
+        <p:nvPr/>
+      </p:nvGrpSpPr>
+      <p:grpSpPr>
+        <a:xfrm>
+          <a:off x="0" y="0"/>
+          <a:ext cx="0" cy="0"/>
+          <a:chOff x="0" y="0"/>
+          <a:chExt cx="0" cy="0"/>
+        </a:xfrm>
+      </p:grpSpPr>
+      <p:sp>
+        <p:nvSpPr>
+          <p:cNvPr id="2" name="Title 1">
+            <a:extLst>
+              <a:ext uri="{FF2B5EF4-FFF2-40B4-BE49-F238E27FC236}">
                 <a16:creationId xmlns:a16="http://schemas.microsoft.com/office/drawing/2014/main" id="{0CFE1EE5-02BB-0D21-5708-B88A0B5281A5}"/>
               </a:ext>
             </a:extLst>
@@ -18577,7 +20669,7 @@
           <a:p>
             <a:fld id="{B4B13859-67C5-4393-B6C2-556CF3F770C0}" type="datetime3">
               <a:rPr lang="en-US" smtClean="0"/>
-              <a:t>15 April 2026</a:t>
+              <a:t>22 April 2026</a:t>
             </a:fld>
             <a:endParaRPr lang="en-US"/>
           </a:p>
@@ -18606,7 +20698,7 @@
           <a:p>
             <a:fld id="{98AC3541-01C1-4CA5-B68F-FEE868C7D1AF}" type="slidenum">
               <a:rPr lang="en-US" smtClean="0"/>
-              <a:t>33</a:t>
+              <a:t>34</a:t>
             </a:fld>
             <a:endParaRPr lang="en-US"/>
           </a:p>
@@ -19136,7 +21228,7 @@
 </p:sld>
 </file>
 
-<file path=ppt/slides/slide34.xml><?xml version="1.0" encoding="utf-8"?>
+<file path=ppt/slides/slide35.xml><?xml version="1.0" encoding="utf-8"?>
 <p:sld xmlns:a="http://schemas.openxmlformats.org/drawingml/2006/main" xmlns:r="http://schemas.openxmlformats.org/officeDocument/2006/relationships" xmlns:p="http://schemas.openxmlformats.org/presentationml/2006/main">
   <p:cSld>
     <p:spTree>
@@ -19233,7 +21325,7 @@
           <a:p>
             <a:fld id="{B4B13859-67C5-4393-B6C2-556CF3F770C0}" type="datetime3">
               <a:rPr lang="en-US" smtClean="0"/>
-              <a:t>15 April 2026</a:t>
+              <a:t>22 April 2026</a:t>
             </a:fld>
             <a:endParaRPr lang="en-US"/>
           </a:p>
@@ -19262,7 +21354,7 @@
           <a:p>
             <a:fld id="{98AC3541-01C1-4CA5-B68F-FEE868C7D1AF}" type="slidenum">
               <a:rPr lang="en-US" smtClean="0"/>
-              <a:t>34</a:t>
+              <a:t>35</a:t>
             </a:fld>
             <a:endParaRPr lang="en-US"/>
           </a:p>
@@ -19272,151 +21364,6 @@
     <p:extLst>
       <p:ext uri="{BB962C8B-B14F-4D97-AF65-F5344CB8AC3E}">
         <p14:creationId xmlns:p14="http://schemas.microsoft.com/office/powerpoint/2010/main" val="359702123"/>
-      </p:ext>
-    </p:extLst>
-  </p:cSld>
-  <p:clrMapOvr>
-    <a:masterClrMapping/>
-  </p:clrMapOvr>
-</p:sld>
-</file>
-
-<file path=ppt/slides/slide35.xml><?xml version="1.0" encoding="utf-8"?>
-<p:sld xmlns:a="http://schemas.openxmlformats.org/drawingml/2006/main" xmlns:r="http://schemas.openxmlformats.org/officeDocument/2006/relationships" xmlns:p="http://schemas.openxmlformats.org/presentationml/2006/main">
-  <p:cSld>
-    <p:spTree>
-      <p:nvGrpSpPr>
-        <p:cNvPr id="1" name=""/>
-        <p:cNvGrpSpPr/>
-        <p:nvPr/>
-      </p:nvGrpSpPr>
-      <p:grpSpPr>
-        <a:xfrm>
-          <a:off x="0" y="0"/>
-          <a:ext cx="0" cy="0"/>
-          <a:chOff x="0" y="0"/>
-          <a:chExt cx="0" cy="0"/>
-        </a:xfrm>
-      </p:grpSpPr>
-      <p:sp>
-        <p:nvSpPr>
-          <p:cNvPr id="2" name="Title 1">
-            <a:extLst>
-              <a:ext uri="{FF2B5EF4-FFF2-40B4-BE49-F238E27FC236}">
-                <a16:creationId xmlns:a16="http://schemas.microsoft.com/office/drawing/2014/main" id="{0E6D0A83-7B55-39B8-70B7-711B13B58B54}"/>
-              </a:ext>
-            </a:extLst>
-          </p:cNvPr>
-          <p:cNvSpPr>
-            <a:spLocks noGrp="1"/>
-          </p:cNvSpPr>
-          <p:nvPr>
-            <p:ph type="title"/>
-          </p:nvPr>
-        </p:nvSpPr>
-        <p:spPr/>
-        <p:txBody>
-          <a:bodyPr/>
-          <a:lstStyle/>
-          <a:p>
-            <a:r>
-              <a:rPr lang="en-US" dirty="0"/>
-              <a:t>May even have a multi-level hierarchy!</a:t>
-            </a:r>
-          </a:p>
-        </p:txBody>
-      </p:sp>
-      <p:pic>
-        <p:nvPicPr>
-          <p:cNvPr id="8" name="Content Placeholder 7">
-            <a:extLst>
-              <a:ext uri="{FF2B5EF4-FFF2-40B4-BE49-F238E27FC236}">
-                <a16:creationId xmlns:a16="http://schemas.microsoft.com/office/drawing/2014/main" id="{844D21CF-0E85-BB85-3D9A-2653872D9A39}"/>
-              </a:ext>
-            </a:extLst>
-          </p:cNvPr>
-          <p:cNvPicPr>
-            <a:picLocks noGrp="1" noChangeAspect="1"/>
-          </p:cNvPicPr>
-          <p:nvPr>
-            <p:ph idx="1"/>
-          </p:nvPr>
-        </p:nvPicPr>
-        <p:blipFill>
-          <a:blip r:embed="rId2"/>
-          <a:stretch>
-            <a:fillRect/>
-          </a:stretch>
-        </p:blipFill>
-        <p:spPr>
-          <a:xfrm>
-            <a:off x="1634513" y="1609725"/>
-            <a:ext cx="5891643" cy="3963591"/>
-          </a:xfrm>
-        </p:spPr>
-      </p:pic>
-      <p:sp>
-        <p:nvSpPr>
-          <p:cNvPr id="4" name="Date Placeholder 3">
-            <a:extLst>
-              <a:ext uri="{FF2B5EF4-FFF2-40B4-BE49-F238E27FC236}">
-                <a16:creationId xmlns:a16="http://schemas.microsoft.com/office/drawing/2014/main" id="{D57B189C-F322-099B-5BF4-BFD074CA278D}"/>
-              </a:ext>
-            </a:extLst>
-          </p:cNvPr>
-          <p:cNvSpPr>
-            <a:spLocks noGrp="1"/>
-          </p:cNvSpPr>
-          <p:nvPr>
-            <p:ph type="dt" sz="half" idx="10"/>
-          </p:nvPr>
-        </p:nvSpPr>
-        <p:spPr/>
-        <p:txBody>
-          <a:bodyPr/>
-          <a:lstStyle/>
-          <a:p>
-            <a:fld id="{B4B13859-67C5-4393-B6C2-556CF3F770C0}" type="datetime3">
-              <a:rPr lang="en-US" smtClean="0"/>
-              <a:t>15 April 2026</a:t>
-            </a:fld>
-            <a:endParaRPr lang="en-US"/>
-          </a:p>
-        </p:txBody>
-      </p:sp>
-      <p:sp>
-        <p:nvSpPr>
-          <p:cNvPr id="6" name="Slide Number Placeholder 5">
-            <a:extLst>
-              <a:ext uri="{FF2B5EF4-FFF2-40B4-BE49-F238E27FC236}">
-                <a16:creationId xmlns:a16="http://schemas.microsoft.com/office/drawing/2014/main" id="{CA6DABE2-065E-A0FD-CC02-E26E414198E0}"/>
-              </a:ext>
-            </a:extLst>
-          </p:cNvPr>
-          <p:cNvSpPr>
-            <a:spLocks noGrp="1"/>
-          </p:cNvSpPr>
-          <p:nvPr>
-            <p:ph type="sldNum" sz="quarter" idx="12"/>
-          </p:nvPr>
-        </p:nvSpPr>
-        <p:spPr/>
-        <p:txBody>
-          <a:bodyPr/>
-          <a:lstStyle/>
-          <a:p>
-            <a:fld id="{98AC3541-01C1-4CA5-B68F-FEE868C7D1AF}" type="slidenum">
-              <a:rPr lang="en-US" smtClean="0"/>
-              <a:t>35</a:t>
-            </a:fld>
-            <a:endParaRPr lang="en-US"/>
-          </a:p>
-        </p:txBody>
-      </p:sp>
-    </p:spTree>
-    <p:extLst>
-      <p:ext uri="{BB962C8B-B14F-4D97-AF65-F5344CB8AC3E}">
-        <p14:creationId xmlns:p14="http://schemas.microsoft.com/office/powerpoint/2010/main" val="3179347546"/>
       </p:ext>
     </p:extLst>
   </p:cSld>
@@ -19448,7 +21395,7 @@
           <p:cNvPr id="2" name="Title 1">
             <a:extLst>
               <a:ext uri="{FF2B5EF4-FFF2-40B4-BE49-F238E27FC236}">
-                <a16:creationId xmlns:a16="http://schemas.microsoft.com/office/drawing/2014/main" id="{537EE133-C425-1BB9-8395-6069A63A944A}"/>
+                <a16:creationId xmlns:a16="http://schemas.microsoft.com/office/drawing/2014/main" id="{75D7A06E-BF06-449D-D963-D50F236C9394}"/>
               </a:ext>
             </a:extLst>
           </p:cNvPr>
@@ -19466,46 +21413,65 @@
           <a:p>
             <a:r>
               <a:rPr lang="en-US" dirty="0"/>
-              <a:t>Hierarchy means even more MM accesses per VM access!</a:t>
-            </a:r>
+              <a:t>Example</a:t>
+            </a:r>
+            <a:endParaRPr lang="en-IN" dirty="0"/>
           </a:p>
         </p:txBody>
       </p:sp>
-      <p:pic>
-        <p:nvPicPr>
-          <p:cNvPr id="8" name="Content Placeholder 7">
+      <p:sp>
+        <p:nvSpPr>
+          <p:cNvPr id="3" name="Content Placeholder 2">
             <a:extLst>
               <a:ext uri="{FF2B5EF4-FFF2-40B4-BE49-F238E27FC236}">
-                <a16:creationId xmlns:a16="http://schemas.microsoft.com/office/drawing/2014/main" id="{F2AE7EC1-250E-9E74-CCFB-1509B55D84D4}"/>
+                <a16:creationId xmlns:a16="http://schemas.microsoft.com/office/drawing/2014/main" id="{383A42B6-CA58-8301-2B95-63553A512849}"/>
               </a:ext>
             </a:extLst>
           </p:cNvPr>
-          <p:cNvPicPr>
-            <a:picLocks noGrp="1" noChangeAspect="1"/>
-          </p:cNvPicPr>
+          <p:cNvSpPr>
+            <a:spLocks noGrp="1"/>
+          </p:cNvSpPr>
           <p:nvPr>
             <p:ph idx="1"/>
           </p:nvPr>
-        </p:nvPicPr>
-        <p:blipFill>
-          <a:blip r:embed="rId2"/>
-          <a:stretch>
-            <a:fillRect/>
-          </a:stretch>
-        </p:blipFill>
-        <p:spPr>
-          <a:xfrm>
-            <a:off x="1465225" y="1633860"/>
-            <a:ext cx="6230219" cy="3915322"/>
-          </a:xfrm>
-        </p:spPr>
-      </p:pic>
+        </p:nvSpPr>
+        <p:spPr/>
+        <p:txBody>
+          <a:bodyPr/>
+          <a:lstStyle/>
+          <a:p>
+            <a:r>
+              <a:rPr lang="en-US" dirty="0"/>
+              <a:t>Virtual address space: 32 GB</a:t>
+            </a:r>
+          </a:p>
+          <a:p>
+            <a:r>
+              <a:rPr lang="en-US" dirty="0"/>
+              <a:t>Page size: 64 KB</a:t>
+            </a:r>
+          </a:p>
+          <a:p>
+            <a:r>
+              <a:rPr lang="en-US" dirty="0"/>
+              <a:t>Level 1 and level 2 VPNs: 8 bits each</a:t>
+            </a:r>
+          </a:p>
+          <a:p>
+            <a:r>
+              <a:rPr lang="en-US" dirty="0"/>
+              <a:t>PTE size: 4 bytes</a:t>
+            </a:r>
+            <a:endParaRPr lang="en-IN" dirty="0"/>
+          </a:p>
+        </p:txBody>
+      </p:sp>
       <p:sp>
         <p:nvSpPr>
           <p:cNvPr id="4" name="Date Placeholder 3">
             <a:extLst>
               <a:ext uri="{FF2B5EF4-FFF2-40B4-BE49-F238E27FC236}">
-                <a16:creationId xmlns:a16="http://schemas.microsoft.com/office/drawing/2014/main" id="{725F356A-44DD-4171-E6A8-5995067D742B}"/>
+                <a16:creationId xmlns:a16="http://schemas.microsoft.com/office/drawing/2014/main" id="{4510A47D-85AE-2993-8140-53AA54A8A1CD}"/>
               </a:ext>
             </a:extLst>
           </p:cNvPr>
@@ -19521,20 +21487,22 @@
           <a:bodyPr/>
           <a:lstStyle/>
           <a:p>
-            <a:fld id="{B4B13859-67C5-4393-B6C2-556CF3F770C0}" type="datetime3">
-              <a:rPr lang="en-US" smtClean="0"/>
-              <a:t>15 April 2026</a:t>
-            </a:fld>
-            <a:endParaRPr lang="en-US"/>
+            <a:pPr>
+              <a:defRPr/>
+            </a:pPr>
+            <a:r>
+              <a:rPr lang="en-US"/>
+              <a:t>21/12/2020</a:t>
+            </a:r>
           </a:p>
         </p:txBody>
       </p:sp>
       <p:sp>
         <p:nvSpPr>
-          <p:cNvPr id="6" name="Slide Number Placeholder 5">
+          <p:cNvPr id="5" name="Slide Number Placeholder 4">
             <a:extLst>
               <a:ext uri="{FF2B5EF4-FFF2-40B4-BE49-F238E27FC236}">
-                <a16:creationId xmlns:a16="http://schemas.microsoft.com/office/drawing/2014/main" id="{930CA0F5-090A-E536-2F10-908FC51F15F6}"/>
+                <a16:creationId xmlns:a16="http://schemas.microsoft.com/office/drawing/2014/main" id="{BA96A486-6993-1094-2503-D82B9FBC85C2}"/>
               </a:ext>
             </a:extLst>
           </p:cNvPr>
@@ -19550,18 +21518,77 @@
           <a:bodyPr/>
           <a:lstStyle/>
           <a:p>
-            <a:fld id="{98AC3541-01C1-4CA5-B68F-FEE868C7D1AF}" type="slidenum">
-              <a:rPr lang="en-US" smtClean="0"/>
+            <a:pPr>
+              <a:defRPr/>
+            </a:pPr>
+            <a:fld id="{CA887A73-1AE0-46F8-856A-18EA1CF30A1B}" type="slidenum">
+              <a:rPr lang="en-US" altLang="en-US" smtClean="0"/>
+              <a:pPr>
+                <a:defRPr/>
+              </a:pPr>
               <a:t>36</a:t>
             </a:fld>
-            <a:endParaRPr lang="en-US"/>
+            <a:endParaRPr lang="en-US" altLang="en-US"/>
           </a:p>
         </p:txBody>
       </p:sp>
+      <p:pic>
+        <p:nvPicPr>
+          <p:cNvPr id="6" name="Content Placeholder 7">
+            <a:extLst>
+              <a:ext uri="{FF2B5EF4-FFF2-40B4-BE49-F238E27FC236}">
+                <a16:creationId xmlns:a16="http://schemas.microsoft.com/office/drawing/2014/main" id="{F49C97EC-0AA9-8C45-5038-BADF581DC226}"/>
+              </a:ext>
+            </a:extLst>
+          </p:cNvPr>
+          <p:cNvPicPr>
+            <a:picLocks noChangeAspect="1"/>
+          </p:cNvPicPr>
+          <p:nvPr/>
+        </p:nvPicPr>
+        <p:blipFill>
+          <a:blip r:embed="rId2"/>
+          <a:stretch>
+            <a:fillRect/>
+          </a:stretch>
+        </p:blipFill>
+        <p:spPr bwMode="auto">
+          <a:xfrm>
+            <a:off x="3563636" y="3096423"/>
+            <a:ext cx="5410200" cy="3433757"/>
+          </a:xfrm>
+          <a:prstGeom prst="rect">
+            <a:avLst/>
+          </a:prstGeom>
+          <a:noFill/>
+          <a:ln>
+            <a:noFill/>
+          </a:ln>
+          <a:extLst>
+            <a:ext uri="{909E8E84-426E-40DD-AFC4-6F175D3DCCD1}">
+              <a14:hiddenFill xmlns:a14="http://schemas.microsoft.com/office/drawing/2010/main">
+                <a:solidFill>
+                  <a:srgbClr val="FFFFFF"/>
+                </a:solidFill>
+              </a14:hiddenFill>
+            </a:ext>
+            <a:ext uri="{91240B29-F687-4F45-9708-019B960494DF}">
+              <a14:hiddenLine xmlns:a14="http://schemas.microsoft.com/office/drawing/2010/main" w="9525">
+                <a:solidFill>
+                  <a:srgbClr val="000000"/>
+                </a:solidFill>
+                <a:miter lim="800000"/>
+                <a:headEnd/>
+                <a:tailEnd/>
+              </a14:hiddenLine>
+            </a:ext>
+          </a:extLst>
+        </p:spPr>
+      </p:pic>
     </p:spTree>
     <p:extLst>
       <p:ext uri="{BB962C8B-B14F-4D97-AF65-F5344CB8AC3E}">
-        <p14:creationId xmlns:p14="http://schemas.microsoft.com/office/powerpoint/2010/main" val="109580521"/>
+        <p14:creationId xmlns:p14="http://schemas.microsoft.com/office/powerpoint/2010/main" val="4133291803"/>
       </p:ext>
     </p:extLst>
   </p:cSld>
@@ -19593,6 +21620,151 @@
           <p:cNvPr id="2" name="Title 1">
             <a:extLst>
               <a:ext uri="{FF2B5EF4-FFF2-40B4-BE49-F238E27FC236}">
+                <a16:creationId xmlns:a16="http://schemas.microsoft.com/office/drawing/2014/main" id="{537EE133-C425-1BB9-8395-6069A63A944A}"/>
+              </a:ext>
+            </a:extLst>
+          </p:cNvPr>
+          <p:cNvSpPr>
+            <a:spLocks noGrp="1"/>
+          </p:cNvSpPr>
+          <p:nvPr>
+            <p:ph type="title"/>
+          </p:nvPr>
+        </p:nvSpPr>
+        <p:spPr/>
+        <p:txBody>
+          <a:bodyPr/>
+          <a:lstStyle/>
+          <a:p>
+            <a:r>
+              <a:rPr lang="en-US" dirty="0"/>
+              <a:t>Hierarchy means even more MM accesses per VM access!</a:t>
+            </a:r>
+          </a:p>
+        </p:txBody>
+      </p:sp>
+      <p:pic>
+        <p:nvPicPr>
+          <p:cNvPr id="8" name="Content Placeholder 7">
+            <a:extLst>
+              <a:ext uri="{FF2B5EF4-FFF2-40B4-BE49-F238E27FC236}">
+                <a16:creationId xmlns:a16="http://schemas.microsoft.com/office/drawing/2014/main" id="{F2AE7EC1-250E-9E74-CCFB-1509B55D84D4}"/>
+              </a:ext>
+            </a:extLst>
+          </p:cNvPr>
+          <p:cNvPicPr>
+            <a:picLocks noGrp="1" noChangeAspect="1"/>
+          </p:cNvPicPr>
+          <p:nvPr>
+            <p:ph idx="1"/>
+          </p:nvPr>
+        </p:nvPicPr>
+        <p:blipFill>
+          <a:blip r:embed="rId2"/>
+          <a:stretch>
+            <a:fillRect/>
+          </a:stretch>
+        </p:blipFill>
+        <p:spPr>
+          <a:xfrm>
+            <a:off x="1465225" y="1633860"/>
+            <a:ext cx="6230219" cy="3915322"/>
+          </a:xfrm>
+        </p:spPr>
+      </p:pic>
+      <p:sp>
+        <p:nvSpPr>
+          <p:cNvPr id="4" name="Date Placeholder 3">
+            <a:extLst>
+              <a:ext uri="{FF2B5EF4-FFF2-40B4-BE49-F238E27FC236}">
+                <a16:creationId xmlns:a16="http://schemas.microsoft.com/office/drawing/2014/main" id="{725F356A-44DD-4171-E6A8-5995067D742B}"/>
+              </a:ext>
+            </a:extLst>
+          </p:cNvPr>
+          <p:cNvSpPr>
+            <a:spLocks noGrp="1"/>
+          </p:cNvSpPr>
+          <p:nvPr>
+            <p:ph type="dt" sz="half" idx="10"/>
+          </p:nvPr>
+        </p:nvSpPr>
+        <p:spPr/>
+        <p:txBody>
+          <a:bodyPr/>
+          <a:lstStyle/>
+          <a:p>
+            <a:fld id="{B4B13859-67C5-4393-B6C2-556CF3F770C0}" type="datetime3">
+              <a:rPr lang="en-US" smtClean="0"/>
+              <a:t>22 April 2026</a:t>
+            </a:fld>
+            <a:endParaRPr lang="en-US"/>
+          </a:p>
+        </p:txBody>
+      </p:sp>
+      <p:sp>
+        <p:nvSpPr>
+          <p:cNvPr id="6" name="Slide Number Placeholder 5">
+            <a:extLst>
+              <a:ext uri="{FF2B5EF4-FFF2-40B4-BE49-F238E27FC236}">
+                <a16:creationId xmlns:a16="http://schemas.microsoft.com/office/drawing/2014/main" id="{930CA0F5-090A-E536-2F10-908FC51F15F6}"/>
+              </a:ext>
+            </a:extLst>
+          </p:cNvPr>
+          <p:cNvSpPr>
+            <a:spLocks noGrp="1"/>
+          </p:cNvSpPr>
+          <p:nvPr>
+            <p:ph type="sldNum" sz="quarter" idx="12"/>
+          </p:nvPr>
+        </p:nvSpPr>
+        <p:spPr/>
+        <p:txBody>
+          <a:bodyPr/>
+          <a:lstStyle/>
+          <a:p>
+            <a:fld id="{98AC3541-01C1-4CA5-B68F-FEE868C7D1AF}" type="slidenum">
+              <a:rPr lang="en-US" smtClean="0"/>
+              <a:t>37</a:t>
+            </a:fld>
+            <a:endParaRPr lang="en-US"/>
+          </a:p>
+        </p:txBody>
+      </p:sp>
+    </p:spTree>
+    <p:extLst>
+      <p:ext uri="{BB962C8B-B14F-4D97-AF65-F5344CB8AC3E}">
+        <p14:creationId xmlns:p14="http://schemas.microsoft.com/office/powerpoint/2010/main" val="109580521"/>
+      </p:ext>
+    </p:extLst>
+  </p:cSld>
+  <p:clrMapOvr>
+    <a:masterClrMapping/>
+  </p:clrMapOvr>
+</p:sld>
+</file>
+
+<file path=ppt/slides/slide38.xml><?xml version="1.0" encoding="utf-8"?>
+<p:sld xmlns:a="http://schemas.openxmlformats.org/drawingml/2006/main" xmlns:r="http://schemas.openxmlformats.org/officeDocument/2006/relationships" xmlns:p="http://schemas.openxmlformats.org/presentationml/2006/main">
+  <p:cSld>
+    <p:spTree>
+      <p:nvGrpSpPr>
+        <p:cNvPr id="1" name=""/>
+        <p:cNvGrpSpPr/>
+        <p:nvPr/>
+      </p:nvGrpSpPr>
+      <p:grpSpPr>
+        <a:xfrm>
+          <a:off x="0" y="0"/>
+          <a:ext cx="0" cy="0"/>
+          <a:chOff x="0" y="0"/>
+          <a:chExt cx="0" cy="0"/>
+        </a:xfrm>
+      </p:grpSpPr>
+      <p:sp>
+        <p:nvSpPr>
+          <p:cNvPr id="2" name="Title 1">
+            <a:extLst>
+              <a:ext uri="{FF2B5EF4-FFF2-40B4-BE49-F238E27FC236}">
                 <a16:creationId xmlns:a16="http://schemas.microsoft.com/office/drawing/2014/main" id="{070C74E7-2AEE-BBF1-87B4-81D4494856E2}"/>
               </a:ext>
             </a:extLst>
@@ -19726,7 +21898,7 @@
           <a:p>
             <a:fld id="{B4B13859-67C5-4393-B6C2-556CF3F770C0}" type="datetime3">
               <a:rPr lang="en-US" smtClean="0"/>
-              <a:t>15 April 2026</a:t>
+              <a:t>22 April 2026</a:t>
             </a:fld>
             <a:endParaRPr lang="en-US"/>
           </a:p>
@@ -19755,7 +21927,7 @@
           <a:p>
             <a:fld id="{98AC3541-01C1-4CA5-B68F-FEE868C7D1AF}" type="slidenum">
               <a:rPr lang="en-US" smtClean="0"/>
-              <a:t>37</a:t>
+              <a:t>38</a:t>
             </a:fld>
             <a:endParaRPr lang="en-US"/>
           </a:p>
@@ -20259,7 +22431,7 @@
 </p:sld>
 </file>
 
-<file path=ppt/slides/slide38.xml><?xml version="1.0" encoding="utf-8"?>
+<file path=ppt/slides/slide39.xml><?xml version="1.0" encoding="utf-8"?>
 <p:sld xmlns:a="http://schemas.openxmlformats.org/drawingml/2006/main" xmlns:r="http://schemas.openxmlformats.org/officeDocument/2006/relationships" xmlns:p="http://schemas.openxmlformats.org/presentationml/2006/main">
   <p:cSld>
     <p:spTree>
@@ -20333,7 +22505,7 @@
         </p:blipFill>
         <p:spPr>
           <a:xfrm>
-            <a:off x="90694" y="1981200"/>
+            <a:off x="3959173" y="2286000"/>
             <a:ext cx="4956227" cy="2699912"/>
           </a:xfrm>
         </p:spPr>
@@ -20361,7 +22533,7 @@
           <a:p>
             <a:fld id="{B4B13859-67C5-4393-B6C2-556CF3F770C0}" type="datetime3">
               <a:rPr lang="en-US" smtClean="0"/>
-              <a:t>15 April 2026</a:t>
+              <a:t>22 April 2026</a:t>
             </a:fld>
             <a:endParaRPr lang="en-US"/>
           </a:p>
@@ -20390,7 +22562,7 @@
           <a:p>
             <a:fld id="{98AC3541-01C1-4CA5-B68F-FEE868C7D1AF}" type="slidenum">
               <a:rPr lang="en-US" smtClean="0"/>
-              <a:t>38</a:t>
+              <a:t>39</a:t>
             </a:fld>
             <a:endParaRPr lang="en-US"/>
           </a:p>
@@ -20412,8 +22584,8 @@
         </p:nvSpPr>
         <p:spPr>
           <a:xfrm>
-            <a:off x="5046922" y="2020906"/>
-            <a:ext cx="4020203" cy="3551978"/>
+            <a:off x="152400" y="1524000"/>
+            <a:ext cx="4020203" cy="4048884"/>
           </a:xfrm>
           <a:prstGeom prst="rect">
             <a:avLst/>
@@ -20421,7 +22593,7 @@
         </p:spPr>
         <p:txBody>
           <a:bodyPr vert="horz" lIns="68580" tIns="34290" rIns="68580" bIns="34290" rtlCol="0">
-            <a:normAutofit/>
+            <a:noAutofit/>
           </a:bodyPr>
           <a:lstStyle>
             <a:lvl1pPr marL="228600" indent="-228600" algn="l" defTabSz="914400" rtl="0" eaLnBrk="1" latinLnBrk="0" hangingPunct="1">
@@ -20592,14 +22764,14 @@
               <a:buAutoNum type="arabicPeriod"/>
             </a:pPr>
             <a:r>
-              <a:rPr lang="en-US" sz="1800" dirty="0"/>
+              <a:rPr lang="en-US" sz="1750" dirty="0"/>
               <a:t>Check TLB (input VPN, output PPN)</a:t>
             </a:r>
           </a:p>
           <a:p>
             <a:pPr lvl="1"/>
             <a:r>
-              <a:rPr lang="en-US" sz="1500" dirty="0">
+              <a:rPr lang="en-US" sz="1750" dirty="0">
                 <a:solidFill>
                   <a:schemeClr val="accent4"/>
                 </a:solidFill>
@@ -20607,14 +22779,14 @@
               <a:t>TLB Hit</a:t>
             </a:r>
             <a:r>
-              <a:rPr lang="en-US" sz="1500" dirty="0"/>
+              <a:rPr lang="en-US" sz="1750" dirty="0"/>
               <a:t>: Fetch translation, return PPN</a:t>
             </a:r>
           </a:p>
           <a:p>
             <a:pPr lvl="1"/>
             <a:r>
-              <a:rPr lang="en-US" sz="1500" dirty="0">
+              <a:rPr lang="en-US" sz="1750" dirty="0">
                 <a:solidFill>
                   <a:schemeClr val="accent4"/>
                 </a:solidFill>
@@ -20622,7 +22794,7 @@
               <a:t>TLB Miss</a:t>
             </a:r>
             <a:r>
-              <a:rPr lang="en-US" sz="1500" dirty="0"/>
+              <a:rPr lang="en-US" sz="1750" dirty="0"/>
               <a:t>: Check PT in MM</a:t>
             </a:r>
           </a:p>
@@ -20631,7 +22803,7 @@
               <a:buAutoNum type="arabicPeriod"/>
             </a:pPr>
             <a:r>
-              <a:rPr lang="en-US" sz="1350" dirty="0">
+              <a:rPr lang="en-US" sz="1750" dirty="0">
                 <a:solidFill>
                   <a:schemeClr val="accent4"/>
                 </a:solidFill>
@@ -20639,7 +22811,7 @@
               <a:t>PT Hit</a:t>
             </a:r>
             <a:r>
-              <a:rPr lang="en-US" sz="1350" dirty="0"/>
+              <a:rPr lang="en-US" sz="1750" dirty="0"/>
               <a:t>: Copy PT entry to TLB, return PPN</a:t>
             </a:r>
           </a:p>
@@ -20648,7 +22820,7 @@
               <a:buAutoNum type="arabicPeriod"/>
             </a:pPr>
             <a:r>
-              <a:rPr lang="en-US" sz="1350" dirty="0">
+              <a:rPr lang="en-US" sz="1750" dirty="0">
                 <a:solidFill>
                   <a:schemeClr val="accent4"/>
                 </a:solidFill>
@@ -20656,7 +22828,7 @@
               <a:t>PT Miss </a:t>
             </a:r>
             <a:r>
-              <a:rPr lang="en-US" sz="1350" dirty="0"/>
+              <a:rPr lang="en-US" sz="1750" dirty="0"/>
               <a:t>(page fault):</a:t>
             </a:r>
           </a:p>
@@ -20665,7 +22837,7 @@
               <a:buAutoNum type="arabicPeriod"/>
             </a:pPr>
             <a:r>
-              <a:rPr lang="en-US" sz="1200" dirty="0"/>
+              <a:rPr lang="en-US" sz="1750" dirty="0"/>
               <a:t>Fetch page from disk to MM</a:t>
             </a:r>
           </a:p>
@@ -20674,7 +22846,7 @@
               <a:buAutoNum type="arabicPeriod"/>
             </a:pPr>
             <a:r>
-              <a:rPr lang="en-US" sz="1200" dirty="0"/>
+              <a:rPr lang="en-US" sz="1750" dirty="0"/>
               <a:t>Update PT entry for the page</a:t>
             </a:r>
           </a:p>
@@ -20683,7 +22855,7 @@
               <a:buAutoNum type="arabicPeriod"/>
             </a:pPr>
             <a:r>
-              <a:rPr lang="en-US" sz="1200" dirty="0"/>
+              <a:rPr lang="en-US" sz="1750" dirty="0"/>
               <a:t>Load entry into TLB</a:t>
             </a:r>
           </a:p>
@@ -20692,14 +22864,14 @@
               <a:buAutoNum type="arabicPeriod"/>
             </a:pPr>
             <a:r>
-              <a:rPr lang="en-US" sz="1800" dirty="0"/>
-              <a:t>Check cache (input PA output Data)</a:t>
+              <a:rPr lang="en-US" sz="1750" dirty="0"/>
+              <a:t>Check cache (input PA, output Data)</a:t>
             </a:r>
           </a:p>
           <a:p>
             <a:pPr lvl="1"/>
             <a:r>
-              <a:rPr lang="en-US" sz="1500" dirty="0">
+              <a:rPr lang="en-US" sz="1750" dirty="0">
                 <a:solidFill>
                   <a:schemeClr val="accent4"/>
                 </a:solidFill>
@@ -20707,14 +22879,14 @@
               <a:t>Cache hit</a:t>
             </a:r>
             <a:r>
-              <a:rPr lang="en-US" sz="1500" dirty="0"/>
+              <a:rPr lang="en-US" sz="1750" dirty="0"/>
               <a:t>: Return data to processor</a:t>
             </a:r>
           </a:p>
           <a:p>
             <a:pPr lvl="1"/>
             <a:r>
-              <a:rPr lang="en-US" sz="1500" dirty="0">
+              <a:rPr lang="en-US" sz="1750" dirty="0">
                 <a:solidFill>
                   <a:schemeClr val="accent4"/>
                 </a:solidFill>
@@ -20722,7 +22894,7 @@
               <a:t>Cache miss</a:t>
             </a:r>
             <a:r>
-              <a:rPr lang="en-US" sz="1500" dirty="0"/>
+              <a:rPr lang="en-US" sz="1750" dirty="0"/>
               <a:t>: Fetch data from memory, store in cache and return it to processor</a:t>
             </a:r>
           </a:p>
@@ -20887,15 +23059,33 @@
                                   </p:childTnLst>
                                 </p:cTn>
                               </p:par>
+                            </p:childTnLst>
+                          </p:cTn>
+                        </p:par>
+                      </p:childTnLst>
+                    </p:cTn>
+                  </p:par>
+                  <p:par>
+                    <p:cTn id="15" fill="hold">
+                      <p:stCondLst>
+                        <p:cond delay="indefinite"/>
+                      </p:stCondLst>
+                      <p:childTnLst>
+                        <p:par>
+                          <p:cTn id="16" fill="hold">
+                            <p:stCondLst>
+                              <p:cond delay="0"/>
+                            </p:stCondLst>
+                            <p:childTnLst>
                               <p:par>
-                                <p:cTn id="15" presetID="1" presetClass="entr" presetSubtype="0" fill="hold" grpId="0" nodeType="withEffect">
+                                <p:cTn id="17" presetID="1" presetClass="entr" presetSubtype="0" fill="hold" grpId="0" nodeType="clickEffect">
                                   <p:stCondLst>
                                     <p:cond delay="0"/>
                                   </p:stCondLst>
                                   <p:childTnLst>
                                     <p:set>
                                       <p:cBhvr>
-                                        <p:cTn id="16" dur="1" fill="hold">
+                                        <p:cTn id="18" dur="1" fill="hold">
                                           <p:stCondLst>
                                             <p:cond delay="0"/>
                                           </p:stCondLst>
@@ -20918,15 +23108,33 @@
                                   </p:childTnLst>
                                 </p:cTn>
                               </p:par>
+                            </p:childTnLst>
+                          </p:cTn>
+                        </p:par>
+                      </p:childTnLst>
+                    </p:cTn>
+                  </p:par>
+                  <p:par>
+                    <p:cTn id="19" fill="hold">
+                      <p:stCondLst>
+                        <p:cond delay="indefinite"/>
+                      </p:stCondLst>
+                      <p:childTnLst>
+                        <p:par>
+                          <p:cTn id="20" fill="hold">
+                            <p:stCondLst>
+                              <p:cond delay="0"/>
+                            </p:stCondLst>
+                            <p:childTnLst>
                               <p:par>
-                                <p:cTn id="17" presetID="1" presetClass="entr" presetSubtype="0" fill="hold" grpId="0" nodeType="withEffect">
+                                <p:cTn id="21" presetID="1" presetClass="entr" presetSubtype="0" fill="hold" grpId="0" nodeType="clickEffect">
                                   <p:stCondLst>
                                     <p:cond delay="0"/>
                                   </p:stCondLst>
                                   <p:childTnLst>
                                     <p:set>
                                       <p:cBhvr>
-                                        <p:cTn id="18" dur="1" fill="hold">
+                                        <p:cTn id="22" dur="1" fill="hold">
                                           <p:stCondLst>
                                             <p:cond delay="0"/>
                                           </p:stCondLst>
@@ -20949,15 +23157,33 @@
                                   </p:childTnLst>
                                 </p:cTn>
                               </p:par>
+                            </p:childTnLst>
+                          </p:cTn>
+                        </p:par>
+                      </p:childTnLst>
+                    </p:cTn>
+                  </p:par>
+                  <p:par>
+                    <p:cTn id="23" fill="hold">
+                      <p:stCondLst>
+                        <p:cond delay="indefinite"/>
+                      </p:stCondLst>
+                      <p:childTnLst>
+                        <p:par>
+                          <p:cTn id="24" fill="hold">
+                            <p:stCondLst>
+                              <p:cond delay="0"/>
+                            </p:stCondLst>
+                            <p:childTnLst>
                               <p:par>
-                                <p:cTn id="19" presetID="1" presetClass="entr" presetSubtype="0" fill="hold" grpId="0" nodeType="withEffect">
+                                <p:cTn id="25" presetID="1" presetClass="entr" presetSubtype="0" fill="hold" grpId="0" nodeType="clickEffect">
                                   <p:stCondLst>
                                     <p:cond delay="0"/>
                                   </p:stCondLst>
                                   <p:childTnLst>
                                     <p:set>
                                       <p:cBhvr>
-                                        <p:cTn id="20" dur="1" fill="hold">
+                                        <p:cTn id="26" dur="1" fill="hold">
                                           <p:stCondLst>
                                             <p:cond delay="0"/>
                                           </p:stCondLst>
@@ -20980,15 +23206,33 @@
                                   </p:childTnLst>
                                 </p:cTn>
                               </p:par>
+                            </p:childTnLst>
+                          </p:cTn>
+                        </p:par>
+                      </p:childTnLst>
+                    </p:cTn>
+                  </p:par>
+                  <p:par>
+                    <p:cTn id="27" fill="hold">
+                      <p:stCondLst>
+                        <p:cond delay="indefinite"/>
+                      </p:stCondLst>
+                      <p:childTnLst>
+                        <p:par>
+                          <p:cTn id="28" fill="hold">
+                            <p:stCondLst>
+                              <p:cond delay="0"/>
+                            </p:stCondLst>
+                            <p:childTnLst>
                               <p:par>
-                                <p:cTn id="21" presetID="1" presetClass="entr" presetSubtype="0" fill="hold" grpId="0" nodeType="withEffect">
+                                <p:cTn id="29" presetID="1" presetClass="entr" presetSubtype="0" fill="hold" grpId="0" nodeType="clickEffect">
                                   <p:stCondLst>
                                     <p:cond delay="0"/>
                                   </p:stCondLst>
                                   <p:childTnLst>
                                     <p:set>
                                       <p:cBhvr>
-                                        <p:cTn id="22" dur="1" fill="hold">
+                                        <p:cTn id="30" dur="1" fill="hold">
                                           <p:stCondLst>
                                             <p:cond delay="0"/>
                                           </p:stCondLst>
@@ -21011,15 +23255,33 @@
                                   </p:childTnLst>
                                 </p:cTn>
                               </p:par>
+                            </p:childTnLst>
+                          </p:cTn>
+                        </p:par>
+                      </p:childTnLst>
+                    </p:cTn>
+                  </p:par>
+                  <p:par>
+                    <p:cTn id="31" fill="hold">
+                      <p:stCondLst>
+                        <p:cond delay="indefinite"/>
+                      </p:stCondLst>
+                      <p:childTnLst>
+                        <p:par>
+                          <p:cTn id="32" fill="hold">
+                            <p:stCondLst>
+                              <p:cond delay="0"/>
+                            </p:stCondLst>
+                            <p:childTnLst>
                               <p:par>
-                                <p:cTn id="23" presetID="1" presetClass="entr" presetSubtype="0" fill="hold" grpId="0" nodeType="withEffect">
+                                <p:cTn id="33" presetID="1" presetClass="entr" presetSubtype="0" fill="hold" grpId="0" nodeType="clickEffect">
                                   <p:stCondLst>
                                     <p:cond delay="0"/>
                                   </p:stCondLst>
                                   <p:childTnLst>
                                     <p:set>
                                       <p:cBhvr>
-                                        <p:cTn id="24" dur="1" fill="hold">
+                                        <p:cTn id="34" dur="1" fill="hold">
                                           <p:stCondLst>
                                             <p:cond delay="0"/>
                                           </p:stCondLst>
@@ -21049,26 +23311,26 @@
                     </p:cTn>
                   </p:par>
                   <p:par>
-                    <p:cTn id="25" fill="hold">
+                    <p:cTn id="35" fill="hold">
                       <p:stCondLst>
                         <p:cond delay="indefinite"/>
                       </p:stCondLst>
                       <p:childTnLst>
                         <p:par>
-                          <p:cTn id="26" fill="hold">
+                          <p:cTn id="36" fill="hold">
                             <p:stCondLst>
                               <p:cond delay="0"/>
                             </p:stCondLst>
                             <p:childTnLst>
                               <p:par>
-                                <p:cTn id="27" presetID="1" presetClass="entr" presetSubtype="0" fill="hold" grpId="0" nodeType="clickEffect">
+                                <p:cTn id="37" presetID="1" presetClass="entr" presetSubtype="0" fill="hold" grpId="0" nodeType="clickEffect">
                                   <p:stCondLst>
                                     <p:cond delay="0"/>
                                   </p:stCondLst>
                                   <p:childTnLst>
                                     <p:set>
                                       <p:cBhvr>
-                                        <p:cTn id="28" dur="1" fill="hold">
+                                        <p:cTn id="38" dur="1" fill="hold">
                                           <p:stCondLst>
                                             <p:cond delay="0"/>
                                           </p:stCondLst>
@@ -21098,26 +23360,26 @@
                     </p:cTn>
                   </p:par>
                   <p:par>
-                    <p:cTn id="29" fill="hold">
+                    <p:cTn id="39" fill="hold">
                       <p:stCondLst>
                         <p:cond delay="indefinite"/>
                       </p:stCondLst>
                       <p:childTnLst>
                         <p:par>
-                          <p:cTn id="30" fill="hold">
+                          <p:cTn id="40" fill="hold">
                             <p:stCondLst>
                               <p:cond delay="0"/>
                             </p:stCondLst>
                             <p:childTnLst>
                               <p:par>
-                                <p:cTn id="31" presetID="1" presetClass="entr" presetSubtype="0" fill="hold" grpId="0" nodeType="clickEffect">
+                                <p:cTn id="41" presetID="1" presetClass="entr" presetSubtype="0" fill="hold" grpId="0" nodeType="clickEffect">
                                   <p:stCondLst>
                                     <p:cond delay="0"/>
                                   </p:stCondLst>
                                   <p:childTnLst>
                                     <p:set>
                                       <p:cBhvr>
-                                        <p:cTn id="32" dur="1" fill="hold">
+                                        <p:cTn id="42" dur="1" fill="hold">
                                           <p:stCondLst>
                                             <p:cond delay="0"/>
                                           </p:stCondLst>
@@ -21147,26 +23409,26 @@
                     </p:cTn>
                   </p:par>
                   <p:par>
-                    <p:cTn id="33" fill="hold">
+                    <p:cTn id="43" fill="hold">
                       <p:stCondLst>
                         <p:cond delay="indefinite"/>
                       </p:stCondLst>
                       <p:childTnLst>
                         <p:par>
-                          <p:cTn id="34" fill="hold">
+                          <p:cTn id="44" fill="hold">
                             <p:stCondLst>
                               <p:cond delay="0"/>
                             </p:stCondLst>
                             <p:childTnLst>
                               <p:par>
-                                <p:cTn id="35" presetID="1" presetClass="entr" presetSubtype="0" fill="hold" grpId="0" nodeType="clickEffect">
+                                <p:cTn id="45" presetID="1" presetClass="entr" presetSubtype="0" fill="hold" grpId="0" nodeType="clickEffect">
                                   <p:stCondLst>
                                     <p:cond delay="0"/>
                                   </p:stCondLst>
                                   <p:childTnLst>
                                     <p:set>
                                       <p:cBhvr>
-                                        <p:cTn id="36" dur="1" fill="hold">
+                                        <p:cTn id="46" dur="1" fill="hold">
                                           <p:stCondLst>
                                             <p:cond delay="0"/>
                                           </p:stCondLst>
@@ -21223,272 +23485,6 @@
 </p:sld>
 </file>
 
-<file path=ppt/slides/slide39.xml><?xml version="1.0" encoding="utf-8"?>
-<p:sld xmlns:a="http://schemas.openxmlformats.org/drawingml/2006/main" xmlns:r="http://schemas.openxmlformats.org/officeDocument/2006/relationships" xmlns:p="http://schemas.openxmlformats.org/presentationml/2006/main">
-  <p:cSld>
-    <p:spTree>
-      <p:nvGrpSpPr>
-        <p:cNvPr id="1" name=""/>
-        <p:cNvGrpSpPr/>
-        <p:nvPr/>
-      </p:nvGrpSpPr>
-      <p:grpSpPr>
-        <a:xfrm>
-          <a:off x="0" y="0"/>
-          <a:ext cx="0" cy="0"/>
-          <a:chOff x="0" y="0"/>
-          <a:chExt cx="0" cy="0"/>
-        </a:xfrm>
-      </p:grpSpPr>
-      <p:sp>
-        <p:nvSpPr>
-          <p:cNvPr id="2" name="Title 1">
-            <a:extLst>
-              <a:ext uri="{FF2B5EF4-FFF2-40B4-BE49-F238E27FC236}">
-                <a16:creationId xmlns:a16="http://schemas.microsoft.com/office/drawing/2014/main" id="{F23B10E1-1D56-EBA9-B832-FF3CE0D02A3B}"/>
-              </a:ext>
-            </a:extLst>
-          </p:cNvPr>
-          <p:cNvSpPr>
-            <a:spLocks noGrp="1"/>
-          </p:cNvSpPr>
-          <p:nvPr>
-            <p:ph type="title"/>
-          </p:nvPr>
-        </p:nvSpPr>
-        <p:spPr/>
-        <p:txBody>
-          <a:bodyPr/>
-          <a:lstStyle/>
-          <a:p>
-            <a:r>
-              <a:rPr lang="en-US" dirty="0"/>
-              <a:t>Typical TLB entry format</a:t>
-            </a:r>
-          </a:p>
-        </p:txBody>
-      </p:sp>
-      <p:sp>
-        <p:nvSpPr>
-          <p:cNvPr id="3" name="Content Placeholder 2">
-            <a:extLst>
-              <a:ext uri="{FF2B5EF4-FFF2-40B4-BE49-F238E27FC236}">
-                <a16:creationId xmlns:a16="http://schemas.microsoft.com/office/drawing/2014/main" id="{D34D078F-73F2-30DB-C44A-B8DBE26063EB}"/>
-              </a:ext>
-            </a:extLst>
-          </p:cNvPr>
-          <p:cNvSpPr>
-            <a:spLocks noGrp="1"/>
-          </p:cNvSpPr>
-          <p:nvPr>
-            <p:ph idx="1"/>
-          </p:nvPr>
-        </p:nvSpPr>
-        <p:spPr>
-          <a:xfrm>
-            <a:off x="94576" y="2239261"/>
-            <a:ext cx="8972549" cy="3333623"/>
-          </a:xfrm>
-        </p:spPr>
-        <p:txBody>
-          <a:bodyPr>
-            <a:normAutofit fontScale="92500" lnSpcReduction="20000"/>
-          </a:bodyPr>
-          <a:lstStyle/>
-          <a:p>
-            <a:r>
-              <a:rPr lang="en-US" dirty="0">
-                <a:solidFill>
-                  <a:schemeClr val="accent4"/>
-                </a:solidFill>
-              </a:rPr>
-              <a:t>Valid</a:t>
-            </a:r>
-            <a:r>
-              <a:rPr lang="en-US" dirty="0"/>
-              <a:t> whether that TLB ENTRY is valid (unrelated to PT)</a:t>
-            </a:r>
-          </a:p>
-          <a:p>
-            <a:r>
-              <a:rPr lang="en-US" dirty="0">
-                <a:solidFill>
-                  <a:schemeClr val="accent4"/>
-                </a:solidFill>
-              </a:rPr>
-              <a:t>Access Rights</a:t>
-            </a:r>
-            <a:r>
-              <a:rPr lang="en-US" dirty="0"/>
-              <a:t>: Data from the PT</a:t>
-            </a:r>
-          </a:p>
-          <a:p>
-            <a:r>
-              <a:rPr lang="en-US" dirty="0">
-                <a:solidFill>
-                  <a:schemeClr val="accent4"/>
-                </a:solidFill>
-              </a:rPr>
-              <a:t>Dirty</a:t>
-            </a:r>
-            <a:r>
-              <a:rPr lang="en-US" dirty="0"/>
-              <a:t>: Consistent with PT</a:t>
-            </a:r>
-          </a:p>
-          <a:p>
-            <a:r>
-              <a:rPr lang="en-US" dirty="0">
-                <a:solidFill>
-                  <a:schemeClr val="accent4"/>
-                </a:solidFill>
-              </a:rPr>
-              <a:t>Ref</a:t>
-            </a:r>
-            <a:r>
-              <a:rPr lang="en-US" dirty="0"/>
-              <a:t>: Used to implement LRU</a:t>
-            </a:r>
-          </a:p>
-          <a:p>
-            <a:pPr lvl="1"/>
-            <a:r>
-              <a:rPr lang="en-US" dirty="0"/>
-              <a:t>Set when page is accessed, cleared periodically by OS</a:t>
-            </a:r>
-          </a:p>
-          <a:p>
-            <a:r>
-              <a:rPr lang="en-US" dirty="0">
-                <a:solidFill>
-                  <a:schemeClr val="accent4"/>
-                </a:solidFill>
-              </a:rPr>
-              <a:t>PPN</a:t>
-            </a:r>
-            <a:r>
-              <a:rPr lang="en-US" dirty="0"/>
-              <a:t>: Data from PT</a:t>
-            </a:r>
-          </a:p>
-          <a:p>
-            <a:r>
-              <a:rPr lang="en-US" dirty="0">
-                <a:solidFill>
-                  <a:schemeClr val="accent4"/>
-                </a:solidFill>
-              </a:rPr>
-              <a:t>VPN</a:t>
-            </a:r>
-            <a:r>
-              <a:rPr lang="en-US" dirty="0"/>
-              <a:t>: Data from PT</a:t>
-            </a:r>
-          </a:p>
-        </p:txBody>
-      </p:sp>
-      <p:sp>
-        <p:nvSpPr>
-          <p:cNvPr id="4" name="Date Placeholder 3">
-            <a:extLst>
-              <a:ext uri="{FF2B5EF4-FFF2-40B4-BE49-F238E27FC236}">
-                <a16:creationId xmlns:a16="http://schemas.microsoft.com/office/drawing/2014/main" id="{675D588D-23DB-E22B-5136-62CE56C8BAA8}"/>
-              </a:ext>
-            </a:extLst>
-          </p:cNvPr>
-          <p:cNvSpPr>
-            <a:spLocks noGrp="1"/>
-          </p:cNvSpPr>
-          <p:nvPr>
-            <p:ph type="dt" sz="half" idx="10"/>
-          </p:nvPr>
-        </p:nvSpPr>
-        <p:spPr/>
-        <p:txBody>
-          <a:bodyPr/>
-          <a:lstStyle/>
-          <a:p>
-            <a:fld id="{B4B13859-67C5-4393-B6C2-556CF3F770C0}" type="datetime3">
-              <a:rPr lang="en-US" smtClean="0"/>
-              <a:t>15 April 2026</a:t>
-            </a:fld>
-            <a:endParaRPr lang="en-US"/>
-          </a:p>
-        </p:txBody>
-      </p:sp>
-      <p:sp>
-        <p:nvSpPr>
-          <p:cNvPr id="6" name="Slide Number Placeholder 5">
-            <a:extLst>
-              <a:ext uri="{FF2B5EF4-FFF2-40B4-BE49-F238E27FC236}">
-                <a16:creationId xmlns:a16="http://schemas.microsoft.com/office/drawing/2014/main" id="{D33CBB0B-8493-2FB0-BA99-76A892D5795C}"/>
-              </a:ext>
-            </a:extLst>
-          </p:cNvPr>
-          <p:cNvSpPr>
-            <a:spLocks noGrp="1"/>
-          </p:cNvSpPr>
-          <p:nvPr>
-            <p:ph type="sldNum" sz="quarter" idx="12"/>
-          </p:nvPr>
-        </p:nvSpPr>
-        <p:spPr/>
-        <p:txBody>
-          <a:bodyPr/>
-          <a:lstStyle/>
-          <a:p>
-            <a:fld id="{98AC3541-01C1-4CA5-B68F-FEE868C7D1AF}" type="slidenum">
-              <a:rPr lang="en-US" smtClean="0"/>
-              <a:t>39</a:t>
-            </a:fld>
-            <a:endParaRPr lang="en-US"/>
-          </a:p>
-        </p:txBody>
-      </p:sp>
-      <p:pic>
-        <p:nvPicPr>
-          <p:cNvPr id="8" name="Picture 7">
-            <a:extLst>
-              <a:ext uri="{FF2B5EF4-FFF2-40B4-BE49-F238E27FC236}">
-                <a16:creationId xmlns:a16="http://schemas.microsoft.com/office/drawing/2014/main" id="{CE8B5B0F-1DE3-EE03-1050-30761D2BFCB4}"/>
-              </a:ext>
-            </a:extLst>
-          </p:cNvPr>
-          <p:cNvPicPr>
-            <a:picLocks noChangeAspect="1"/>
-          </p:cNvPicPr>
-          <p:nvPr/>
-        </p:nvPicPr>
-        <p:blipFill>
-          <a:blip r:embed="rId2"/>
-          <a:stretch>
-            <a:fillRect/>
-          </a:stretch>
-        </p:blipFill>
-        <p:spPr>
-          <a:xfrm>
-            <a:off x="1624792" y="1467842"/>
-            <a:ext cx="5894417" cy="671606"/>
-          </a:xfrm>
-          <a:prstGeom prst="rect">
-            <a:avLst/>
-          </a:prstGeom>
-        </p:spPr>
-      </p:pic>
-    </p:spTree>
-    <p:extLst>
-      <p:ext uri="{BB962C8B-B14F-4D97-AF65-F5344CB8AC3E}">
-        <p14:creationId xmlns:p14="http://schemas.microsoft.com/office/powerpoint/2010/main" val="69410918"/>
-      </p:ext>
-    </p:extLst>
-  </p:cSld>
-  <p:clrMapOvr>
-    <a:masterClrMapping/>
-  </p:clrMapOvr>
-</p:sld>
-</file>
-
 <file path=ppt/slides/slide4.xml><?xml version="1.0" encoding="utf-8"?>
 <p:sld xmlns:a="http://schemas.openxmlformats.org/drawingml/2006/main" xmlns:r="http://schemas.openxmlformats.org/officeDocument/2006/relationships" xmlns:p="http://schemas.openxmlformats.org/presentationml/2006/main">
   <p:cSld>
@@ -21626,7 +23622,7 @@
           <a:p>
             <a:fld id="{B4B13859-67C5-4393-B6C2-556CF3F770C0}" type="datetime3">
               <a:rPr lang="en-US" smtClean="0"/>
-              <a:t>15 April 2026</a:t>
+              <a:t>22 April 2026</a:t>
             </a:fld>
             <a:endParaRPr lang="en-US"/>
           </a:p>
@@ -22018,6 +24014,272 @@
           <p:cNvPr id="2" name="Title 1">
             <a:extLst>
               <a:ext uri="{FF2B5EF4-FFF2-40B4-BE49-F238E27FC236}">
+                <a16:creationId xmlns:a16="http://schemas.microsoft.com/office/drawing/2014/main" id="{F23B10E1-1D56-EBA9-B832-FF3CE0D02A3B}"/>
+              </a:ext>
+            </a:extLst>
+          </p:cNvPr>
+          <p:cNvSpPr>
+            <a:spLocks noGrp="1"/>
+          </p:cNvSpPr>
+          <p:nvPr>
+            <p:ph type="title"/>
+          </p:nvPr>
+        </p:nvSpPr>
+        <p:spPr/>
+        <p:txBody>
+          <a:bodyPr/>
+          <a:lstStyle/>
+          <a:p>
+            <a:r>
+              <a:rPr lang="en-US" dirty="0"/>
+              <a:t>Typical TLB entry format</a:t>
+            </a:r>
+          </a:p>
+        </p:txBody>
+      </p:sp>
+      <p:sp>
+        <p:nvSpPr>
+          <p:cNvPr id="3" name="Content Placeholder 2">
+            <a:extLst>
+              <a:ext uri="{FF2B5EF4-FFF2-40B4-BE49-F238E27FC236}">
+                <a16:creationId xmlns:a16="http://schemas.microsoft.com/office/drawing/2014/main" id="{D34D078F-73F2-30DB-C44A-B8DBE26063EB}"/>
+              </a:ext>
+            </a:extLst>
+          </p:cNvPr>
+          <p:cNvSpPr>
+            <a:spLocks noGrp="1"/>
+          </p:cNvSpPr>
+          <p:nvPr>
+            <p:ph idx="1"/>
+          </p:nvPr>
+        </p:nvSpPr>
+        <p:spPr>
+          <a:xfrm>
+            <a:off x="94576" y="2239261"/>
+            <a:ext cx="8972549" cy="3333623"/>
+          </a:xfrm>
+        </p:spPr>
+        <p:txBody>
+          <a:bodyPr>
+            <a:normAutofit fontScale="92500" lnSpcReduction="20000"/>
+          </a:bodyPr>
+          <a:lstStyle/>
+          <a:p>
+            <a:r>
+              <a:rPr lang="en-US" dirty="0">
+                <a:solidFill>
+                  <a:schemeClr val="accent4"/>
+                </a:solidFill>
+              </a:rPr>
+              <a:t>Valid</a:t>
+            </a:r>
+            <a:r>
+              <a:rPr lang="en-US" dirty="0"/>
+              <a:t> whether that TLB ENTRY is valid (unrelated to PT)</a:t>
+            </a:r>
+          </a:p>
+          <a:p>
+            <a:r>
+              <a:rPr lang="en-US" dirty="0">
+                <a:solidFill>
+                  <a:schemeClr val="accent4"/>
+                </a:solidFill>
+              </a:rPr>
+              <a:t>Access Rights</a:t>
+            </a:r>
+            <a:r>
+              <a:rPr lang="en-US" dirty="0"/>
+              <a:t>: Data from the PT</a:t>
+            </a:r>
+          </a:p>
+          <a:p>
+            <a:r>
+              <a:rPr lang="en-US" dirty="0">
+                <a:solidFill>
+                  <a:schemeClr val="accent4"/>
+                </a:solidFill>
+              </a:rPr>
+              <a:t>Dirty</a:t>
+            </a:r>
+            <a:r>
+              <a:rPr lang="en-US" dirty="0"/>
+              <a:t>: Consistent with PT</a:t>
+            </a:r>
+          </a:p>
+          <a:p>
+            <a:r>
+              <a:rPr lang="en-US" dirty="0">
+                <a:solidFill>
+                  <a:schemeClr val="accent4"/>
+                </a:solidFill>
+              </a:rPr>
+              <a:t>Ref</a:t>
+            </a:r>
+            <a:r>
+              <a:rPr lang="en-US" dirty="0"/>
+              <a:t>: Used to implement LRU</a:t>
+            </a:r>
+          </a:p>
+          <a:p>
+            <a:pPr lvl="1"/>
+            <a:r>
+              <a:rPr lang="en-US" dirty="0"/>
+              <a:t>Set when page is accessed, cleared periodically</a:t>
+            </a:r>
+          </a:p>
+          <a:p>
+            <a:r>
+              <a:rPr lang="en-US" dirty="0">
+                <a:solidFill>
+                  <a:schemeClr val="accent4"/>
+                </a:solidFill>
+              </a:rPr>
+              <a:t>PPN</a:t>
+            </a:r>
+            <a:r>
+              <a:rPr lang="en-US" dirty="0"/>
+              <a:t>: Data from PT</a:t>
+            </a:r>
+          </a:p>
+          <a:p>
+            <a:r>
+              <a:rPr lang="en-US" dirty="0">
+                <a:solidFill>
+                  <a:schemeClr val="accent4"/>
+                </a:solidFill>
+              </a:rPr>
+              <a:t>VPN</a:t>
+            </a:r>
+            <a:r>
+              <a:rPr lang="en-US" dirty="0"/>
+              <a:t>: Data from PT</a:t>
+            </a:r>
+          </a:p>
+        </p:txBody>
+      </p:sp>
+      <p:sp>
+        <p:nvSpPr>
+          <p:cNvPr id="4" name="Date Placeholder 3">
+            <a:extLst>
+              <a:ext uri="{FF2B5EF4-FFF2-40B4-BE49-F238E27FC236}">
+                <a16:creationId xmlns:a16="http://schemas.microsoft.com/office/drawing/2014/main" id="{675D588D-23DB-E22B-5136-62CE56C8BAA8}"/>
+              </a:ext>
+            </a:extLst>
+          </p:cNvPr>
+          <p:cNvSpPr>
+            <a:spLocks noGrp="1"/>
+          </p:cNvSpPr>
+          <p:nvPr>
+            <p:ph type="dt" sz="half" idx="10"/>
+          </p:nvPr>
+        </p:nvSpPr>
+        <p:spPr/>
+        <p:txBody>
+          <a:bodyPr/>
+          <a:lstStyle/>
+          <a:p>
+            <a:fld id="{B4B13859-67C5-4393-B6C2-556CF3F770C0}" type="datetime3">
+              <a:rPr lang="en-US" smtClean="0"/>
+              <a:t>22 April 2026</a:t>
+            </a:fld>
+            <a:endParaRPr lang="en-US"/>
+          </a:p>
+        </p:txBody>
+      </p:sp>
+      <p:sp>
+        <p:nvSpPr>
+          <p:cNvPr id="6" name="Slide Number Placeholder 5">
+            <a:extLst>
+              <a:ext uri="{FF2B5EF4-FFF2-40B4-BE49-F238E27FC236}">
+                <a16:creationId xmlns:a16="http://schemas.microsoft.com/office/drawing/2014/main" id="{D33CBB0B-8493-2FB0-BA99-76A892D5795C}"/>
+              </a:ext>
+            </a:extLst>
+          </p:cNvPr>
+          <p:cNvSpPr>
+            <a:spLocks noGrp="1"/>
+          </p:cNvSpPr>
+          <p:nvPr>
+            <p:ph type="sldNum" sz="quarter" idx="12"/>
+          </p:nvPr>
+        </p:nvSpPr>
+        <p:spPr/>
+        <p:txBody>
+          <a:bodyPr/>
+          <a:lstStyle/>
+          <a:p>
+            <a:fld id="{98AC3541-01C1-4CA5-B68F-FEE868C7D1AF}" type="slidenum">
+              <a:rPr lang="en-US" smtClean="0"/>
+              <a:t>40</a:t>
+            </a:fld>
+            <a:endParaRPr lang="en-US"/>
+          </a:p>
+        </p:txBody>
+      </p:sp>
+      <p:pic>
+        <p:nvPicPr>
+          <p:cNvPr id="8" name="Picture 7">
+            <a:extLst>
+              <a:ext uri="{FF2B5EF4-FFF2-40B4-BE49-F238E27FC236}">
+                <a16:creationId xmlns:a16="http://schemas.microsoft.com/office/drawing/2014/main" id="{CE8B5B0F-1DE3-EE03-1050-30761D2BFCB4}"/>
+              </a:ext>
+            </a:extLst>
+          </p:cNvPr>
+          <p:cNvPicPr>
+            <a:picLocks noChangeAspect="1"/>
+          </p:cNvPicPr>
+          <p:nvPr/>
+        </p:nvPicPr>
+        <p:blipFill>
+          <a:blip r:embed="rId2"/>
+          <a:stretch>
+            <a:fillRect/>
+          </a:stretch>
+        </p:blipFill>
+        <p:spPr>
+          <a:xfrm>
+            <a:off x="1624792" y="1467842"/>
+            <a:ext cx="5894417" cy="671606"/>
+          </a:xfrm>
+          <a:prstGeom prst="rect">
+            <a:avLst/>
+          </a:prstGeom>
+        </p:spPr>
+      </p:pic>
+    </p:spTree>
+    <p:extLst>
+      <p:ext uri="{BB962C8B-B14F-4D97-AF65-F5344CB8AC3E}">
+        <p14:creationId xmlns:p14="http://schemas.microsoft.com/office/powerpoint/2010/main" val="69410918"/>
+      </p:ext>
+    </p:extLst>
+  </p:cSld>
+  <p:clrMapOvr>
+    <a:masterClrMapping/>
+  </p:clrMapOvr>
+</p:sld>
+</file>
+
+<file path=ppt/slides/slide41.xml><?xml version="1.0" encoding="utf-8"?>
+<p:sld xmlns:a="http://schemas.openxmlformats.org/drawingml/2006/main" xmlns:r="http://schemas.openxmlformats.org/officeDocument/2006/relationships" xmlns:p="http://schemas.openxmlformats.org/presentationml/2006/main">
+  <p:cSld>
+    <p:spTree>
+      <p:nvGrpSpPr>
+        <p:cNvPr id="1" name=""/>
+        <p:cNvGrpSpPr/>
+        <p:nvPr/>
+      </p:nvGrpSpPr>
+      <p:grpSpPr>
+        <a:xfrm>
+          <a:off x="0" y="0"/>
+          <a:ext cx="0" cy="0"/>
+          <a:chOff x="0" y="0"/>
+          <a:chExt cx="0" cy="0"/>
+        </a:xfrm>
+      </p:grpSpPr>
+      <p:sp>
+        <p:nvSpPr>
+          <p:cNvPr id="2" name="Title 1">
+            <a:extLst>
+              <a:ext uri="{FF2B5EF4-FFF2-40B4-BE49-F238E27FC236}">
                 <a16:creationId xmlns:a16="http://schemas.microsoft.com/office/drawing/2014/main" id="{C82FAAAF-11C7-A843-7330-D4F1EABD043A}"/>
               </a:ext>
             </a:extLst>
@@ -22141,7 +24403,7 @@
           <a:p>
             <a:fld id="{B4B13859-67C5-4393-B6C2-556CF3F770C0}" type="datetime3">
               <a:rPr lang="en-US" smtClean="0"/>
-              <a:t>15 April 2026</a:t>
+              <a:t>22 April 2026</a:t>
             </a:fld>
             <a:endParaRPr lang="en-US"/>
           </a:p>
@@ -22170,7 +24432,7 @@
           <a:p>
             <a:fld id="{98AC3541-01C1-4CA5-B68F-FEE868C7D1AF}" type="slidenum">
               <a:rPr lang="en-US" smtClean="0"/>
-              <a:t>40</a:t>
+              <a:t>41</a:t>
             </a:fld>
             <a:endParaRPr lang="en-US"/>
           </a:p>
@@ -22611,7 +24873,7 @@
 </p:sld>
 </file>
 
-<file path=ppt/slides/slide41.xml><?xml version="1.0" encoding="utf-8"?>
+<file path=ppt/slides/slide42.xml><?xml version="1.0" encoding="utf-8"?>
 <p:sld xmlns:a="http://schemas.openxmlformats.org/drawingml/2006/main" xmlns:r="http://schemas.openxmlformats.org/officeDocument/2006/relationships" xmlns:p="http://schemas.openxmlformats.org/presentationml/2006/main">
   <p:cSld>
     <p:spTree>
@@ -22751,7 +25013,7 @@
           <a:p>
             <a:fld id="{B4B13859-67C5-4393-B6C2-556CF3F770C0}" type="datetime3">
               <a:rPr lang="en-US" smtClean="0"/>
-              <a:t>15 April 2026</a:t>
+              <a:t>22 April 2026</a:t>
             </a:fld>
             <a:endParaRPr lang="en-US"/>
           </a:p>
@@ -22780,7 +25042,7 @@
           <a:p>
             <a:fld id="{98AC3541-01C1-4CA5-B68F-FEE868C7D1AF}" type="slidenum">
               <a:rPr lang="en-US" smtClean="0"/>
-              <a:t>41</a:t>
+              <a:t>42</a:t>
             </a:fld>
             <a:endParaRPr lang="en-US"/>
           </a:p>
@@ -23175,7 +25437,7 @@
 </p:sld>
 </file>
 
-<file path=ppt/slides/slide42.xml><?xml version="1.0" encoding="utf-8"?>
+<file path=ppt/slides/slide43.xml><?xml version="1.0" encoding="utf-8"?>
 <p:sld xmlns:a="http://schemas.openxmlformats.org/drawingml/2006/main" xmlns:r="http://schemas.openxmlformats.org/officeDocument/2006/relationships" xmlns:p="http://schemas.openxmlformats.org/presentationml/2006/main">
   <p:cSld>
     <p:spTree>
@@ -23300,7 +25562,7 @@
           <a:p>
             <a:fld id="{B4B13859-67C5-4393-B6C2-556CF3F770C0}" type="datetime3">
               <a:rPr lang="en-US" smtClean="0"/>
-              <a:t>15 April 2026</a:t>
+              <a:t>22 April 2026</a:t>
             </a:fld>
             <a:endParaRPr lang="en-US"/>
           </a:p>
@@ -23329,7 +25591,7 @@
           <a:p>
             <a:fld id="{98AC3541-01C1-4CA5-B68F-FEE868C7D1AF}" type="slidenum">
               <a:rPr lang="en-US" smtClean="0"/>
-              <a:t>42</a:t>
+              <a:t>43</a:t>
             </a:fld>
             <a:endParaRPr lang="en-US"/>
           </a:p>
@@ -23869,7 +26131,7 @@
 </p:sld>
 </file>
 
-<file path=ppt/slides/slide43.xml><?xml version="1.0" encoding="utf-8"?>
+<file path=ppt/slides/slide44.xml><?xml version="1.0" encoding="utf-8"?>
 <p:sld xmlns:a="http://schemas.openxmlformats.org/drawingml/2006/main" xmlns:r="http://schemas.openxmlformats.org/officeDocument/2006/relationships" xmlns:p="http://schemas.openxmlformats.org/presentationml/2006/main">
   <p:cSld>
     <p:spTree>
@@ -24053,7 +26315,7 @@
           <a:p>
             <a:fld id="{07E0464C-7207-4298-A27C-0CEAF85D3DD1}" type="datetime3">
               <a:rPr lang="en-US" smtClean="0"/>
-              <a:t>15 April 2026</a:t>
+              <a:t>22 April 2026</a:t>
             </a:fld>
             <a:endParaRPr lang="en-US"/>
           </a:p>
@@ -24082,7 +26344,7 @@
           <a:p>
             <a:fld id="{98AC3541-01C1-4CA5-B68F-FEE868C7D1AF}" type="slidenum">
               <a:rPr lang="en-US" smtClean="0"/>
-              <a:t>43</a:t>
+              <a:t>44</a:t>
             </a:fld>
             <a:endParaRPr lang="en-US"/>
           </a:p>
@@ -25318,7 +27580,7 @@
 </p:sld>
 </file>
 
-<file path=ppt/slides/slide44.xml><?xml version="1.0" encoding="utf-8"?>
+<file path=ppt/slides/slide45.xml><?xml version="1.0" encoding="utf-8"?>
 <p:sld xmlns:a="http://schemas.openxmlformats.org/drawingml/2006/main" xmlns:r="http://schemas.openxmlformats.org/officeDocument/2006/relationships" xmlns:p="http://schemas.openxmlformats.org/presentationml/2006/main">
   <p:cSld>
     <p:spTree>
@@ -25357,7 +27619,7 @@
         </p:blipFill>
         <p:spPr>
           <a:xfrm>
-            <a:off x="3810000" y="3505200"/>
+            <a:off x="3877147" y="3733800"/>
             <a:ext cx="5266853" cy="2809408"/>
           </a:xfrm>
           <a:prstGeom prst="rect">
@@ -25409,7 +27671,12 @@
             <p:ph idx="1"/>
           </p:nvPr>
         </p:nvSpPr>
-        <p:spPr/>
+        <p:spPr>
+          <a:xfrm>
+            <a:off x="152400" y="1387477"/>
+            <a:ext cx="8839200" cy="5165723"/>
+          </a:xfrm>
+        </p:spPr>
         <p:txBody>
           <a:bodyPr/>
           <a:lstStyle/>
@@ -25456,14 +27723,28 @@
             <a:pPr lvl="1"/>
             <a:r>
               <a:rPr lang="en-US" sz="2000" dirty="0"/>
-              <a:t>Variable page size (segments)</a:t>
+              <a:t>Variable page size</a:t>
+            </a:r>
+            <a:br>
+              <a:rPr lang="en-US" sz="2000" dirty="0"/>
+            </a:br>
+            <a:r>
+              <a:rPr lang="en-US" sz="2000" dirty="0"/>
+              <a:t>(segments)</a:t>
             </a:r>
           </a:p>
           <a:p>
             <a:pPr lvl="1"/>
             <a:r>
               <a:rPr lang="en-US" sz="2000" dirty="0"/>
-              <a:t>Special situationally-used “</a:t>
+              <a:t>Special situationally-used</a:t>
+            </a:r>
+            <a:br>
+              <a:rPr lang="en-US" sz="2000" dirty="0"/>
+            </a:br>
+            <a:r>
+              <a:rPr lang="en-US" sz="2000" dirty="0"/>
+              <a:t>“</a:t>
             </a:r>
             <a:r>
               <a:rPr lang="en-US" sz="2000" dirty="0" err="1"/>
@@ -25499,7 +27780,7 @@
           <a:p>
             <a:fld id="{B4B13859-67C5-4393-B6C2-556CF3F770C0}" type="datetime3">
               <a:rPr lang="en-US" smtClean="0"/>
-              <a:t>15 April 2026</a:t>
+              <a:t>22 April 2026</a:t>
             </a:fld>
             <a:endParaRPr lang="en-US"/>
           </a:p>
@@ -25528,7 +27809,7 @@
           <a:p>
             <a:fld id="{98AC3541-01C1-4CA5-B68F-FEE868C7D1AF}" type="slidenum">
               <a:rPr lang="en-US" smtClean="0"/>
-              <a:t>44</a:t>
+              <a:t>45</a:t>
             </a:fld>
             <a:endParaRPr lang="en-US"/>
           </a:p>
@@ -25547,7 +27828,7 @@
 </p:sld>
 </file>
 
-<file path=ppt/slides/slide45.xml><?xml version="1.0" encoding="utf-8"?>
+<file path=ppt/slides/slide46.xml><?xml version="1.0" encoding="utf-8"?>
 <p:sld xmlns:a="http://schemas.openxmlformats.org/drawingml/2006/main" xmlns:r="http://schemas.openxmlformats.org/officeDocument/2006/relationships" xmlns:p="http://schemas.openxmlformats.org/presentationml/2006/main">
   <p:cSld>
     <p:spTree>
@@ -25644,7 +27925,7 @@
           <a:p>
             <a:fld id="{B4B13859-67C5-4393-B6C2-556CF3F770C0}" type="datetime3">
               <a:rPr lang="en-US" smtClean="0"/>
-              <a:t>15 April 2026</a:t>
+              <a:t>22 April 2026</a:t>
             </a:fld>
             <a:endParaRPr lang="en-US"/>
           </a:p>
@@ -25673,7 +27954,7 @@
           <a:p>
             <a:fld id="{98AC3541-01C1-4CA5-B68F-FEE868C7D1AF}" type="slidenum">
               <a:rPr lang="en-US" smtClean="0"/>
-              <a:t>45</a:t>
+              <a:t>46</a:t>
             </a:fld>
             <a:endParaRPr lang="en-US"/>
           </a:p>
@@ -25837,7 +28118,7 @@
           <a:p>
             <a:fld id="{B4B13859-67C5-4393-B6C2-556CF3F770C0}" type="datetime3">
               <a:rPr lang="en-US" smtClean="0"/>
-              <a:t>15 April 2026</a:t>
+              <a:t>22 April 2026</a:t>
             </a:fld>
             <a:endParaRPr lang="en-US"/>
           </a:p>
@@ -26363,7 +28644,7 @@
           <a:p>
             <a:fld id="{B4B13859-67C5-4393-B6C2-556CF3F770C0}" type="datetime3">
               <a:rPr lang="en-US" smtClean="0"/>
-              <a:t>15 April 2026</a:t>
+              <a:t>22 April 2026</a:t>
             </a:fld>
             <a:endParaRPr lang="en-US"/>
           </a:p>
@@ -27085,7 +29366,7 @@
           <a:p>
             <a:fld id="{B4B13859-67C5-4393-B6C2-556CF3F770C0}" type="datetime3">
               <a:rPr lang="en-US" smtClean="0"/>
-              <a:t>15 April 2026</a:t>
+              <a:t>22 April 2026</a:t>
             </a:fld>
             <a:endParaRPr lang="en-US"/>
           </a:p>
@@ -27676,7 +29957,7 @@
           <a:p>
             <a:fld id="{B4B13859-67C5-4393-B6C2-556CF3F770C0}" type="datetime3">
               <a:rPr lang="en-US" smtClean="0"/>
-              <a:t>15 April 2026</a:t>
+              <a:t>22 April 2026</a:t>
             </a:fld>
             <a:endParaRPr lang="en-US"/>
           </a:p>
@@ -27834,7 +30115,7 @@
           <a:p>
             <a:fld id="{B4B13859-67C5-4393-B6C2-556CF3F770C0}" type="datetime3">
               <a:rPr lang="en-US" smtClean="0"/>
-              <a:t>15 April 2026</a:t>
+              <a:t>22 April 2026</a:t>
             </a:fld>
             <a:endParaRPr lang="en-US"/>
           </a:p>

--- a/Lec-33-36-VM.pptx
+++ b/Lec-33-36-VM.pptx
@@ -5,7 +5,7 @@
     <p:sldMasterId id="2147483648" r:id="rId1"/>
   </p:sldMasterIdLst>
   <p:notesMasterIdLst>
-    <p:notesMasterId r:id="rId48"/>
+    <p:notesMasterId r:id="rId49"/>
   </p:notesMasterIdLst>
   <p:sldIdLst>
     <p:sldId id="337" r:id="rId2"/>
@@ -44,16 +44,17 @@
     <p:sldId id="291" r:id="rId35"/>
     <p:sldId id="292" r:id="rId36"/>
     <p:sldId id="339" r:id="rId37"/>
-    <p:sldId id="294" r:id="rId38"/>
-    <p:sldId id="295" r:id="rId39"/>
-    <p:sldId id="296" r:id="rId40"/>
-    <p:sldId id="297" r:id="rId41"/>
-    <p:sldId id="298" r:id="rId42"/>
-    <p:sldId id="299" r:id="rId43"/>
-    <p:sldId id="300" r:id="rId44"/>
-    <p:sldId id="301" r:id="rId45"/>
-    <p:sldId id="302" r:id="rId46"/>
-    <p:sldId id="303" r:id="rId47"/>
+    <p:sldId id="340" r:id="rId38"/>
+    <p:sldId id="294" r:id="rId39"/>
+    <p:sldId id="295" r:id="rId40"/>
+    <p:sldId id="296" r:id="rId41"/>
+    <p:sldId id="297" r:id="rId42"/>
+    <p:sldId id="298" r:id="rId43"/>
+    <p:sldId id="299" r:id="rId44"/>
+    <p:sldId id="300" r:id="rId45"/>
+    <p:sldId id="301" r:id="rId46"/>
+    <p:sldId id="302" r:id="rId47"/>
+    <p:sldId id="303" r:id="rId48"/>
   </p:sldIdLst>
   <p:sldSz cx="9144000" cy="6858000" type="screen4x3"/>
   <p:notesSz cx="6858000" cy="9144000"/>
@@ -335,7 +336,7 @@
               <a:pPr>
                 <a:defRPr/>
               </a:pPr>
-              <a:t>4/22/2026</a:t>
+              <a:t>4/24/2026</a:t>
             </a:fld>
             <a:endParaRPr lang="en-US"/>
           </a:p>
@@ -2156,7 +2157,7 @@
           <a:p>
             <a:fld id="{07E0464C-7207-4298-A27C-0CEAF85D3DD1}" type="datetime3">
               <a:rPr lang="en-US" smtClean="0"/>
-              <a:t>22 April 2026</a:t>
+              <a:t>24 April 2026</a:t>
             </a:fld>
             <a:endParaRPr lang="en-US"/>
           </a:p>
@@ -2487,7 +2488,7 @@
           <a:p>
             <a:fld id="{07E0464C-7207-4298-A27C-0CEAF85D3DD1}" type="datetime3">
               <a:rPr lang="en-US" smtClean="0"/>
-              <a:t>22 April 2026</a:t>
+              <a:t>24 April 2026</a:t>
             </a:fld>
             <a:endParaRPr lang="en-US"/>
           </a:p>
@@ -2818,7 +2819,7 @@
           <a:p>
             <a:fld id="{07E0464C-7207-4298-A27C-0CEAF85D3DD1}" type="datetime3">
               <a:rPr lang="en-US" smtClean="0"/>
-              <a:t>22 April 2026</a:t>
+              <a:t>24 April 2026</a:t>
             </a:fld>
             <a:endParaRPr lang="en-US"/>
           </a:p>
@@ -3149,7 +3150,7 @@
           <a:p>
             <a:fld id="{07E0464C-7207-4298-A27C-0CEAF85D3DD1}" type="datetime3">
               <a:rPr lang="en-US" smtClean="0"/>
-              <a:t>22 April 2026</a:t>
+              <a:t>24 April 2026</a:t>
             </a:fld>
             <a:endParaRPr lang="en-US"/>
           </a:p>
@@ -7380,7 +7381,7 @@
           <a:p>
             <a:fld id="{B4B13859-67C5-4393-B6C2-556CF3F770C0}" type="datetime3">
               <a:rPr lang="en-US" smtClean="0"/>
-              <a:t>22 April 2026</a:t>
+              <a:t>24 April 2026</a:t>
             </a:fld>
             <a:endParaRPr lang="en-US"/>
           </a:p>
@@ -7538,7 +7539,7 @@
           <a:p>
             <a:fld id="{B4B13859-67C5-4393-B6C2-556CF3F770C0}" type="datetime3">
               <a:rPr lang="en-US" smtClean="0"/>
-              <a:t>22 April 2026</a:t>
+              <a:t>24 April 2026</a:t>
             </a:fld>
             <a:endParaRPr lang="en-US"/>
           </a:p>
@@ -7696,7 +7697,7 @@
           <a:p>
             <a:fld id="{B4B13859-67C5-4393-B6C2-556CF3F770C0}" type="datetime3">
               <a:rPr lang="en-US" smtClean="0"/>
-              <a:t>22 April 2026</a:t>
+              <a:t>24 April 2026</a:t>
             </a:fld>
             <a:endParaRPr lang="en-US"/>
           </a:p>
@@ -7983,7 +7984,7 @@
           <a:p>
             <a:fld id="{B4B13859-67C5-4393-B6C2-556CF3F770C0}" type="datetime3">
               <a:rPr lang="en-US" smtClean="0"/>
-              <a:t>22 April 2026</a:t>
+              <a:t>24 April 2026</a:t>
             </a:fld>
             <a:endParaRPr lang="en-US"/>
           </a:p>
@@ -8270,7 +8271,7 @@
           <a:p>
             <a:fld id="{B4B13859-67C5-4393-B6C2-556CF3F770C0}" type="datetime3">
               <a:rPr lang="en-US" smtClean="0"/>
-              <a:t>22 April 2026</a:t>
+              <a:t>24 April 2026</a:t>
             </a:fld>
             <a:endParaRPr lang="en-US"/>
           </a:p>
@@ -8428,7 +8429,7 @@
           <a:p>
             <a:fld id="{B4B13859-67C5-4393-B6C2-556CF3F770C0}" type="datetime3">
               <a:rPr lang="en-US" smtClean="0"/>
-              <a:t>22 April 2026</a:t>
+              <a:t>24 April 2026</a:t>
             </a:fld>
             <a:endParaRPr lang="en-US"/>
           </a:p>
@@ -8865,7 +8866,7 @@
           <a:p>
             <a:fld id="{B4B13859-67C5-4393-B6C2-556CF3F770C0}" type="datetime3">
               <a:rPr lang="en-US" smtClean="0"/>
-              <a:t>22 April 2026</a:t>
+              <a:t>24 April 2026</a:t>
             </a:fld>
             <a:endParaRPr lang="en-US"/>
           </a:p>
@@ -9023,7 +9024,7 @@
           <a:p>
             <a:fld id="{B4B13859-67C5-4393-B6C2-556CF3F770C0}" type="datetime3">
               <a:rPr lang="en-US" smtClean="0"/>
-              <a:t>22 April 2026</a:t>
+              <a:t>24 April 2026</a:t>
             </a:fld>
             <a:endParaRPr lang="en-US"/>
           </a:p>
@@ -9260,7 +9261,7 @@
           <a:p>
             <a:fld id="{B4B13859-67C5-4393-B6C2-556CF3F770C0}" type="datetime3">
               <a:rPr lang="en-US" smtClean="0"/>
-              <a:t>22 April 2026</a:t>
+              <a:t>24 April 2026</a:t>
             </a:fld>
             <a:endParaRPr lang="en-US"/>
           </a:p>
@@ -10075,7 +10076,7 @@
           <a:p>
             <a:fld id="{B4B13859-67C5-4393-B6C2-556CF3F770C0}" type="datetime3">
               <a:rPr lang="en-US" smtClean="0"/>
-              <a:t>22 April 2026</a:t>
+              <a:t>24 April 2026</a:t>
             </a:fld>
             <a:endParaRPr lang="en-US"/>
           </a:p>
@@ -10230,7 +10231,7 @@
           <a:p>
             <a:fld id="{80BB22E8-26ED-463F-B679-BA0BC002EC33}" type="datetime3">
               <a:rPr lang="en-US" smtClean="0"/>
-              <a:t>22 April 2026</a:t>
+              <a:t>24 April 2026</a:t>
             </a:fld>
             <a:endParaRPr lang="en-US"/>
           </a:p>
@@ -11117,7 +11118,7 @@
           <a:p>
             <a:fld id="{B4B13859-67C5-4393-B6C2-556CF3F770C0}" type="datetime3">
               <a:rPr lang="en-US" smtClean="0"/>
-              <a:t>22 April 2026</a:t>
+              <a:t>24 April 2026</a:t>
             </a:fld>
             <a:endParaRPr lang="en-US"/>
           </a:p>
@@ -11233,7 +11234,7 @@
           <a:p>
             <a:fld id="{B4B13859-67C5-4393-B6C2-556CF3F770C0}" type="datetime3">
               <a:rPr lang="en-US" smtClean="0"/>
-              <a:t>22 April 2026</a:t>
+              <a:t>24 April 2026</a:t>
             </a:fld>
             <a:endParaRPr lang="en-US"/>
           </a:p>
@@ -11544,7 +11545,7 @@
           <a:p>
             <a:fld id="{B4B13859-67C5-4393-B6C2-556CF3F770C0}" type="datetime3">
               <a:rPr lang="en-US" smtClean="0"/>
-              <a:t>22 April 2026</a:t>
+              <a:t>24 April 2026</a:t>
             </a:fld>
             <a:endParaRPr lang="en-US" dirty="0"/>
           </a:p>
@@ -12290,7 +12291,7 @@
           <a:p>
             <a:fld id="{B4B13859-67C5-4393-B6C2-556CF3F770C0}" type="datetime3">
               <a:rPr lang="en-US" smtClean="0"/>
-              <a:t>22 April 2026</a:t>
+              <a:t>24 April 2026</a:t>
             </a:fld>
             <a:endParaRPr lang="en-US"/>
           </a:p>
@@ -13033,7 +13034,7 @@
           <a:p>
             <a:fld id="{B4B13859-67C5-4393-B6C2-556CF3F770C0}" type="datetime3">
               <a:rPr lang="en-US" smtClean="0"/>
-              <a:t>22 April 2026</a:t>
+              <a:t>24 April 2026</a:t>
             </a:fld>
             <a:endParaRPr lang="en-US"/>
           </a:p>
@@ -13614,7 +13615,7 @@
           <a:p>
             <a:fld id="{B4B13859-67C5-4393-B6C2-556CF3F770C0}" type="datetime3">
               <a:rPr lang="en-US" smtClean="0"/>
-              <a:t>22 April 2026</a:t>
+              <a:t>24 April 2026</a:t>
             </a:fld>
             <a:endParaRPr lang="en-US"/>
           </a:p>
@@ -14233,7 +14234,7 @@
           <a:p>
             <a:fld id="{B4B13859-67C5-4393-B6C2-556CF3F770C0}" type="datetime3">
               <a:rPr lang="en-US" smtClean="0"/>
-              <a:t>22 April 2026</a:t>
+              <a:t>24 April 2026</a:t>
             </a:fld>
             <a:endParaRPr lang="en-US"/>
           </a:p>
@@ -14383,7 +14384,7 @@
           <a:p>
             <a:fld id="{B4B13859-67C5-4393-B6C2-556CF3F770C0}" type="datetime3">
               <a:rPr lang="en-US" smtClean="0"/>
-              <a:t>22 April 2026</a:t>
+              <a:t>24 April 2026</a:t>
             </a:fld>
             <a:endParaRPr lang="en-US"/>
           </a:p>
@@ -14604,7 +14605,7 @@
           <a:p>
             <a:fld id="{B4B13859-67C5-4393-B6C2-556CF3F770C0}" type="datetime3">
               <a:rPr lang="en-US" smtClean="0"/>
-              <a:t>22 April 2026</a:t>
+              <a:t>24 April 2026</a:t>
             </a:fld>
             <a:endParaRPr lang="en-US"/>
           </a:p>
@@ -15315,7 +15316,7 @@
           <a:p>
             <a:fld id="{B4B13859-67C5-4393-B6C2-556CF3F770C0}" type="datetime3">
               <a:rPr lang="en-US" smtClean="0"/>
-              <a:t>22 April 2026</a:t>
+              <a:t>24 April 2026</a:t>
             </a:fld>
             <a:endParaRPr lang="en-US"/>
           </a:p>
@@ -15874,7 +15875,7 @@
           <a:p>
             <a:fld id="{B4B13859-67C5-4393-B6C2-556CF3F770C0}" type="datetime3">
               <a:rPr lang="en-US" smtClean="0"/>
-              <a:t>22 April 2026</a:t>
+              <a:t>24 April 2026</a:t>
             </a:fld>
             <a:endParaRPr lang="en-US"/>
           </a:p>
@@ -16314,7 +16315,7 @@
           <a:p>
             <a:fld id="{B4B13859-67C5-4393-B6C2-556CF3F770C0}" type="datetime3">
               <a:rPr lang="en-US" smtClean="0"/>
-              <a:t>22 April 2026</a:t>
+              <a:t>24 April 2026</a:t>
             </a:fld>
             <a:endParaRPr lang="en-US"/>
           </a:p>
@@ -17019,7 +17020,7 @@
           <a:p>
             <a:fld id="{B4B13859-67C5-4393-B6C2-556CF3F770C0}" type="datetime3">
               <a:rPr lang="en-US" smtClean="0"/>
-              <a:t>22 April 2026</a:t>
+              <a:t>24 April 2026</a:t>
             </a:fld>
             <a:endParaRPr lang="en-US"/>
           </a:p>
@@ -18433,7 +18434,7 @@
           <a:p>
             <a:fld id="{B4B13859-67C5-4393-B6C2-556CF3F770C0}" type="datetime3">
               <a:rPr lang="en-US" smtClean="0"/>
-              <a:t>22 April 2026</a:t>
+              <a:t>24 April 2026</a:t>
             </a:fld>
             <a:endParaRPr lang="en-US"/>
           </a:p>
@@ -20669,7 +20670,7 @@
           <a:p>
             <a:fld id="{B4B13859-67C5-4393-B6C2-556CF3F770C0}" type="datetime3">
               <a:rPr lang="en-US" smtClean="0"/>
-              <a:t>22 April 2026</a:t>
+              <a:t>24 April 2026</a:t>
             </a:fld>
             <a:endParaRPr lang="en-US"/>
           </a:p>
@@ -21325,7 +21326,7 @@
           <a:p>
             <a:fld id="{B4B13859-67C5-4393-B6C2-556CF3F770C0}" type="datetime3">
               <a:rPr lang="en-US" smtClean="0"/>
-              <a:t>22 April 2026</a:t>
+              <a:t>24 April 2026</a:t>
             </a:fld>
             <a:endParaRPr lang="en-US"/>
           </a:p>
@@ -21603,6 +21604,2778 @@
   <p:cSld>
     <p:spTree>
       <p:nvGrpSpPr>
+        <p:cNvPr id="1" name="">
+          <a:extLst>
+            <a:ext uri="{FF2B5EF4-FFF2-40B4-BE49-F238E27FC236}">
+              <a16:creationId xmlns:a16="http://schemas.microsoft.com/office/drawing/2014/main" id="{68BBEA92-6A90-FE08-3959-84576394C329}"/>
+            </a:ext>
+          </a:extLst>
+        </p:cNvPr>
+        <p:cNvGrpSpPr/>
+        <p:nvPr/>
+      </p:nvGrpSpPr>
+      <p:grpSpPr>
+        <a:xfrm>
+          <a:off x="0" y="0"/>
+          <a:ext cx="0" cy="0"/>
+          <a:chOff x="0" y="0"/>
+          <a:chExt cx="0" cy="0"/>
+        </a:xfrm>
+      </p:grpSpPr>
+      <p:sp>
+        <p:nvSpPr>
+          <p:cNvPr id="2" name="Title 1">
+            <a:extLst>
+              <a:ext uri="{FF2B5EF4-FFF2-40B4-BE49-F238E27FC236}">
+                <a16:creationId xmlns:a16="http://schemas.microsoft.com/office/drawing/2014/main" id="{153DC3DD-13B9-AEA8-5DFE-A76B954A95D8}"/>
+              </a:ext>
+            </a:extLst>
+          </p:cNvPr>
+          <p:cNvSpPr>
+            <a:spLocks noGrp="1"/>
+          </p:cNvSpPr>
+          <p:nvPr>
+            <p:ph type="title"/>
+          </p:nvPr>
+        </p:nvSpPr>
+        <p:spPr/>
+        <p:txBody>
+          <a:bodyPr/>
+          <a:lstStyle/>
+          <a:p>
+            <a:r>
+              <a:rPr lang="en-US" dirty="0"/>
+              <a:t>Example</a:t>
+            </a:r>
+            <a:endParaRPr lang="en-IN" dirty="0"/>
+          </a:p>
+        </p:txBody>
+      </p:sp>
+      <p:sp>
+        <p:nvSpPr>
+          <p:cNvPr id="3" name="Content Placeholder 2">
+            <a:extLst>
+              <a:ext uri="{FF2B5EF4-FFF2-40B4-BE49-F238E27FC236}">
+                <a16:creationId xmlns:a16="http://schemas.microsoft.com/office/drawing/2014/main" id="{B30E1BB1-0732-516B-33A0-9DF60FD05E0E}"/>
+              </a:ext>
+            </a:extLst>
+          </p:cNvPr>
+          <p:cNvSpPr>
+            <a:spLocks noGrp="1"/>
+          </p:cNvSpPr>
+          <p:nvPr>
+            <p:ph idx="1"/>
+          </p:nvPr>
+        </p:nvSpPr>
+        <p:spPr>
+          <a:xfrm>
+            <a:off x="152400" y="1446211"/>
+            <a:ext cx="5867400" cy="5014912"/>
+          </a:xfrm>
+        </p:spPr>
+        <p:txBody>
+          <a:bodyPr/>
+          <a:lstStyle/>
+          <a:p>
+            <a:r>
+              <a:rPr lang="en-US" sz="2400" dirty="0"/>
+              <a:t>Virtual address space: 64 KB</a:t>
+            </a:r>
+          </a:p>
+          <a:p>
+            <a:r>
+              <a:rPr lang="en-US" sz="2400" dirty="0"/>
+              <a:t>Page size: 256 bytes</a:t>
+            </a:r>
+          </a:p>
+          <a:p>
+            <a:r>
+              <a:rPr lang="en-US" sz="2400" dirty="0"/>
+              <a:t>2-level page table (4 bits each for VPN1 and VPN2)</a:t>
+            </a:r>
+          </a:p>
+          <a:p>
+            <a:pPr marL="0" indent="0">
+              <a:buNone/>
+            </a:pPr>
+            <a:endParaRPr lang="en-US" sz="2400" dirty="0"/>
+          </a:p>
+          <a:p>
+            <a:pPr marL="0" indent="0">
+              <a:buNone/>
+            </a:pPr>
+            <a:r>
+              <a:rPr lang="en-US" sz="2400" dirty="0"/>
+              <a:t>Page table for a process (</a:t>
+            </a:r>
+            <a:r>
+              <a:rPr lang="en-US" sz="1800" dirty="0">
+                <a:latin typeface="Cascadia Code" panose="020B0609020000020004" pitchFamily="49" charset="0"/>
+                <a:ea typeface="Cascadia Code" panose="020B0609020000020004" pitchFamily="49" charset="0"/>
+                <a:cs typeface="Cascadia Code" panose="020B0609020000020004" pitchFamily="49" charset="0"/>
+              </a:rPr>
+              <a:t>PTBR = 0x2000</a:t>
+            </a:r>
+            <a:r>
+              <a:rPr lang="en-US" sz="2400" dirty="0"/>
+              <a:t>):</a:t>
+            </a:r>
+          </a:p>
+          <a:p>
+            <a:pPr marL="0" indent="0">
+              <a:buNone/>
+            </a:pPr>
+            <a:endParaRPr lang="en-IN" sz="2400" dirty="0"/>
+          </a:p>
+          <a:p>
+            <a:pPr marL="0" indent="0">
+              <a:buNone/>
+            </a:pPr>
+            <a:r>
+              <a:rPr lang="en-IN" sz="2400" dirty="0"/>
+              <a:t>PT Entry format:</a:t>
+            </a:r>
+          </a:p>
+        </p:txBody>
+      </p:sp>
+      <p:sp>
+        <p:nvSpPr>
+          <p:cNvPr id="4" name="Date Placeholder 3">
+            <a:extLst>
+              <a:ext uri="{FF2B5EF4-FFF2-40B4-BE49-F238E27FC236}">
+                <a16:creationId xmlns:a16="http://schemas.microsoft.com/office/drawing/2014/main" id="{D87186A4-6368-FE48-9143-F2FC9E7A273F}"/>
+              </a:ext>
+            </a:extLst>
+          </p:cNvPr>
+          <p:cNvSpPr>
+            <a:spLocks noGrp="1"/>
+          </p:cNvSpPr>
+          <p:nvPr>
+            <p:ph type="dt" sz="half" idx="10"/>
+          </p:nvPr>
+        </p:nvSpPr>
+        <p:spPr/>
+        <p:txBody>
+          <a:bodyPr/>
+          <a:lstStyle/>
+          <a:p>
+            <a:pPr>
+              <a:defRPr/>
+            </a:pPr>
+            <a:r>
+              <a:rPr lang="en-US"/>
+              <a:t>21/12/2020</a:t>
+            </a:r>
+          </a:p>
+        </p:txBody>
+      </p:sp>
+      <p:sp>
+        <p:nvSpPr>
+          <p:cNvPr id="5" name="Slide Number Placeholder 4">
+            <a:extLst>
+              <a:ext uri="{FF2B5EF4-FFF2-40B4-BE49-F238E27FC236}">
+                <a16:creationId xmlns:a16="http://schemas.microsoft.com/office/drawing/2014/main" id="{CD0E0EF6-CB36-1A17-E8D9-52059B94DFEF}"/>
+              </a:ext>
+            </a:extLst>
+          </p:cNvPr>
+          <p:cNvSpPr>
+            <a:spLocks noGrp="1"/>
+          </p:cNvSpPr>
+          <p:nvPr>
+            <p:ph type="sldNum" sz="quarter" idx="12"/>
+          </p:nvPr>
+        </p:nvSpPr>
+        <p:spPr/>
+        <p:txBody>
+          <a:bodyPr/>
+          <a:lstStyle/>
+          <a:p>
+            <a:pPr>
+              <a:defRPr/>
+            </a:pPr>
+            <a:fld id="{CA887A73-1AE0-46F8-856A-18EA1CF30A1B}" type="slidenum">
+              <a:rPr lang="en-US" altLang="en-US" smtClean="0"/>
+              <a:pPr>
+                <a:defRPr/>
+              </a:pPr>
+              <a:t>37</a:t>
+            </a:fld>
+            <a:endParaRPr lang="en-US" altLang="en-US"/>
+          </a:p>
+        </p:txBody>
+      </p:sp>
+      <p:graphicFrame>
+        <p:nvGraphicFramePr>
+          <p:cNvPr id="6" name="Table 5">
+            <a:extLst>
+              <a:ext uri="{FF2B5EF4-FFF2-40B4-BE49-F238E27FC236}">
+                <a16:creationId xmlns:a16="http://schemas.microsoft.com/office/drawing/2014/main" id="{1E288615-79F3-2124-B59F-3799AC42CFB7}"/>
+              </a:ext>
+            </a:extLst>
+          </p:cNvPr>
+          <p:cNvGraphicFramePr>
+            <a:graphicFrameLocks noGrp="1"/>
+          </p:cNvGraphicFramePr>
+          <p:nvPr>
+            <p:extLst>
+              <p:ext uri="{D42A27DB-BD31-4B8C-83A1-F6EECF244321}">
+                <p14:modId xmlns:p14="http://schemas.microsoft.com/office/powerpoint/2010/main" val="2648164894"/>
+              </p:ext>
+            </p:extLst>
+          </p:nvPr>
+        </p:nvGraphicFramePr>
+        <p:xfrm>
+          <a:off x="129493" y="4937760"/>
+          <a:ext cx="6324598" cy="853440"/>
+        </p:xfrm>
+        <a:graphic>
+          <a:graphicData uri="http://schemas.openxmlformats.org/drawingml/2006/table">
+            <a:tbl>
+              <a:tblPr/>
+              <a:tblGrid>
+                <a:gridCol w="1394507">
+                  <a:extLst>
+                    <a:ext uri="{9D8B030D-6E8A-4147-A177-3AD203B41FA5}">
+                      <a16:colId xmlns:a16="http://schemas.microsoft.com/office/drawing/2014/main" val="3231488245"/>
+                    </a:ext>
+                  </a:extLst>
+                </a:gridCol>
+                <a:gridCol w="1143000">
+                  <a:extLst>
+                    <a:ext uri="{9D8B030D-6E8A-4147-A177-3AD203B41FA5}">
+                      <a16:colId xmlns:a16="http://schemas.microsoft.com/office/drawing/2014/main" val="2074514989"/>
+                    </a:ext>
+                  </a:extLst>
+                </a:gridCol>
+                <a:gridCol w="1219200">
+                  <a:extLst>
+                    <a:ext uri="{9D8B030D-6E8A-4147-A177-3AD203B41FA5}">
+                      <a16:colId xmlns:a16="http://schemas.microsoft.com/office/drawing/2014/main" val="1495270305"/>
+                    </a:ext>
+                  </a:extLst>
+                </a:gridCol>
+                <a:gridCol w="1295400">
+                  <a:extLst>
+                    <a:ext uri="{9D8B030D-6E8A-4147-A177-3AD203B41FA5}">
+                      <a16:colId xmlns:a16="http://schemas.microsoft.com/office/drawing/2014/main" val="2698488881"/>
+                    </a:ext>
+                  </a:extLst>
+                </a:gridCol>
+                <a:gridCol w="1272491">
+                  <a:extLst>
+                    <a:ext uri="{9D8B030D-6E8A-4147-A177-3AD203B41FA5}">
+                      <a16:colId xmlns:a16="http://schemas.microsoft.com/office/drawing/2014/main" val="3512334544"/>
+                    </a:ext>
+                  </a:extLst>
+                </a:gridCol>
+              </a:tblGrid>
+              <a:tr h="0">
+                <a:tc>
+                  <a:txBody>
+                    <a:bodyPr/>
+                    <a:lstStyle/>
+                    <a:p>
+                      <a:pPr rtl="0">
+                        <a:buNone/>
+                      </a:pPr>
+                      <a:r>
+                        <a:rPr lang="en-IN" b="1" dirty="0">
+                          <a:solidFill>
+                            <a:schemeClr val="tx1">
+                              <a:lumMod val="50000"/>
+                              <a:lumOff val="50000"/>
+                            </a:schemeClr>
+                          </a:solidFill>
+                          <a:effectLst/>
+                          <a:latin typeface="Google Sans Text"/>
+                        </a:rPr>
+                        <a:t>Bits [7:4]</a:t>
+                      </a:r>
+                      <a:endParaRPr lang="en-IN" dirty="0">
+                        <a:solidFill>
+                          <a:schemeClr val="tx1">
+                            <a:lumMod val="50000"/>
+                            <a:lumOff val="50000"/>
+                          </a:schemeClr>
+                        </a:solidFill>
+                        <a:effectLst/>
+                        <a:latin typeface="Google Sans Text"/>
+                      </a:endParaRPr>
+                    </a:p>
+                  </a:txBody>
+                  <a:tcPr marR="57150" marT="76200" marB="76200" anchor="ctr">
+                    <a:lnL w="4763" cap="flat" cmpd="sng" algn="ctr">
+                      <a:solidFill>
+                        <a:schemeClr val="bg1"/>
+                      </a:solidFill>
+                      <a:prstDash val="solid"/>
+                      <a:round/>
+                      <a:headEnd type="none" w="med" len="med"/>
+                      <a:tailEnd type="none" w="med" len="med"/>
+                    </a:lnL>
+                    <a:lnR w="4763" cap="flat" cmpd="sng" algn="ctr">
+                      <a:solidFill>
+                        <a:schemeClr val="bg1"/>
+                      </a:solidFill>
+                      <a:prstDash val="solid"/>
+                      <a:round/>
+                      <a:headEnd type="none" w="med" len="med"/>
+                      <a:tailEnd type="none" w="med" len="med"/>
+                    </a:lnR>
+                    <a:lnT w="4763" cap="flat" cmpd="sng" algn="ctr">
+                      <a:solidFill>
+                        <a:schemeClr val="bg1"/>
+                      </a:solidFill>
+                      <a:prstDash val="solid"/>
+                      <a:round/>
+                      <a:headEnd type="none" w="med" len="med"/>
+                      <a:tailEnd type="none" w="med" len="med"/>
+                    </a:lnT>
+                    <a:lnB w="4763" cap="flat" cmpd="sng" algn="ctr">
+                      <a:solidFill>
+                        <a:schemeClr val="bg1"/>
+                      </a:solidFill>
+                      <a:prstDash val="solid"/>
+                      <a:round/>
+                      <a:headEnd type="none" w="med" len="med"/>
+                      <a:tailEnd type="none" w="med" len="med"/>
+                    </a:lnB>
+                    <a:noFill/>
+                  </a:tcPr>
+                </a:tc>
+                <a:tc>
+                  <a:txBody>
+                    <a:bodyPr/>
+                    <a:lstStyle/>
+                    <a:p>
+                      <a:pPr rtl="0">
+                        <a:buNone/>
+                      </a:pPr>
+                      <a:r>
+                        <a:rPr lang="en-IN" b="1">
+                          <a:solidFill>
+                            <a:schemeClr val="tx1">
+                              <a:lumMod val="50000"/>
+                              <a:lumOff val="50000"/>
+                            </a:schemeClr>
+                          </a:solidFill>
+                          <a:effectLst/>
+                          <a:latin typeface="Google Sans Text"/>
+                        </a:rPr>
+                        <a:t>Bit 3</a:t>
+                      </a:r>
+                      <a:endParaRPr lang="en-IN">
+                        <a:solidFill>
+                          <a:schemeClr val="tx1">
+                            <a:lumMod val="50000"/>
+                            <a:lumOff val="50000"/>
+                          </a:schemeClr>
+                        </a:solidFill>
+                        <a:effectLst/>
+                        <a:latin typeface="Google Sans Text"/>
+                      </a:endParaRPr>
+                    </a:p>
+                  </a:txBody>
+                  <a:tcPr marR="57150" marT="76200" marB="76200" anchor="ctr">
+                    <a:lnL w="4763" cap="flat" cmpd="sng" algn="ctr">
+                      <a:solidFill>
+                        <a:schemeClr val="bg1"/>
+                      </a:solidFill>
+                      <a:prstDash val="solid"/>
+                      <a:round/>
+                      <a:headEnd type="none" w="med" len="med"/>
+                      <a:tailEnd type="none" w="med" len="med"/>
+                    </a:lnL>
+                    <a:lnR w="4763" cap="flat" cmpd="sng" algn="ctr">
+                      <a:solidFill>
+                        <a:schemeClr val="bg1"/>
+                      </a:solidFill>
+                      <a:prstDash val="solid"/>
+                      <a:round/>
+                      <a:headEnd type="none" w="med" len="med"/>
+                      <a:tailEnd type="none" w="med" len="med"/>
+                    </a:lnR>
+                    <a:lnT w="4763" cap="flat" cmpd="sng" algn="ctr">
+                      <a:solidFill>
+                        <a:schemeClr val="bg1"/>
+                      </a:solidFill>
+                      <a:prstDash val="solid"/>
+                      <a:round/>
+                      <a:headEnd type="none" w="med" len="med"/>
+                      <a:tailEnd type="none" w="med" len="med"/>
+                    </a:lnT>
+                    <a:lnB w="4763" cap="flat" cmpd="sng" algn="ctr">
+                      <a:solidFill>
+                        <a:schemeClr val="bg1"/>
+                      </a:solidFill>
+                      <a:prstDash val="solid"/>
+                      <a:round/>
+                      <a:headEnd type="none" w="med" len="med"/>
+                      <a:tailEnd type="none" w="med" len="med"/>
+                    </a:lnB>
+                    <a:noFill/>
+                  </a:tcPr>
+                </a:tc>
+                <a:tc>
+                  <a:txBody>
+                    <a:bodyPr/>
+                    <a:lstStyle/>
+                    <a:p>
+                      <a:pPr rtl="0">
+                        <a:buNone/>
+                      </a:pPr>
+                      <a:r>
+                        <a:rPr lang="en-IN" b="1">
+                          <a:solidFill>
+                            <a:schemeClr val="tx1">
+                              <a:lumMod val="50000"/>
+                              <a:lumOff val="50000"/>
+                            </a:schemeClr>
+                          </a:solidFill>
+                          <a:effectLst/>
+                          <a:latin typeface="Google Sans Text"/>
+                        </a:rPr>
+                        <a:t>Bit 2</a:t>
+                      </a:r>
+                      <a:endParaRPr lang="en-IN">
+                        <a:solidFill>
+                          <a:schemeClr val="tx1">
+                            <a:lumMod val="50000"/>
+                            <a:lumOff val="50000"/>
+                          </a:schemeClr>
+                        </a:solidFill>
+                        <a:effectLst/>
+                        <a:latin typeface="Google Sans Text"/>
+                      </a:endParaRPr>
+                    </a:p>
+                  </a:txBody>
+                  <a:tcPr marR="57150" marT="76200" marB="76200" anchor="ctr">
+                    <a:lnL w="4763" cap="flat" cmpd="sng" algn="ctr">
+                      <a:solidFill>
+                        <a:schemeClr val="bg1"/>
+                      </a:solidFill>
+                      <a:prstDash val="solid"/>
+                      <a:round/>
+                      <a:headEnd type="none" w="med" len="med"/>
+                      <a:tailEnd type="none" w="med" len="med"/>
+                    </a:lnL>
+                    <a:lnR w="4763" cap="flat" cmpd="sng" algn="ctr">
+                      <a:solidFill>
+                        <a:schemeClr val="bg1"/>
+                      </a:solidFill>
+                      <a:prstDash val="solid"/>
+                      <a:round/>
+                      <a:headEnd type="none" w="med" len="med"/>
+                      <a:tailEnd type="none" w="med" len="med"/>
+                    </a:lnR>
+                    <a:lnT w="4763" cap="flat" cmpd="sng" algn="ctr">
+                      <a:solidFill>
+                        <a:schemeClr val="bg1"/>
+                      </a:solidFill>
+                      <a:prstDash val="solid"/>
+                      <a:round/>
+                      <a:headEnd type="none" w="med" len="med"/>
+                      <a:tailEnd type="none" w="med" len="med"/>
+                    </a:lnT>
+                    <a:lnB w="4763" cap="flat" cmpd="sng" algn="ctr">
+                      <a:solidFill>
+                        <a:schemeClr val="bg1"/>
+                      </a:solidFill>
+                      <a:prstDash val="solid"/>
+                      <a:round/>
+                      <a:headEnd type="none" w="med" len="med"/>
+                      <a:tailEnd type="none" w="med" len="med"/>
+                    </a:lnB>
+                    <a:noFill/>
+                  </a:tcPr>
+                </a:tc>
+                <a:tc>
+                  <a:txBody>
+                    <a:bodyPr/>
+                    <a:lstStyle/>
+                    <a:p>
+                      <a:pPr rtl="0">
+                        <a:buNone/>
+                      </a:pPr>
+                      <a:r>
+                        <a:rPr lang="en-IN" b="1">
+                          <a:solidFill>
+                            <a:schemeClr val="tx1">
+                              <a:lumMod val="50000"/>
+                              <a:lumOff val="50000"/>
+                            </a:schemeClr>
+                          </a:solidFill>
+                          <a:effectLst/>
+                          <a:latin typeface="Google Sans Text"/>
+                        </a:rPr>
+                        <a:t>Bit 1</a:t>
+                      </a:r>
+                      <a:endParaRPr lang="en-IN">
+                        <a:solidFill>
+                          <a:schemeClr val="tx1">
+                            <a:lumMod val="50000"/>
+                            <a:lumOff val="50000"/>
+                          </a:schemeClr>
+                        </a:solidFill>
+                        <a:effectLst/>
+                        <a:latin typeface="Google Sans Text"/>
+                      </a:endParaRPr>
+                    </a:p>
+                  </a:txBody>
+                  <a:tcPr marR="57150" marT="76200" marB="76200" anchor="ctr">
+                    <a:lnL w="4763" cap="flat" cmpd="sng" algn="ctr">
+                      <a:solidFill>
+                        <a:schemeClr val="bg1"/>
+                      </a:solidFill>
+                      <a:prstDash val="solid"/>
+                      <a:round/>
+                      <a:headEnd type="none" w="med" len="med"/>
+                      <a:tailEnd type="none" w="med" len="med"/>
+                    </a:lnL>
+                    <a:lnR w="4763" cap="flat" cmpd="sng" algn="ctr">
+                      <a:solidFill>
+                        <a:schemeClr val="bg1"/>
+                      </a:solidFill>
+                      <a:prstDash val="solid"/>
+                      <a:round/>
+                      <a:headEnd type="none" w="med" len="med"/>
+                      <a:tailEnd type="none" w="med" len="med"/>
+                    </a:lnR>
+                    <a:lnT w="4763" cap="flat" cmpd="sng" algn="ctr">
+                      <a:solidFill>
+                        <a:schemeClr val="bg1"/>
+                      </a:solidFill>
+                      <a:prstDash val="solid"/>
+                      <a:round/>
+                      <a:headEnd type="none" w="med" len="med"/>
+                      <a:tailEnd type="none" w="med" len="med"/>
+                    </a:lnT>
+                    <a:lnB w="4763" cap="flat" cmpd="sng" algn="ctr">
+                      <a:solidFill>
+                        <a:schemeClr val="bg1"/>
+                      </a:solidFill>
+                      <a:prstDash val="solid"/>
+                      <a:round/>
+                      <a:headEnd type="none" w="med" len="med"/>
+                      <a:tailEnd type="none" w="med" len="med"/>
+                    </a:lnB>
+                    <a:noFill/>
+                  </a:tcPr>
+                </a:tc>
+                <a:tc>
+                  <a:txBody>
+                    <a:bodyPr/>
+                    <a:lstStyle/>
+                    <a:p>
+                      <a:pPr rtl="0">
+                        <a:buNone/>
+                      </a:pPr>
+                      <a:r>
+                        <a:rPr lang="en-IN" b="1">
+                          <a:solidFill>
+                            <a:schemeClr val="tx1">
+                              <a:lumMod val="50000"/>
+                              <a:lumOff val="50000"/>
+                            </a:schemeClr>
+                          </a:solidFill>
+                          <a:effectLst/>
+                          <a:latin typeface="Google Sans Text"/>
+                        </a:rPr>
+                        <a:t>Bit 0</a:t>
+                      </a:r>
+                      <a:endParaRPr lang="en-IN">
+                        <a:solidFill>
+                          <a:schemeClr val="tx1">
+                            <a:lumMod val="50000"/>
+                            <a:lumOff val="50000"/>
+                          </a:schemeClr>
+                        </a:solidFill>
+                        <a:effectLst/>
+                        <a:latin typeface="Google Sans Text"/>
+                      </a:endParaRPr>
+                    </a:p>
+                  </a:txBody>
+                  <a:tcPr marT="76200" marB="76200" anchor="ctr">
+                    <a:lnL w="4763" cap="flat" cmpd="sng" algn="ctr">
+                      <a:solidFill>
+                        <a:schemeClr val="bg1"/>
+                      </a:solidFill>
+                      <a:prstDash val="solid"/>
+                      <a:round/>
+                      <a:headEnd type="none" w="med" len="med"/>
+                      <a:tailEnd type="none" w="med" len="med"/>
+                    </a:lnL>
+                    <a:lnR w="4763" cap="flat" cmpd="sng" algn="ctr">
+                      <a:solidFill>
+                        <a:schemeClr val="bg1"/>
+                      </a:solidFill>
+                      <a:prstDash val="solid"/>
+                      <a:round/>
+                      <a:headEnd type="none" w="med" len="med"/>
+                      <a:tailEnd type="none" w="med" len="med"/>
+                    </a:lnR>
+                    <a:lnT w="4763" cap="flat" cmpd="sng" algn="ctr">
+                      <a:solidFill>
+                        <a:schemeClr val="bg1"/>
+                      </a:solidFill>
+                      <a:prstDash val="solid"/>
+                      <a:round/>
+                      <a:headEnd type="none" w="med" len="med"/>
+                      <a:tailEnd type="none" w="med" len="med"/>
+                    </a:lnT>
+                    <a:lnB w="4763" cap="flat" cmpd="sng" algn="ctr">
+                      <a:solidFill>
+                        <a:schemeClr val="bg1"/>
+                      </a:solidFill>
+                      <a:prstDash val="solid"/>
+                      <a:round/>
+                      <a:headEnd type="none" w="med" len="med"/>
+                      <a:tailEnd type="none" w="med" len="med"/>
+                    </a:lnB>
+                    <a:noFill/>
+                  </a:tcPr>
+                </a:tc>
+                <a:extLst>
+                  <a:ext uri="{0D108BD9-81ED-4DB2-BD59-A6C34878D82A}">
+                    <a16:rowId xmlns:a16="http://schemas.microsoft.com/office/drawing/2014/main" val="1595683836"/>
+                  </a:ext>
+                </a:extLst>
+              </a:tr>
+              <a:tr h="0">
+                <a:tc>
+                  <a:txBody>
+                    <a:bodyPr/>
+                    <a:lstStyle/>
+                    <a:p>
+                      <a:pPr rtl="0">
+                        <a:buNone/>
+                      </a:pPr>
+                      <a:r>
+                        <a:rPr lang="en-IN" b="1">
+                          <a:solidFill>
+                            <a:schemeClr val="tx1">
+                              <a:lumMod val="50000"/>
+                              <a:lumOff val="50000"/>
+                            </a:schemeClr>
+                          </a:solidFill>
+                          <a:effectLst/>
+                          <a:latin typeface="Google Sans Text"/>
+                        </a:rPr>
+                        <a:t>PPN</a:t>
+                      </a:r>
+                      <a:r>
+                        <a:rPr lang="en-IN">
+                          <a:solidFill>
+                            <a:schemeClr val="tx1">
+                              <a:lumMod val="50000"/>
+                              <a:lumOff val="50000"/>
+                            </a:schemeClr>
+                          </a:solidFill>
+                          <a:effectLst/>
+                          <a:latin typeface="Google Sans Text"/>
+                        </a:rPr>
+                        <a:t> (4 bits)</a:t>
+                      </a:r>
+                    </a:p>
+                  </a:txBody>
+                  <a:tcPr marR="57150" marT="76200" marB="76200" anchor="ctr">
+                    <a:lnL w="4763" cap="flat" cmpd="sng" algn="ctr">
+                      <a:solidFill>
+                        <a:schemeClr val="bg1"/>
+                      </a:solidFill>
+                      <a:prstDash val="solid"/>
+                      <a:round/>
+                      <a:headEnd type="none" w="med" len="med"/>
+                      <a:tailEnd type="none" w="med" len="med"/>
+                    </a:lnL>
+                    <a:lnR w="4763" cap="flat" cmpd="sng" algn="ctr">
+                      <a:solidFill>
+                        <a:schemeClr val="bg1"/>
+                      </a:solidFill>
+                      <a:prstDash val="solid"/>
+                      <a:round/>
+                      <a:headEnd type="none" w="med" len="med"/>
+                      <a:tailEnd type="none" w="med" len="med"/>
+                    </a:lnR>
+                    <a:lnT w="4763" cap="flat" cmpd="sng" algn="ctr">
+                      <a:solidFill>
+                        <a:schemeClr val="bg1"/>
+                      </a:solidFill>
+                      <a:prstDash val="solid"/>
+                      <a:round/>
+                      <a:headEnd type="none" w="med" len="med"/>
+                      <a:tailEnd type="none" w="med" len="med"/>
+                    </a:lnT>
+                    <a:lnB w="4763" cap="flat" cmpd="sng" algn="ctr">
+                      <a:solidFill>
+                        <a:schemeClr val="bg1"/>
+                      </a:solidFill>
+                      <a:prstDash val="solid"/>
+                      <a:round/>
+                      <a:headEnd type="none" w="med" len="med"/>
+                      <a:tailEnd type="none" w="med" len="med"/>
+                    </a:lnB>
+                    <a:noFill/>
+                  </a:tcPr>
+                </a:tc>
+                <a:tc>
+                  <a:txBody>
+                    <a:bodyPr/>
+                    <a:lstStyle/>
+                    <a:p>
+                      <a:pPr rtl="0">
+                        <a:buNone/>
+                      </a:pPr>
+                      <a:r>
+                        <a:rPr lang="en-IN" b="1" dirty="0">
+                          <a:solidFill>
+                            <a:schemeClr val="tx1">
+                              <a:lumMod val="50000"/>
+                              <a:lumOff val="50000"/>
+                            </a:schemeClr>
+                          </a:solidFill>
+                          <a:effectLst/>
+                          <a:latin typeface="Google Sans Text"/>
+                        </a:rPr>
+                        <a:t>R</a:t>
+                      </a:r>
+                      <a:r>
+                        <a:rPr lang="en-IN" dirty="0">
+                          <a:solidFill>
+                            <a:schemeClr val="tx1">
+                              <a:lumMod val="50000"/>
+                              <a:lumOff val="50000"/>
+                            </a:schemeClr>
+                          </a:solidFill>
+                          <a:effectLst/>
+                          <a:latin typeface="Google Sans Text"/>
+                        </a:rPr>
+                        <a:t> (Read)</a:t>
+                      </a:r>
+                    </a:p>
+                  </a:txBody>
+                  <a:tcPr marR="57150" marT="76200" marB="76200" anchor="ctr">
+                    <a:lnL w="4763" cap="flat" cmpd="sng" algn="ctr">
+                      <a:solidFill>
+                        <a:schemeClr val="bg1"/>
+                      </a:solidFill>
+                      <a:prstDash val="solid"/>
+                      <a:round/>
+                      <a:headEnd type="none" w="med" len="med"/>
+                      <a:tailEnd type="none" w="med" len="med"/>
+                    </a:lnL>
+                    <a:lnR w="4763" cap="flat" cmpd="sng" algn="ctr">
+                      <a:solidFill>
+                        <a:schemeClr val="bg1"/>
+                      </a:solidFill>
+                      <a:prstDash val="solid"/>
+                      <a:round/>
+                      <a:headEnd type="none" w="med" len="med"/>
+                      <a:tailEnd type="none" w="med" len="med"/>
+                    </a:lnR>
+                    <a:lnT w="4763" cap="flat" cmpd="sng" algn="ctr">
+                      <a:solidFill>
+                        <a:schemeClr val="bg1"/>
+                      </a:solidFill>
+                      <a:prstDash val="solid"/>
+                      <a:round/>
+                      <a:headEnd type="none" w="med" len="med"/>
+                      <a:tailEnd type="none" w="med" len="med"/>
+                    </a:lnT>
+                    <a:lnB w="4763" cap="flat" cmpd="sng" algn="ctr">
+                      <a:solidFill>
+                        <a:schemeClr val="bg1"/>
+                      </a:solidFill>
+                      <a:prstDash val="solid"/>
+                      <a:round/>
+                      <a:headEnd type="none" w="med" len="med"/>
+                      <a:tailEnd type="none" w="med" len="med"/>
+                    </a:lnB>
+                    <a:noFill/>
+                  </a:tcPr>
+                </a:tc>
+                <a:tc>
+                  <a:txBody>
+                    <a:bodyPr/>
+                    <a:lstStyle/>
+                    <a:p>
+                      <a:pPr rtl="0">
+                        <a:buNone/>
+                      </a:pPr>
+                      <a:r>
+                        <a:rPr lang="en-IN" b="1">
+                          <a:solidFill>
+                            <a:schemeClr val="tx1">
+                              <a:lumMod val="50000"/>
+                              <a:lumOff val="50000"/>
+                            </a:schemeClr>
+                          </a:solidFill>
+                          <a:effectLst/>
+                          <a:latin typeface="Google Sans Text"/>
+                        </a:rPr>
+                        <a:t>W</a:t>
+                      </a:r>
+                      <a:r>
+                        <a:rPr lang="en-IN">
+                          <a:solidFill>
+                            <a:schemeClr val="tx1">
+                              <a:lumMod val="50000"/>
+                              <a:lumOff val="50000"/>
+                            </a:schemeClr>
+                          </a:solidFill>
+                          <a:effectLst/>
+                          <a:latin typeface="Google Sans Text"/>
+                        </a:rPr>
+                        <a:t> (Write)</a:t>
+                      </a:r>
+                    </a:p>
+                  </a:txBody>
+                  <a:tcPr marR="57150" marT="76200" marB="76200" anchor="ctr">
+                    <a:lnL w="4763" cap="flat" cmpd="sng" algn="ctr">
+                      <a:solidFill>
+                        <a:schemeClr val="bg1"/>
+                      </a:solidFill>
+                      <a:prstDash val="solid"/>
+                      <a:round/>
+                      <a:headEnd type="none" w="med" len="med"/>
+                      <a:tailEnd type="none" w="med" len="med"/>
+                    </a:lnL>
+                    <a:lnR w="4763" cap="flat" cmpd="sng" algn="ctr">
+                      <a:solidFill>
+                        <a:schemeClr val="bg1"/>
+                      </a:solidFill>
+                      <a:prstDash val="solid"/>
+                      <a:round/>
+                      <a:headEnd type="none" w="med" len="med"/>
+                      <a:tailEnd type="none" w="med" len="med"/>
+                    </a:lnR>
+                    <a:lnT w="4763" cap="flat" cmpd="sng" algn="ctr">
+                      <a:solidFill>
+                        <a:schemeClr val="bg1"/>
+                      </a:solidFill>
+                      <a:prstDash val="solid"/>
+                      <a:round/>
+                      <a:headEnd type="none" w="med" len="med"/>
+                      <a:tailEnd type="none" w="med" len="med"/>
+                    </a:lnT>
+                    <a:lnB w="4763" cap="flat" cmpd="sng" algn="ctr">
+                      <a:solidFill>
+                        <a:schemeClr val="bg1"/>
+                      </a:solidFill>
+                      <a:prstDash val="solid"/>
+                      <a:round/>
+                      <a:headEnd type="none" w="med" len="med"/>
+                      <a:tailEnd type="none" w="med" len="med"/>
+                    </a:lnB>
+                    <a:noFill/>
+                  </a:tcPr>
+                </a:tc>
+                <a:tc>
+                  <a:txBody>
+                    <a:bodyPr/>
+                    <a:lstStyle/>
+                    <a:p>
+                      <a:pPr rtl="0">
+                        <a:buNone/>
+                      </a:pPr>
+                      <a:r>
+                        <a:rPr lang="en-IN" b="1">
+                          <a:solidFill>
+                            <a:schemeClr val="tx1">
+                              <a:lumMod val="50000"/>
+                              <a:lumOff val="50000"/>
+                            </a:schemeClr>
+                          </a:solidFill>
+                          <a:effectLst/>
+                          <a:latin typeface="Google Sans Text"/>
+                        </a:rPr>
+                        <a:t>X</a:t>
+                      </a:r>
+                      <a:r>
+                        <a:rPr lang="en-IN">
+                          <a:solidFill>
+                            <a:schemeClr val="tx1">
+                              <a:lumMod val="50000"/>
+                              <a:lumOff val="50000"/>
+                            </a:schemeClr>
+                          </a:solidFill>
+                          <a:effectLst/>
+                          <a:latin typeface="Google Sans Text"/>
+                        </a:rPr>
+                        <a:t> (Execute)</a:t>
+                      </a:r>
+                    </a:p>
+                  </a:txBody>
+                  <a:tcPr marR="57150" marT="76200" marB="76200" anchor="ctr">
+                    <a:lnL w="4763" cap="flat" cmpd="sng" algn="ctr">
+                      <a:solidFill>
+                        <a:schemeClr val="bg1"/>
+                      </a:solidFill>
+                      <a:prstDash val="solid"/>
+                      <a:round/>
+                      <a:headEnd type="none" w="med" len="med"/>
+                      <a:tailEnd type="none" w="med" len="med"/>
+                    </a:lnL>
+                    <a:lnR w="4763" cap="flat" cmpd="sng" algn="ctr">
+                      <a:solidFill>
+                        <a:schemeClr val="bg1"/>
+                      </a:solidFill>
+                      <a:prstDash val="solid"/>
+                      <a:round/>
+                      <a:headEnd type="none" w="med" len="med"/>
+                      <a:tailEnd type="none" w="med" len="med"/>
+                    </a:lnR>
+                    <a:lnT w="4763" cap="flat" cmpd="sng" algn="ctr">
+                      <a:solidFill>
+                        <a:schemeClr val="bg1"/>
+                      </a:solidFill>
+                      <a:prstDash val="solid"/>
+                      <a:round/>
+                      <a:headEnd type="none" w="med" len="med"/>
+                      <a:tailEnd type="none" w="med" len="med"/>
+                    </a:lnT>
+                    <a:lnB w="4763" cap="flat" cmpd="sng" algn="ctr">
+                      <a:solidFill>
+                        <a:schemeClr val="bg1"/>
+                      </a:solidFill>
+                      <a:prstDash val="solid"/>
+                      <a:round/>
+                      <a:headEnd type="none" w="med" len="med"/>
+                      <a:tailEnd type="none" w="med" len="med"/>
+                    </a:lnB>
+                    <a:noFill/>
+                  </a:tcPr>
+                </a:tc>
+                <a:tc>
+                  <a:txBody>
+                    <a:bodyPr/>
+                    <a:lstStyle/>
+                    <a:p>
+                      <a:pPr rtl="0">
+                        <a:buNone/>
+                      </a:pPr>
+                      <a:r>
+                        <a:rPr lang="en-IN" b="1" dirty="0">
+                          <a:solidFill>
+                            <a:schemeClr val="tx1">
+                              <a:lumMod val="50000"/>
+                              <a:lumOff val="50000"/>
+                            </a:schemeClr>
+                          </a:solidFill>
+                          <a:effectLst/>
+                          <a:latin typeface="Google Sans Text"/>
+                        </a:rPr>
+                        <a:t>V</a:t>
+                      </a:r>
+                      <a:r>
+                        <a:rPr lang="en-IN" dirty="0">
+                          <a:solidFill>
+                            <a:schemeClr val="tx1">
+                              <a:lumMod val="50000"/>
+                              <a:lumOff val="50000"/>
+                            </a:schemeClr>
+                          </a:solidFill>
+                          <a:effectLst/>
+                          <a:latin typeface="Google Sans Text"/>
+                        </a:rPr>
+                        <a:t> (Valid)</a:t>
+                      </a:r>
+                    </a:p>
+                  </a:txBody>
+                  <a:tcPr marT="76200" marB="76200" anchor="ctr">
+                    <a:lnL w="4763" cap="flat" cmpd="sng" algn="ctr">
+                      <a:solidFill>
+                        <a:schemeClr val="bg1"/>
+                      </a:solidFill>
+                      <a:prstDash val="solid"/>
+                      <a:round/>
+                      <a:headEnd type="none" w="med" len="med"/>
+                      <a:tailEnd type="none" w="med" len="med"/>
+                    </a:lnL>
+                    <a:lnR w="4763" cap="flat" cmpd="sng" algn="ctr">
+                      <a:solidFill>
+                        <a:schemeClr val="bg1"/>
+                      </a:solidFill>
+                      <a:prstDash val="solid"/>
+                      <a:round/>
+                      <a:headEnd type="none" w="med" len="med"/>
+                      <a:tailEnd type="none" w="med" len="med"/>
+                    </a:lnR>
+                    <a:lnT w="4763" cap="flat" cmpd="sng" algn="ctr">
+                      <a:solidFill>
+                        <a:schemeClr val="bg1"/>
+                      </a:solidFill>
+                      <a:prstDash val="solid"/>
+                      <a:round/>
+                      <a:headEnd type="none" w="med" len="med"/>
+                      <a:tailEnd type="none" w="med" len="med"/>
+                    </a:lnT>
+                    <a:lnB w="4763" cap="flat" cmpd="sng" algn="ctr">
+                      <a:solidFill>
+                        <a:schemeClr val="bg1"/>
+                      </a:solidFill>
+                      <a:prstDash val="solid"/>
+                      <a:round/>
+                      <a:headEnd type="none" w="med" len="med"/>
+                      <a:tailEnd type="none" w="med" len="med"/>
+                    </a:lnB>
+                    <a:noFill/>
+                  </a:tcPr>
+                </a:tc>
+                <a:extLst>
+                  <a:ext uri="{0D108BD9-81ED-4DB2-BD59-A6C34878D82A}">
+                    <a16:rowId xmlns:a16="http://schemas.microsoft.com/office/drawing/2014/main" val="2079749567"/>
+                  </a:ext>
+                </a:extLst>
+              </a:tr>
+            </a:tbl>
+          </a:graphicData>
+        </a:graphic>
+      </p:graphicFrame>
+      <p:graphicFrame>
+        <p:nvGraphicFramePr>
+          <p:cNvPr id="8" name="Table 7">
+            <a:extLst>
+              <a:ext uri="{FF2B5EF4-FFF2-40B4-BE49-F238E27FC236}">
+                <a16:creationId xmlns:a16="http://schemas.microsoft.com/office/drawing/2014/main" id="{97BE1176-8E41-0C75-33E4-CD47AA7CA889}"/>
+              </a:ext>
+            </a:extLst>
+          </p:cNvPr>
+          <p:cNvGraphicFramePr>
+            <a:graphicFrameLocks noGrp="1"/>
+          </p:cNvGraphicFramePr>
+          <p:nvPr>
+            <p:extLst>
+              <p:ext uri="{D42A27DB-BD31-4B8C-83A1-F6EECF244321}">
+                <p14:modId xmlns:p14="http://schemas.microsoft.com/office/powerpoint/2010/main" val="3803892988"/>
+              </p:ext>
+            </p:extLst>
+          </p:nvPr>
+        </p:nvGraphicFramePr>
+        <p:xfrm>
+          <a:off x="6499905" y="670209"/>
+          <a:ext cx="2514602" cy="5929029"/>
+        </p:xfrm>
+        <a:graphic>
+          <a:graphicData uri="http://schemas.openxmlformats.org/drawingml/2006/table">
+            <a:tbl>
+              <a:tblPr/>
+              <a:tblGrid>
+                <a:gridCol w="1257301">
+                  <a:extLst>
+                    <a:ext uri="{9D8B030D-6E8A-4147-A177-3AD203B41FA5}">
+                      <a16:colId xmlns:a16="http://schemas.microsoft.com/office/drawing/2014/main" val="351708908"/>
+                    </a:ext>
+                  </a:extLst>
+                </a:gridCol>
+                <a:gridCol w="1257301">
+                  <a:extLst>
+                    <a:ext uri="{9D8B030D-6E8A-4147-A177-3AD203B41FA5}">
+                      <a16:colId xmlns:a16="http://schemas.microsoft.com/office/drawing/2014/main" val="3329426272"/>
+                    </a:ext>
+                  </a:extLst>
+                </a:gridCol>
+              </a:tblGrid>
+              <a:tr h="391631">
+                <a:tc>
+                  <a:txBody>
+                    <a:bodyPr/>
+                    <a:lstStyle/>
+                    <a:p>
+                      <a:pPr rtl="0">
+                        <a:buNone/>
+                      </a:pPr>
+                      <a:r>
+                        <a:rPr lang="en-IN" sz="1800" b="1">
+                          <a:solidFill>
+                            <a:srgbClr val="1F1F1F"/>
+                          </a:solidFill>
+                          <a:effectLst/>
+                          <a:latin typeface="Google Sans Text"/>
+                        </a:rPr>
+                        <a:t>Physical Address</a:t>
+                      </a:r>
+                      <a:endParaRPr lang="en-IN" sz="1800">
+                        <a:solidFill>
+                          <a:srgbClr val="1F1F1F"/>
+                        </a:solidFill>
+                        <a:effectLst/>
+                        <a:latin typeface="Google Sans Text"/>
+                      </a:endParaRPr>
+                    </a:p>
+                  </a:txBody>
+                  <a:tcPr marL="46868" marR="29293" marT="39057" marB="39057" anchor="ctr">
+                    <a:lnL w="4763" cap="flat" cmpd="sng" algn="ctr">
+                      <a:solidFill>
+                        <a:schemeClr val="bg1"/>
+                      </a:solidFill>
+                      <a:prstDash val="solid"/>
+                      <a:round/>
+                      <a:headEnd type="none" w="med" len="med"/>
+                      <a:tailEnd type="none" w="med" len="med"/>
+                    </a:lnL>
+                    <a:lnR w="4763" cap="flat" cmpd="sng" algn="ctr">
+                      <a:solidFill>
+                        <a:schemeClr val="bg1"/>
+                      </a:solidFill>
+                      <a:prstDash val="solid"/>
+                      <a:round/>
+                      <a:headEnd type="none" w="med" len="med"/>
+                      <a:tailEnd type="none" w="med" len="med"/>
+                    </a:lnR>
+                    <a:lnT w="4763" cap="flat" cmpd="sng" algn="ctr">
+                      <a:solidFill>
+                        <a:schemeClr val="bg1"/>
+                      </a:solidFill>
+                      <a:prstDash val="solid"/>
+                      <a:round/>
+                      <a:headEnd type="none" w="med" len="med"/>
+                      <a:tailEnd type="none" w="med" len="med"/>
+                    </a:lnT>
+                    <a:lnB w="4763" cap="flat" cmpd="sng" algn="ctr">
+                      <a:solidFill>
+                        <a:schemeClr val="bg1"/>
+                      </a:solidFill>
+                      <a:prstDash val="solid"/>
+                      <a:round/>
+                      <a:headEnd type="none" w="med" len="med"/>
+                      <a:tailEnd type="none" w="med" len="med"/>
+                    </a:lnB>
+                    <a:noFill/>
+                  </a:tcPr>
+                </a:tc>
+                <a:tc>
+                  <a:txBody>
+                    <a:bodyPr/>
+                    <a:lstStyle/>
+                    <a:p>
+                      <a:pPr rtl="0">
+                        <a:buNone/>
+                      </a:pPr>
+                      <a:r>
+                        <a:rPr lang="en-IN" sz="1800" b="1">
+                          <a:solidFill>
+                            <a:srgbClr val="1F1F1F"/>
+                          </a:solidFill>
+                          <a:effectLst/>
+                          <a:latin typeface="Google Sans Text"/>
+                        </a:rPr>
+                        <a:t>Value (Hex)</a:t>
+                      </a:r>
+                      <a:endParaRPr lang="en-IN" sz="1800">
+                        <a:solidFill>
+                          <a:srgbClr val="1F1F1F"/>
+                        </a:solidFill>
+                        <a:effectLst/>
+                        <a:latin typeface="Google Sans Text"/>
+                      </a:endParaRPr>
+                    </a:p>
+                  </a:txBody>
+                  <a:tcPr marL="46868" marR="29293" marT="39057" marB="39057" anchor="ctr">
+                    <a:lnL w="4763" cap="flat" cmpd="sng" algn="ctr">
+                      <a:solidFill>
+                        <a:schemeClr val="bg1"/>
+                      </a:solidFill>
+                      <a:prstDash val="solid"/>
+                      <a:round/>
+                      <a:headEnd type="none" w="med" len="med"/>
+                      <a:tailEnd type="none" w="med" len="med"/>
+                    </a:lnL>
+                    <a:lnR w="4763" cap="flat" cmpd="sng" algn="ctr">
+                      <a:solidFill>
+                        <a:schemeClr val="bg1"/>
+                      </a:solidFill>
+                      <a:prstDash val="solid"/>
+                      <a:round/>
+                      <a:headEnd type="none" w="med" len="med"/>
+                      <a:tailEnd type="none" w="med" len="med"/>
+                    </a:lnR>
+                    <a:lnT w="4763" cap="flat" cmpd="sng" algn="ctr">
+                      <a:solidFill>
+                        <a:schemeClr val="bg1"/>
+                      </a:solidFill>
+                      <a:prstDash val="solid"/>
+                      <a:round/>
+                      <a:headEnd type="none" w="med" len="med"/>
+                      <a:tailEnd type="none" w="med" len="med"/>
+                    </a:lnT>
+                    <a:lnB w="4763" cap="flat" cmpd="sng" algn="ctr">
+                      <a:solidFill>
+                        <a:schemeClr val="bg1"/>
+                      </a:solidFill>
+                      <a:prstDash val="solid"/>
+                      <a:round/>
+                      <a:headEnd type="none" w="med" len="med"/>
+                      <a:tailEnd type="none" w="med" len="med"/>
+                    </a:lnB>
+                    <a:noFill/>
+                  </a:tcPr>
+                </a:tc>
+                <a:extLst>
+                  <a:ext uri="{0D108BD9-81ED-4DB2-BD59-A6C34878D82A}">
+                    <a16:rowId xmlns:a16="http://schemas.microsoft.com/office/drawing/2014/main" val="2778796311"/>
+                  </a:ext>
+                </a:extLst>
+              </a:tr>
+              <a:tr h="391631">
+                <a:tc>
+                  <a:txBody>
+                    <a:bodyPr/>
+                    <a:lstStyle/>
+                    <a:p>
+                      <a:pPr rtl="0">
+                        <a:buNone/>
+                      </a:pPr>
+                      <a:r>
+                        <a:rPr lang="en-IN" sz="1800" b="1">
+                          <a:solidFill>
+                            <a:srgbClr val="1F1F1F"/>
+                          </a:solidFill>
+                          <a:effectLst/>
+                          <a:latin typeface="Google Sans Text"/>
+                        </a:rPr>
+                        <a:t>0x0100</a:t>
+                      </a:r>
+                      <a:endParaRPr lang="en-IN" sz="1800">
+                        <a:solidFill>
+                          <a:srgbClr val="1F1F1F"/>
+                        </a:solidFill>
+                        <a:effectLst/>
+                        <a:latin typeface="Google Sans Text"/>
+                      </a:endParaRPr>
+                    </a:p>
+                  </a:txBody>
+                  <a:tcPr marL="46868" marR="29293" marT="39057" marB="39057" anchor="ctr">
+                    <a:lnL w="4763" cap="flat" cmpd="sng" algn="ctr">
+                      <a:solidFill>
+                        <a:schemeClr val="bg1"/>
+                      </a:solidFill>
+                      <a:prstDash val="solid"/>
+                      <a:round/>
+                      <a:headEnd type="none" w="med" len="med"/>
+                      <a:tailEnd type="none" w="med" len="med"/>
+                    </a:lnL>
+                    <a:lnR w="4763" cap="flat" cmpd="sng" algn="ctr">
+                      <a:solidFill>
+                        <a:schemeClr val="bg1"/>
+                      </a:solidFill>
+                      <a:prstDash val="solid"/>
+                      <a:round/>
+                      <a:headEnd type="none" w="med" len="med"/>
+                      <a:tailEnd type="none" w="med" len="med"/>
+                    </a:lnR>
+                    <a:lnT w="4763" cap="flat" cmpd="sng" algn="ctr">
+                      <a:solidFill>
+                        <a:schemeClr val="bg1"/>
+                      </a:solidFill>
+                      <a:prstDash val="solid"/>
+                      <a:round/>
+                      <a:headEnd type="none" w="med" len="med"/>
+                      <a:tailEnd type="none" w="med" len="med"/>
+                    </a:lnT>
+                    <a:lnB w="4763" cap="flat" cmpd="sng" algn="ctr">
+                      <a:solidFill>
+                        <a:schemeClr val="bg1"/>
+                      </a:solidFill>
+                      <a:prstDash val="solid"/>
+                      <a:round/>
+                      <a:headEnd type="none" w="med" len="med"/>
+                      <a:tailEnd type="none" w="med" len="med"/>
+                    </a:lnB>
+                    <a:noFill/>
+                  </a:tcPr>
+                </a:tc>
+                <a:tc>
+                  <a:txBody>
+                    <a:bodyPr/>
+                    <a:lstStyle/>
+                    <a:p>
+                      <a:pPr algn="r" rtl="0">
+                        <a:buNone/>
+                      </a:pPr>
+                      <a:r>
+                        <a:rPr lang="en-IN" sz="1800" dirty="0">
+                          <a:solidFill>
+                            <a:srgbClr val="444746"/>
+                          </a:solidFill>
+                          <a:effectLst/>
+                          <a:latin typeface="Google Sans Text"/>
+                        </a:rPr>
+                        <a:t>0x89</a:t>
+                      </a:r>
+                      <a:endParaRPr lang="en-IN" sz="1800" dirty="0">
+                        <a:solidFill>
+                          <a:srgbClr val="1F1F1F"/>
+                        </a:solidFill>
+                        <a:effectLst/>
+                        <a:latin typeface="Google Sans Text"/>
+                      </a:endParaRPr>
+                    </a:p>
+                  </a:txBody>
+                  <a:tcPr marL="46868" marR="29293" marT="39057" marB="39057" anchor="ctr">
+                    <a:lnL w="4763" cap="flat" cmpd="sng" algn="ctr">
+                      <a:solidFill>
+                        <a:schemeClr val="bg1"/>
+                      </a:solidFill>
+                      <a:prstDash val="solid"/>
+                      <a:round/>
+                      <a:headEnd type="none" w="med" len="med"/>
+                      <a:tailEnd type="none" w="med" len="med"/>
+                    </a:lnL>
+                    <a:lnR w="4763" cap="flat" cmpd="sng" algn="ctr">
+                      <a:solidFill>
+                        <a:schemeClr val="bg1"/>
+                      </a:solidFill>
+                      <a:prstDash val="solid"/>
+                      <a:round/>
+                      <a:headEnd type="none" w="med" len="med"/>
+                      <a:tailEnd type="none" w="med" len="med"/>
+                    </a:lnR>
+                    <a:lnT w="4763" cap="flat" cmpd="sng" algn="ctr">
+                      <a:solidFill>
+                        <a:schemeClr val="bg1"/>
+                      </a:solidFill>
+                      <a:prstDash val="solid"/>
+                      <a:round/>
+                      <a:headEnd type="none" w="med" len="med"/>
+                      <a:tailEnd type="none" w="med" len="med"/>
+                    </a:lnT>
+                    <a:lnB w="4763" cap="flat" cmpd="sng" algn="ctr">
+                      <a:solidFill>
+                        <a:schemeClr val="bg1"/>
+                      </a:solidFill>
+                      <a:prstDash val="solid"/>
+                      <a:round/>
+                      <a:headEnd type="none" w="med" len="med"/>
+                      <a:tailEnd type="none" w="med" len="med"/>
+                    </a:lnB>
+                    <a:noFill/>
+                  </a:tcPr>
+                </a:tc>
+                <a:extLst>
+                  <a:ext uri="{0D108BD9-81ED-4DB2-BD59-A6C34878D82A}">
+                    <a16:rowId xmlns:a16="http://schemas.microsoft.com/office/drawing/2014/main" val="2495904266"/>
+                  </a:ext>
+                </a:extLst>
+              </a:tr>
+              <a:tr h="544878">
+                <a:tc>
+                  <a:txBody>
+                    <a:bodyPr/>
+                    <a:lstStyle/>
+                    <a:p>
+                      <a:pPr rtl="0">
+                        <a:buNone/>
+                      </a:pPr>
+                      <a:r>
+                        <a:rPr lang="en-IN" sz="1800" b="1">
+                          <a:solidFill>
+                            <a:srgbClr val="1F1F1F"/>
+                          </a:solidFill>
+                          <a:effectLst/>
+                          <a:latin typeface="Google Sans Text"/>
+                        </a:rPr>
+                        <a:t>0x0101</a:t>
+                      </a:r>
+                      <a:endParaRPr lang="en-IN" sz="1800">
+                        <a:solidFill>
+                          <a:srgbClr val="1F1F1F"/>
+                        </a:solidFill>
+                        <a:effectLst/>
+                        <a:latin typeface="Google Sans Text"/>
+                      </a:endParaRPr>
+                    </a:p>
+                  </a:txBody>
+                  <a:tcPr marL="46868" marR="29293" marT="39057" marB="39057" anchor="ctr">
+                    <a:lnL w="4763" cap="flat" cmpd="sng" algn="ctr">
+                      <a:solidFill>
+                        <a:schemeClr val="bg1"/>
+                      </a:solidFill>
+                      <a:prstDash val="solid"/>
+                      <a:round/>
+                      <a:headEnd type="none" w="med" len="med"/>
+                      <a:tailEnd type="none" w="med" len="med"/>
+                    </a:lnL>
+                    <a:lnR w="4763" cap="flat" cmpd="sng" algn="ctr">
+                      <a:solidFill>
+                        <a:schemeClr val="bg1"/>
+                      </a:solidFill>
+                      <a:prstDash val="solid"/>
+                      <a:round/>
+                      <a:headEnd type="none" w="med" len="med"/>
+                      <a:tailEnd type="none" w="med" len="med"/>
+                    </a:lnR>
+                    <a:lnT w="4763" cap="flat" cmpd="sng" algn="ctr">
+                      <a:solidFill>
+                        <a:schemeClr val="bg1"/>
+                      </a:solidFill>
+                      <a:prstDash val="solid"/>
+                      <a:round/>
+                      <a:headEnd type="none" w="med" len="med"/>
+                      <a:tailEnd type="none" w="med" len="med"/>
+                    </a:lnT>
+                    <a:lnB w="4763" cap="flat" cmpd="sng" algn="ctr">
+                      <a:solidFill>
+                        <a:schemeClr val="bg1"/>
+                      </a:solidFill>
+                      <a:prstDash val="solid"/>
+                      <a:round/>
+                      <a:headEnd type="none" w="med" len="med"/>
+                      <a:tailEnd type="none" w="med" len="med"/>
+                    </a:lnB>
+                    <a:noFill/>
+                  </a:tcPr>
+                </a:tc>
+                <a:tc>
+                  <a:txBody>
+                    <a:bodyPr/>
+                    <a:lstStyle/>
+                    <a:p>
+                      <a:pPr algn="r" rtl="0">
+                        <a:buNone/>
+                      </a:pPr>
+                      <a:r>
+                        <a:rPr lang="en-IN" sz="1800" dirty="0">
+                          <a:solidFill>
+                            <a:srgbClr val="444746"/>
+                          </a:solidFill>
+                          <a:effectLst/>
+                          <a:latin typeface="Google Sans Text"/>
+                        </a:rPr>
+                        <a:t>0x80</a:t>
+                      </a:r>
+                      <a:endParaRPr lang="en-IN" sz="1800" dirty="0">
+                        <a:solidFill>
+                          <a:srgbClr val="1F1F1F"/>
+                        </a:solidFill>
+                        <a:effectLst/>
+                        <a:latin typeface="Google Sans Text"/>
+                      </a:endParaRPr>
+                    </a:p>
+                  </a:txBody>
+                  <a:tcPr marL="46868" marR="29293" marT="39057" marB="39057" anchor="ctr">
+                    <a:lnL w="4763" cap="flat" cmpd="sng" algn="ctr">
+                      <a:solidFill>
+                        <a:schemeClr val="bg1"/>
+                      </a:solidFill>
+                      <a:prstDash val="solid"/>
+                      <a:round/>
+                      <a:headEnd type="none" w="med" len="med"/>
+                      <a:tailEnd type="none" w="med" len="med"/>
+                    </a:lnL>
+                    <a:lnR w="4763" cap="flat" cmpd="sng" algn="ctr">
+                      <a:solidFill>
+                        <a:schemeClr val="bg1"/>
+                      </a:solidFill>
+                      <a:prstDash val="solid"/>
+                      <a:round/>
+                      <a:headEnd type="none" w="med" len="med"/>
+                      <a:tailEnd type="none" w="med" len="med"/>
+                    </a:lnR>
+                    <a:lnT w="4763" cap="flat" cmpd="sng" algn="ctr">
+                      <a:solidFill>
+                        <a:schemeClr val="bg1"/>
+                      </a:solidFill>
+                      <a:prstDash val="solid"/>
+                      <a:round/>
+                      <a:headEnd type="none" w="med" len="med"/>
+                      <a:tailEnd type="none" w="med" len="med"/>
+                    </a:lnT>
+                    <a:lnB w="4763" cap="flat" cmpd="sng" algn="ctr">
+                      <a:solidFill>
+                        <a:schemeClr val="bg1"/>
+                      </a:solidFill>
+                      <a:prstDash val="solid"/>
+                      <a:round/>
+                      <a:headEnd type="none" w="med" len="med"/>
+                      <a:tailEnd type="none" w="med" len="med"/>
+                    </a:lnB>
+                    <a:noFill/>
+                  </a:tcPr>
+                </a:tc>
+                <a:extLst>
+                  <a:ext uri="{0D108BD9-81ED-4DB2-BD59-A6C34878D82A}">
+                    <a16:rowId xmlns:a16="http://schemas.microsoft.com/office/drawing/2014/main" val="1440859132"/>
+                  </a:ext>
+                </a:extLst>
+              </a:tr>
+              <a:tr h="698124">
+                <a:tc>
+                  <a:txBody>
+                    <a:bodyPr/>
+                    <a:lstStyle/>
+                    <a:p>
+                      <a:pPr rtl="0">
+                        <a:buNone/>
+                      </a:pPr>
+                      <a:r>
+                        <a:rPr lang="en-IN" sz="1800" b="1">
+                          <a:solidFill>
+                            <a:srgbClr val="1F1F1F"/>
+                          </a:solidFill>
+                          <a:effectLst/>
+                          <a:latin typeface="Google Sans Text"/>
+                        </a:rPr>
+                        <a:t>0x0105</a:t>
+                      </a:r>
+                      <a:endParaRPr lang="en-IN" sz="1800">
+                        <a:solidFill>
+                          <a:srgbClr val="1F1F1F"/>
+                        </a:solidFill>
+                        <a:effectLst/>
+                        <a:latin typeface="Google Sans Text"/>
+                      </a:endParaRPr>
+                    </a:p>
+                  </a:txBody>
+                  <a:tcPr marL="46868" marR="29293" marT="39057" marB="39057" anchor="ctr">
+                    <a:lnL w="4763" cap="flat" cmpd="sng" algn="ctr">
+                      <a:solidFill>
+                        <a:schemeClr val="bg1"/>
+                      </a:solidFill>
+                      <a:prstDash val="solid"/>
+                      <a:round/>
+                      <a:headEnd type="none" w="med" len="med"/>
+                      <a:tailEnd type="none" w="med" len="med"/>
+                    </a:lnL>
+                    <a:lnR w="4763" cap="flat" cmpd="sng" algn="ctr">
+                      <a:solidFill>
+                        <a:schemeClr val="bg1"/>
+                      </a:solidFill>
+                      <a:prstDash val="solid"/>
+                      <a:round/>
+                      <a:headEnd type="none" w="med" len="med"/>
+                      <a:tailEnd type="none" w="med" len="med"/>
+                    </a:lnR>
+                    <a:lnT w="4763" cap="flat" cmpd="sng" algn="ctr">
+                      <a:solidFill>
+                        <a:schemeClr val="bg1"/>
+                      </a:solidFill>
+                      <a:prstDash val="solid"/>
+                      <a:round/>
+                      <a:headEnd type="none" w="med" len="med"/>
+                      <a:tailEnd type="none" w="med" len="med"/>
+                    </a:lnT>
+                    <a:lnB w="4763" cap="flat" cmpd="sng" algn="ctr">
+                      <a:solidFill>
+                        <a:schemeClr val="bg1"/>
+                      </a:solidFill>
+                      <a:prstDash val="solid"/>
+                      <a:round/>
+                      <a:headEnd type="none" w="med" len="med"/>
+                      <a:tailEnd type="none" w="med" len="med"/>
+                    </a:lnB>
+                    <a:noFill/>
+                  </a:tcPr>
+                </a:tc>
+                <a:tc>
+                  <a:txBody>
+                    <a:bodyPr/>
+                    <a:lstStyle/>
+                    <a:p>
+                      <a:pPr algn="r" rtl="0">
+                        <a:buNone/>
+                      </a:pPr>
+                      <a:r>
+                        <a:rPr lang="en-IN" sz="1800" dirty="0">
+                          <a:solidFill>
+                            <a:srgbClr val="444746"/>
+                          </a:solidFill>
+                          <a:effectLst/>
+                          <a:latin typeface="Google Sans Text"/>
+                        </a:rPr>
+                        <a:t>0x19</a:t>
+                      </a:r>
+                      <a:endParaRPr lang="en-IN" sz="1800" dirty="0">
+                        <a:solidFill>
+                          <a:srgbClr val="1F1F1F"/>
+                        </a:solidFill>
+                        <a:effectLst/>
+                        <a:latin typeface="Google Sans Text"/>
+                      </a:endParaRPr>
+                    </a:p>
+                  </a:txBody>
+                  <a:tcPr marL="46868" marR="29293" marT="39057" marB="39057" anchor="ctr">
+                    <a:lnL w="4763" cap="flat" cmpd="sng" algn="ctr">
+                      <a:solidFill>
+                        <a:schemeClr val="bg1"/>
+                      </a:solidFill>
+                      <a:prstDash val="solid"/>
+                      <a:round/>
+                      <a:headEnd type="none" w="med" len="med"/>
+                      <a:tailEnd type="none" w="med" len="med"/>
+                    </a:lnL>
+                    <a:lnR w="4763" cap="flat" cmpd="sng" algn="ctr">
+                      <a:solidFill>
+                        <a:schemeClr val="bg1"/>
+                      </a:solidFill>
+                      <a:prstDash val="solid"/>
+                      <a:round/>
+                      <a:headEnd type="none" w="med" len="med"/>
+                      <a:tailEnd type="none" w="med" len="med"/>
+                    </a:lnR>
+                    <a:lnT w="4763" cap="flat" cmpd="sng" algn="ctr">
+                      <a:solidFill>
+                        <a:schemeClr val="bg1"/>
+                      </a:solidFill>
+                      <a:prstDash val="solid"/>
+                      <a:round/>
+                      <a:headEnd type="none" w="med" len="med"/>
+                      <a:tailEnd type="none" w="med" len="med"/>
+                    </a:lnT>
+                    <a:lnB w="4763" cap="flat" cmpd="sng" algn="ctr">
+                      <a:solidFill>
+                        <a:schemeClr val="bg1"/>
+                      </a:solidFill>
+                      <a:prstDash val="solid"/>
+                      <a:round/>
+                      <a:headEnd type="none" w="med" len="med"/>
+                      <a:tailEnd type="none" w="med" len="med"/>
+                    </a:lnB>
+                    <a:noFill/>
+                  </a:tcPr>
+                </a:tc>
+                <a:extLst>
+                  <a:ext uri="{0D108BD9-81ED-4DB2-BD59-A6C34878D82A}">
+                    <a16:rowId xmlns:a16="http://schemas.microsoft.com/office/drawing/2014/main" val="3546751898"/>
+                  </a:ext>
+                </a:extLst>
+              </a:tr>
+              <a:tr h="238384">
+                <a:tc>
+                  <a:txBody>
+                    <a:bodyPr/>
+                    <a:lstStyle/>
+                    <a:p>
+                      <a:pPr rtl="0">
+                        <a:buNone/>
+                      </a:pPr>
+                      <a:r>
+                        <a:rPr lang="en-IN" sz="1800" b="1">
+                          <a:solidFill>
+                            <a:srgbClr val="1F1F1F"/>
+                          </a:solidFill>
+                          <a:effectLst/>
+                          <a:latin typeface="Google Sans Text"/>
+                        </a:rPr>
+                        <a:t>...</a:t>
+                      </a:r>
+                      <a:endParaRPr lang="en-IN" sz="1800">
+                        <a:solidFill>
+                          <a:srgbClr val="1F1F1F"/>
+                        </a:solidFill>
+                        <a:effectLst/>
+                        <a:latin typeface="Google Sans Text"/>
+                      </a:endParaRPr>
+                    </a:p>
+                  </a:txBody>
+                  <a:tcPr marL="46868" marR="29293" marT="39057" marB="39057" anchor="ctr">
+                    <a:lnL w="4763" cap="flat" cmpd="sng" algn="ctr">
+                      <a:solidFill>
+                        <a:schemeClr val="bg1"/>
+                      </a:solidFill>
+                      <a:prstDash val="solid"/>
+                      <a:round/>
+                      <a:headEnd type="none" w="med" len="med"/>
+                      <a:tailEnd type="none" w="med" len="med"/>
+                    </a:lnL>
+                    <a:lnR w="4763" cap="flat" cmpd="sng" algn="ctr">
+                      <a:solidFill>
+                        <a:schemeClr val="bg1"/>
+                      </a:solidFill>
+                      <a:prstDash val="solid"/>
+                      <a:round/>
+                      <a:headEnd type="none" w="med" len="med"/>
+                      <a:tailEnd type="none" w="med" len="med"/>
+                    </a:lnR>
+                    <a:lnT w="4763" cap="flat" cmpd="sng" algn="ctr">
+                      <a:solidFill>
+                        <a:schemeClr val="bg1"/>
+                      </a:solidFill>
+                      <a:prstDash val="solid"/>
+                      <a:round/>
+                      <a:headEnd type="none" w="med" len="med"/>
+                      <a:tailEnd type="none" w="med" len="med"/>
+                    </a:lnT>
+                    <a:lnB w="4763" cap="flat" cmpd="sng" algn="ctr">
+                      <a:solidFill>
+                        <a:schemeClr val="bg1"/>
+                      </a:solidFill>
+                      <a:prstDash val="solid"/>
+                      <a:round/>
+                      <a:headEnd type="none" w="med" len="med"/>
+                      <a:tailEnd type="none" w="med" len="med"/>
+                    </a:lnB>
+                    <a:noFill/>
+                  </a:tcPr>
+                </a:tc>
+                <a:tc>
+                  <a:txBody>
+                    <a:bodyPr/>
+                    <a:lstStyle/>
+                    <a:p>
+                      <a:pPr algn="r" rtl="0">
+                        <a:buNone/>
+                      </a:pPr>
+                      <a:r>
+                        <a:rPr lang="en-IN" sz="1800" dirty="0">
+                          <a:solidFill>
+                            <a:srgbClr val="1F1F1F"/>
+                          </a:solidFill>
+                          <a:effectLst/>
+                          <a:latin typeface="Google Sans Text"/>
+                        </a:rPr>
+                        <a:t>...</a:t>
+                      </a:r>
+                    </a:p>
+                  </a:txBody>
+                  <a:tcPr marL="46868" marR="29293" marT="39057" marB="39057" anchor="ctr">
+                    <a:lnL w="4763" cap="flat" cmpd="sng" algn="ctr">
+                      <a:solidFill>
+                        <a:schemeClr val="bg1"/>
+                      </a:solidFill>
+                      <a:prstDash val="solid"/>
+                      <a:round/>
+                      <a:headEnd type="none" w="med" len="med"/>
+                      <a:tailEnd type="none" w="med" len="med"/>
+                    </a:lnL>
+                    <a:lnR w="4763" cap="flat" cmpd="sng" algn="ctr">
+                      <a:solidFill>
+                        <a:schemeClr val="bg1"/>
+                      </a:solidFill>
+                      <a:prstDash val="solid"/>
+                      <a:round/>
+                      <a:headEnd type="none" w="med" len="med"/>
+                      <a:tailEnd type="none" w="med" len="med"/>
+                    </a:lnR>
+                    <a:lnT w="4763" cap="flat" cmpd="sng" algn="ctr">
+                      <a:solidFill>
+                        <a:schemeClr val="bg1"/>
+                      </a:solidFill>
+                      <a:prstDash val="solid"/>
+                      <a:round/>
+                      <a:headEnd type="none" w="med" len="med"/>
+                      <a:tailEnd type="none" w="med" len="med"/>
+                    </a:lnT>
+                    <a:lnB w="4763" cap="flat" cmpd="sng" algn="ctr">
+                      <a:solidFill>
+                        <a:schemeClr val="bg1"/>
+                      </a:solidFill>
+                      <a:prstDash val="solid"/>
+                      <a:round/>
+                      <a:headEnd type="none" w="med" len="med"/>
+                      <a:tailEnd type="none" w="med" len="med"/>
+                    </a:lnB>
+                    <a:noFill/>
+                  </a:tcPr>
+                </a:tc>
+                <a:extLst>
+                  <a:ext uri="{0D108BD9-81ED-4DB2-BD59-A6C34878D82A}">
+                    <a16:rowId xmlns:a16="http://schemas.microsoft.com/office/drawing/2014/main" val="1476332421"/>
+                  </a:ext>
+                </a:extLst>
+              </a:tr>
+              <a:tr h="391631">
+                <a:tc>
+                  <a:txBody>
+                    <a:bodyPr/>
+                    <a:lstStyle/>
+                    <a:p>
+                      <a:pPr rtl="0">
+                        <a:buNone/>
+                      </a:pPr>
+                      <a:r>
+                        <a:rPr lang="en-IN" sz="1800" b="1">
+                          <a:solidFill>
+                            <a:srgbClr val="1F1F1F"/>
+                          </a:solidFill>
+                          <a:effectLst/>
+                          <a:latin typeface="Google Sans Text"/>
+                        </a:rPr>
+                        <a:t>0x0800</a:t>
+                      </a:r>
+                      <a:endParaRPr lang="en-IN" sz="1800">
+                        <a:solidFill>
+                          <a:srgbClr val="1F1F1F"/>
+                        </a:solidFill>
+                        <a:effectLst/>
+                        <a:latin typeface="Google Sans Text"/>
+                      </a:endParaRPr>
+                    </a:p>
+                  </a:txBody>
+                  <a:tcPr marL="46868" marR="29293" marT="39057" marB="39057" anchor="ctr">
+                    <a:lnL w="4763" cap="flat" cmpd="sng" algn="ctr">
+                      <a:solidFill>
+                        <a:schemeClr val="bg1"/>
+                      </a:solidFill>
+                      <a:prstDash val="solid"/>
+                      <a:round/>
+                      <a:headEnd type="none" w="med" len="med"/>
+                      <a:tailEnd type="none" w="med" len="med"/>
+                    </a:lnL>
+                    <a:lnR w="4763" cap="flat" cmpd="sng" algn="ctr">
+                      <a:solidFill>
+                        <a:schemeClr val="bg1"/>
+                      </a:solidFill>
+                      <a:prstDash val="solid"/>
+                      <a:round/>
+                      <a:headEnd type="none" w="med" len="med"/>
+                      <a:tailEnd type="none" w="med" len="med"/>
+                    </a:lnR>
+                    <a:lnT w="4763" cap="flat" cmpd="sng" algn="ctr">
+                      <a:solidFill>
+                        <a:schemeClr val="bg1"/>
+                      </a:solidFill>
+                      <a:prstDash val="solid"/>
+                      <a:round/>
+                      <a:headEnd type="none" w="med" len="med"/>
+                      <a:tailEnd type="none" w="med" len="med"/>
+                    </a:lnT>
+                    <a:lnB w="4763" cap="flat" cmpd="sng" algn="ctr">
+                      <a:solidFill>
+                        <a:schemeClr val="bg1"/>
+                      </a:solidFill>
+                      <a:prstDash val="solid"/>
+                      <a:round/>
+                      <a:headEnd type="none" w="med" len="med"/>
+                      <a:tailEnd type="none" w="med" len="med"/>
+                    </a:lnB>
+                    <a:noFill/>
+                  </a:tcPr>
+                </a:tc>
+                <a:tc>
+                  <a:txBody>
+                    <a:bodyPr/>
+                    <a:lstStyle/>
+                    <a:p>
+                      <a:pPr algn="r" rtl="0">
+                        <a:buNone/>
+                      </a:pPr>
+                      <a:r>
+                        <a:rPr lang="en-IN" sz="1800" dirty="0">
+                          <a:solidFill>
+                            <a:srgbClr val="444746"/>
+                          </a:solidFill>
+                          <a:effectLst/>
+                          <a:latin typeface="Google Sans Text"/>
+                        </a:rPr>
+                        <a:t>0xAA</a:t>
+                      </a:r>
+                      <a:endParaRPr lang="en-IN" sz="1800" dirty="0">
+                        <a:solidFill>
+                          <a:srgbClr val="1F1F1F"/>
+                        </a:solidFill>
+                        <a:effectLst/>
+                        <a:latin typeface="Google Sans Text"/>
+                      </a:endParaRPr>
+                    </a:p>
+                  </a:txBody>
+                  <a:tcPr marL="46868" marR="29293" marT="39057" marB="39057" anchor="ctr">
+                    <a:lnL w="4763" cap="flat" cmpd="sng" algn="ctr">
+                      <a:solidFill>
+                        <a:schemeClr val="bg1"/>
+                      </a:solidFill>
+                      <a:prstDash val="solid"/>
+                      <a:round/>
+                      <a:headEnd type="none" w="med" len="med"/>
+                      <a:tailEnd type="none" w="med" len="med"/>
+                    </a:lnL>
+                    <a:lnR w="4763" cap="flat" cmpd="sng" algn="ctr">
+                      <a:solidFill>
+                        <a:schemeClr val="bg1"/>
+                      </a:solidFill>
+                      <a:prstDash val="solid"/>
+                      <a:round/>
+                      <a:headEnd type="none" w="med" len="med"/>
+                      <a:tailEnd type="none" w="med" len="med"/>
+                    </a:lnR>
+                    <a:lnT w="4763" cap="flat" cmpd="sng" algn="ctr">
+                      <a:solidFill>
+                        <a:schemeClr val="bg1"/>
+                      </a:solidFill>
+                      <a:prstDash val="solid"/>
+                      <a:round/>
+                      <a:headEnd type="none" w="med" len="med"/>
+                      <a:tailEnd type="none" w="med" len="med"/>
+                    </a:lnT>
+                    <a:lnB w="4763" cap="flat" cmpd="sng" algn="ctr">
+                      <a:solidFill>
+                        <a:schemeClr val="bg1"/>
+                      </a:solidFill>
+                      <a:prstDash val="solid"/>
+                      <a:round/>
+                      <a:headEnd type="none" w="med" len="med"/>
+                      <a:tailEnd type="none" w="med" len="med"/>
+                    </a:lnB>
+                    <a:noFill/>
+                  </a:tcPr>
+                </a:tc>
+                <a:extLst>
+                  <a:ext uri="{0D108BD9-81ED-4DB2-BD59-A6C34878D82A}">
+                    <a16:rowId xmlns:a16="http://schemas.microsoft.com/office/drawing/2014/main" val="2707795181"/>
+                  </a:ext>
+                </a:extLst>
+              </a:tr>
+              <a:tr h="391631">
+                <a:tc>
+                  <a:txBody>
+                    <a:bodyPr/>
+                    <a:lstStyle/>
+                    <a:p>
+                      <a:pPr rtl="0">
+                        <a:buNone/>
+                      </a:pPr>
+                      <a:r>
+                        <a:rPr lang="en-IN" sz="1800" b="1">
+                          <a:solidFill>
+                            <a:srgbClr val="1F1F1F"/>
+                          </a:solidFill>
+                          <a:effectLst/>
+                          <a:latin typeface="Google Sans Text"/>
+                        </a:rPr>
+                        <a:t>0x0801</a:t>
+                      </a:r>
+                      <a:endParaRPr lang="en-IN" sz="1800">
+                        <a:solidFill>
+                          <a:srgbClr val="1F1F1F"/>
+                        </a:solidFill>
+                        <a:effectLst/>
+                        <a:latin typeface="Google Sans Text"/>
+                      </a:endParaRPr>
+                    </a:p>
+                  </a:txBody>
+                  <a:tcPr marL="46868" marR="29293" marT="39057" marB="39057" anchor="ctr">
+                    <a:lnL w="4763" cap="flat" cmpd="sng" algn="ctr">
+                      <a:solidFill>
+                        <a:schemeClr val="bg1"/>
+                      </a:solidFill>
+                      <a:prstDash val="solid"/>
+                      <a:round/>
+                      <a:headEnd type="none" w="med" len="med"/>
+                      <a:tailEnd type="none" w="med" len="med"/>
+                    </a:lnL>
+                    <a:lnR w="4763" cap="flat" cmpd="sng" algn="ctr">
+                      <a:solidFill>
+                        <a:schemeClr val="bg1"/>
+                      </a:solidFill>
+                      <a:prstDash val="solid"/>
+                      <a:round/>
+                      <a:headEnd type="none" w="med" len="med"/>
+                      <a:tailEnd type="none" w="med" len="med"/>
+                    </a:lnR>
+                    <a:lnT w="4763" cap="flat" cmpd="sng" algn="ctr">
+                      <a:solidFill>
+                        <a:schemeClr val="bg1"/>
+                      </a:solidFill>
+                      <a:prstDash val="solid"/>
+                      <a:round/>
+                      <a:headEnd type="none" w="med" len="med"/>
+                      <a:tailEnd type="none" w="med" len="med"/>
+                    </a:lnT>
+                    <a:lnB w="4763" cap="flat" cmpd="sng" algn="ctr">
+                      <a:solidFill>
+                        <a:schemeClr val="bg1"/>
+                      </a:solidFill>
+                      <a:prstDash val="solid"/>
+                      <a:round/>
+                      <a:headEnd type="none" w="med" len="med"/>
+                      <a:tailEnd type="none" w="med" len="med"/>
+                    </a:lnB>
+                    <a:noFill/>
+                  </a:tcPr>
+                </a:tc>
+                <a:tc>
+                  <a:txBody>
+                    <a:bodyPr/>
+                    <a:lstStyle/>
+                    <a:p>
+                      <a:pPr algn="r" rtl="0">
+                        <a:buNone/>
+                      </a:pPr>
+                      <a:r>
+                        <a:rPr lang="en-IN" sz="1800" dirty="0">
+                          <a:solidFill>
+                            <a:srgbClr val="444746"/>
+                          </a:solidFill>
+                          <a:effectLst/>
+                          <a:latin typeface="Google Sans Text"/>
+                        </a:rPr>
+                        <a:t>0xBB</a:t>
+                      </a:r>
+                      <a:endParaRPr lang="en-IN" sz="1800" dirty="0">
+                        <a:solidFill>
+                          <a:srgbClr val="1F1F1F"/>
+                        </a:solidFill>
+                        <a:effectLst/>
+                        <a:latin typeface="Google Sans Text"/>
+                      </a:endParaRPr>
+                    </a:p>
+                  </a:txBody>
+                  <a:tcPr marL="46868" marR="29293" marT="39057" marB="39057" anchor="ctr">
+                    <a:lnL w="4763" cap="flat" cmpd="sng" algn="ctr">
+                      <a:solidFill>
+                        <a:schemeClr val="bg1"/>
+                      </a:solidFill>
+                      <a:prstDash val="solid"/>
+                      <a:round/>
+                      <a:headEnd type="none" w="med" len="med"/>
+                      <a:tailEnd type="none" w="med" len="med"/>
+                    </a:lnL>
+                    <a:lnR w="4763" cap="flat" cmpd="sng" algn="ctr">
+                      <a:solidFill>
+                        <a:schemeClr val="bg1"/>
+                      </a:solidFill>
+                      <a:prstDash val="solid"/>
+                      <a:round/>
+                      <a:headEnd type="none" w="med" len="med"/>
+                      <a:tailEnd type="none" w="med" len="med"/>
+                    </a:lnR>
+                    <a:lnT w="4763" cap="flat" cmpd="sng" algn="ctr">
+                      <a:solidFill>
+                        <a:schemeClr val="bg1"/>
+                      </a:solidFill>
+                      <a:prstDash val="solid"/>
+                      <a:round/>
+                      <a:headEnd type="none" w="med" len="med"/>
+                      <a:tailEnd type="none" w="med" len="med"/>
+                    </a:lnT>
+                    <a:lnB w="4763" cap="flat" cmpd="sng" algn="ctr">
+                      <a:solidFill>
+                        <a:schemeClr val="bg1"/>
+                      </a:solidFill>
+                      <a:prstDash val="solid"/>
+                      <a:round/>
+                      <a:headEnd type="none" w="med" len="med"/>
+                      <a:tailEnd type="none" w="med" len="med"/>
+                    </a:lnB>
+                    <a:noFill/>
+                  </a:tcPr>
+                </a:tc>
+                <a:extLst>
+                  <a:ext uri="{0D108BD9-81ED-4DB2-BD59-A6C34878D82A}">
+                    <a16:rowId xmlns:a16="http://schemas.microsoft.com/office/drawing/2014/main" val="943951041"/>
+                  </a:ext>
+                </a:extLst>
+              </a:tr>
+              <a:tr h="238384">
+                <a:tc>
+                  <a:txBody>
+                    <a:bodyPr/>
+                    <a:lstStyle/>
+                    <a:p>
+                      <a:pPr rtl="0">
+                        <a:buNone/>
+                      </a:pPr>
+                      <a:r>
+                        <a:rPr lang="en-IN" sz="1800" b="1">
+                          <a:solidFill>
+                            <a:srgbClr val="1F1F1F"/>
+                          </a:solidFill>
+                          <a:effectLst/>
+                          <a:latin typeface="Google Sans Text"/>
+                        </a:rPr>
+                        <a:t>...</a:t>
+                      </a:r>
+                      <a:endParaRPr lang="en-IN" sz="1800">
+                        <a:solidFill>
+                          <a:srgbClr val="1F1F1F"/>
+                        </a:solidFill>
+                        <a:effectLst/>
+                        <a:latin typeface="Google Sans Text"/>
+                      </a:endParaRPr>
+                    </a:p>
+                  </a:txBody>
+                  <a:tcPr marL="46868" marR="29293" marT="39057" marB="39057" anchor="ctr">
+                    <a:lnL w="4763" cap="flat" cmpd="sng" algn="ctr">
+                      <a:solidFill>
+                        <a:schemeClr val="bg1"/>
+                      </a:solidFill>
+                      <a:prstDash val="solid"/>
+                      <a:round/>
+                      <a:headEnd type="none" w="med" len="med"/>
+                      <a:tailEnd type="none" w="med" len="med"/>
+                    </a:lnL>
+                    <a:lnR w="4763" cap="flat" cmpd="sng" algn="ctr">
+                      <a:solidFill>
+                        <a:schemeClr val="bg1"/>
+                      </a:solidFill>
+                      <a:prstDash val="solid"/>
+                      <a:round/>
+                      <a:headEnd type="none" w="med" len="med"/>
+                      <a:tailEnd type="none" w="med" len="med"/>
+                    </a:lnR>
+                    <a:lnT w="4763" cap="flat" cmpd="sng" algn="ctr">
+                      <a:solidFill>
+                        <a:schemeClr val="bg1"/>
+                      </a:solidFill>
+                      <a:prstDash val="solid"/>
+                      <a:round/>
+                      <a:headEnd type="none" w="med" len="med"/>
+                      <a:tailEnd type="none" w="med" len="med"/>
+                    </a:lnT>
+                    <a:lnB w="4763" cap="flat" cmpd="sng" algn="ctr">
+                      <a:solidFill>
+                        <a:schemeClr val="bg1"/>
+                      </a:solidFill>
+                      <a:prstDash val="solid"/>
+                      <a:round/>
+                      <a:headEnd type="none" w="med" len="med"/>
+                      <a:tailEnd type="none" w="med" len="med"/>
+                    </a:lnB>
+                    <a:noFill/>
+                  </a:tcPr>
+                </a:tc>
+                <a:tc>
+                  <a:txBody>
+                    <a:bodyPr/>
+                    <a:lstStyle/>
+                    <a:p>
+                      <a:pPr algn="r" rtl="0">
+                        <a:buNone/>
+                      </a:pPr>
+                      <a:r>
+                        <a:rPr lang="en-IN" sz="1800" dirty="0">
+                          <a:solidFill>
+                            <a:srgbClr val="1F1F1F"/>
+                          </a:solidFill>
+                          <a:effectLst/>
+                          <a:latin typeface="Google Sans Text"/>
+                        </a:rPr>
+                        <a:t>...</a:t>
+                      </a:r>
+                    </a:p>
+                  </a:txBody>
+                  <a:tcPr marL="46868" marR="29293" marT="39057" marB="39057" anchor="ctr">
+                    <a:lnL w="4763" cap="flat" cmpd="sng" algn="ctr">
+                      <a:solidFill>
+                        <a:schemeClr val="bg1"/>
+                      </a:solidFill>
+                      <a:prstDash val="solid"/>
+                      <a:round/>
+                      <a:headEnd type="none" w="med" len="med"/>
+                      <a:tailEnd type="none" w="med" len="med"/>
+                    </a:lnL>
+                    <a:lnR w="4763" cap="flat" cmpd="sng" algn="ctr">
+                      <a:solidFill>
+                        <a:schemeClr val="bg1"/>
+                      </a:solidFill>
+                      <a:prstDash val="solid"/>
+                      <a:round/>
+                      <a:headEnd type="none" w="med" len="med"/>
+                      <a:tailEnd type="none" w="med" len="med"/>
+                    </a:lnR>
+                    <a:lnT w="4763" cap="flat" cmpd="sng" algn="ctr">
+                      <a:solidFill>
+                        <a:schemeClr val="bg1"/>
+                      </a:solidFill>
+                      <a:prstDash val="solid"/>
+                      <a:round/>
+                      <a:headEnd type="none" w="med" len="med"/>
+                      <a:tailEnd type="none" w="med" len="med"/>
+                    </a:lnT>
+                    <a:lnB w="4763" cap="flat" cmpd="sng" algn="ctr">
+                      <a:solidFill>
+                        <a:schemeClr val="bg1"/>
+                      </a:solidFill>
+                      <a:prstDash val="solid"/>
+                      <a:round/>
+                      <a:headEnd type="none" w="med" len="med"/>
+                      <a:tailEnd type="none" w="med" len="med"/>
+                    </a:lnB>
+                    <a:noFill/>
+                  </a:tcPr>
+                </a:tc>
+                <a:extLst>
+                  <a:ext uri="{0D108BD9-81ED-4DB2-BD59-A6C34878D82A}">
+                    <a16:rowId xmlns:a16="http://schemas.microsoft.com/office/drawing/2014/main" val="3712034577"/>
+                  </a:ext>
+                </a:extLst>
+              </a:tr>
+              <a:tr h="544878">
+                <a:tc>
+                  <a:txBody>
+                    <a:bodyPr/>
+                    <a:lstStyle/>
+                    <a:p>
+                      <a:pPr rtl="0">
+                        <a:buNone/>
+                      </a:pPr>
+                      <a:r>
+                        <a:rPr lang="en-IN" sz="1800" b="1">
+                          <a:solidFill>
+                            <a:srgbClr val="1F1F1F"/>
+                          </a:solidFill>
+                          <a:effectLst/>
+                          <a:latin typeface="Google Sans Text"/>
+                        </a:rPr>
+                        <a:t>0x2000</a:t>
+                      </a:r>
+                      <a:endParaRPr lang="en-IN" sz="1800">
+                        <a:solidFill>
+                          <a:srgbClr val="1F1F1F"/>
+                        </a:solidFill>
+                        <a:effectLst/>
+                        <a:latin typeface="Google Sans Text"/>
+                      </a:endParaRPr>
+                    </a:p>
+                  </a:txBody>
+                  <a:tcPr marL="46868" marR="29293" marT="39057" marB="39057" anchor="ctr">
+                    <a:lnL w="4763" cap="flat" cmpd="sng" algn="ctr">
+                      <a:solidFill>
+                        <a:schemeClr val="bg1"/>
+                      </a:solidFill>
+                      <a:prstDash val="solid"/>
+                      <a:round/>
+                      <a:headEnd type="none" w="med" len="med"/>
+                      <a:tailEnd type="none" w="med" len="med"/>
+                    </a:lnL>
+                    <a:lnR w="4763" cap="flat" cmpd="sng" algn="ctr">
+                      <a:solidFill>
+                        <a:schemeClr val="bg1"/>
+                      </a:solidFill>
+                      <a:prstDash val="solid"/>
+                      <a:round/>
+                      <a:headEnd type="none" w="med" len="med"/>
+                      <a:tailEnd type="none" w="med" len="med"/>
+                    </a:lnR>
+                    <a:lnT w="4763" cap="flat" cmpd="sng" algn="ctr">
+                      <a:solidFill>
+                        <a:schemeClr val="bg1"/>
+                      </a:solidFill>
+                      <a:prstDash val="solid"/>
+                      <a:round/>
+                      <a:headEnd type="none" w="med" len="med"/>
+                      <a:tailEnd type="none" w="med" len="med"/>
+                    </a:lnT>
+                    <a:lnB w="4763" cap="flat" cmpd="sng" algn="ctr">
+                      <a:solidFill>
+                        <a:schemeClr val="bg1"/>
+                      </a:solidFill>
+                      <a:prstDash val="solid"/>
+                      <a:round/>
+                      <a:headEnd type="none" w="med" len="med"/>
+                      <a:tailEnd type="none" w="med" len="med"/>
+                    </a:lnB>
+                    <a:noFill/>
+                  </a:tcPr>
+                </a:tc>
+                <a:tc>
+                  <a:txBody>
+                    <a:bodyPr/>
+                    <a:lstStyle/>
+                    <a:p>
+                      <a:pPr algn="r" rtl="0">
+                        <a:buNone/>
+                      </a:pPr>
+                      <a:r>
+                        <a:rPr lang="en-IN" sz="1800" dirty="0">
+                          <a:solidFill>
+                            <a:srgbClr val="444746"/>
+                          </a:solidFill>
+                          <a:effectLst/>
+                          <a:latin typeface="Google Sans Text"/>
+                        </a:rPr>
+                        <a:t>0x11</a:t>
+                      </a:r>
+                      <a:endParaRPr lang="en-IN" sz="1800" dirty="0">
+                        <a:solidFill>
+                          <a:srgbClr val="1F1F1F"/>
+                        </a:solidFill>
+                        <a:effectLst/>
+                        <a:latin typeface="Google Sans Text"/>
+                      </a:endParaRPr>
+                    </a:p>
+                  </a:txBody>
+                  <a:tcPr marL="46868" marR="29293" marT="39057" marB="39057" anchor="ctr">
+                    <a:lnL w="4763" cap="flat" cmpd="sng" algn="ctr">
+                      <a:solidFill>
+                        <a:schemeClr val="bg1"/>
+                      </a:solidFill>
+                      <a:prstDash val="solid"/>
+                      <a:round/>
+                      <a:headEnd type="none" w="med" len="med"/>
+                      <a:tailEnd type="none" w="med" len="med"/>
+                    </a:lnL>
+                    <a:lnR w="4763" cap="flat" cmpd="sng" algn="ctr">
+                      <a:solidFill>
+                        <a:schemeClr val="bg1"/>
+                      </a:solidFill>
+                      <a:prstDash val="solid"/>
+                      <a:round/>
+                      <a:headEnd type="none" w="med" len="med"/>
+                      <a:tailEnd type="none" w="med" len="med"/>
+                    </a:lnR>
+                    <a:lnT w="4763" cap="flat" cmpd="sng" algn="ctr">
+                      <a:solidFill>
+                        <a:schemeClr val="bg1"/>
+                      </a:solidFill>
+                      <a:prstDash val="solid"/>
+                      <a:round/>
+                      <a:headEnd type="none" w="med" len="med"/>
+                      <a:tailEnd type="none" w="med" len="med"/>
+                    </a:lnT>
+                    <a:lnB w="4763" cap="flat" cmpd="sng" algn="ctr">
+                      <a:solidFill>
+                        <a:schemeClr val="bg1"/>
+                      </a:solidFill>
+                      <a:prstDash val="solid"/>
+                      <a:round/>
+                      <a:headEnd type="none" w="med" len="med"/>
+                      <a:tailEnd type="none" w="med" len="med"/>
+                    </a:lnB>
+                    <a:noFill/>
+                  </a:tcPr>
+                </a:tc>
+                <a:extLst>
+                  <a:ext uri="{0D108BD9-81ED-4DB2-BD59-A6C34878D82A}">
+                    <a16:rowId xmlns:a16="http://schemas.microsoft.com/office/drawing/2014/main" val="3722305983"/>
+                  </a:ext>
+                </a:extLst>
+              </a:tr>
+              <a:tr h="544878">
+                <a:tc>
+                  <a:txBody>
+                    <a:bodyPr/>
+                    <a:lstStyle/>
+                    <a:p>
+                      <a:pPr rtl="0">
+                        <a:buNone/>
+                      </a:pPr>
+                      <a:r>
+                        <a:rPr lang="en-IN" sz="1800" b="1">
+                          <a:solidFill>
+                            <a:srgbClr val="1F1F1F"/>
+                          </a:solidFill>
+                          <a:effectLst/>
+                          <a:latin typeface="Google Sans Text"/>
+                        </a:rPr>
+                        <a:t>0x2001</a:t>
+                      </a:r>
+                      <a:endParaRPr lang="en-IN" sz="1800">
+                        <a:solidFill>
+                          <a:srgbClr val="1F1F1F"/>
+                        </a:solidFill>
+                        <a:effectLst/>
+                        <a:latin typeface="Google Sans Text"/>
+                      </a:endParaRPr>
+                    </a:p>
+                  </a:txBody>
+                  <a:tcPr marL="46868" marR="29293" marT="39057" marB="39057" anchor="ctr">
+                    <a:lnL w="4763" cap="flat" cmpd="sng" algn="ctr">
+                      <a:solidFill>
+                        <a:schemeClr val="bg1"/>
+                      </a:solidFill>
+                      <a:prstDash val="solid"/>
+                      <a:round/>
+                      <a:headEnd type="none" w="med" len="med"/>
+                      <a:tailEnd type="none" w="med" len="med"/>
+                    </a:lnL>
+                    <a:lnR w="4763" cap="flat" cmpd="sng" algn="ctr">
+                      <a:solidFill>
+                        <a:schemeClr val="bg1"/>
+                      </a:solidFill>
+                      <a:prstDash val="solid"/>
+                      <a:round/>
+                      <a:headEnd type="none" w="med" len="med"/>
+                      <a:tailEnd type="none" w="med" len="med"/>
+                    </a:lnR>
+                    <a:lnT w="4763" cap="flat" cmpd="sng" algn="ctr">
+                      <a:solidFill>
+                        <a:schemeClr val="bg1"/>
+                      </a:solidFill>
+                      <a:prstDash val="solid"/>
+                      <a:round/>
+                      <a:headEnd type="none" w="med" len="med"/>
+                      <a:tailEnd type="none" w="med" len="med"/>
+                    </a:lnT>
+                    <a:lnB w="4763" cap="flat" cmpd="sng" algn="ctr">
+                      <a:solidFill>
+                        <a:schemeClr val="bg1"/>
+                      </a:solidFill>
+                      <a:prstDash val="solid"/>
+                      <a:round/>
+                      <a:headEnd type="none" w="med" len="med"/>
+                      <a:tailEnd type="none" w="med" len="med"/>
+                    </a:lnB>
+                    <a:noFill/>
+                  </a:tcPr>
+                </a:tc>
+                <a:tc>
+                  <a:txBody>
+                    <a:bodyPr/>
+                    <a:lstStyle/>
+                    <a:p>
+                      <a:pPr algn="r" rtl="0">
+                        <a:buNone/>
+                      </a:pPr>
+                      <a:r>
+                        <a:rPr lang="en-IN" sz="1800" dirty="0">
+                          <a:solidFill>
+                            <a:srgbClr val="444746"/>
+                          </a:solidFill>
+                          <a:effectLst/>
+                          <a:latin typeface="Google Sans Text"/>
+                        </a:rPr>
+                        <a:t>0x00</a:t>
+                      </a:r>
+                      <a:endParaRPr lang="en-IN" sz="1800" dirty="0">
+                        <a:solidFill>
+                          <a:srgbClr val="1F1F1F"/>
+                        </a:solidFill>
+                        <a:effectLst/>
+                        <a:latin typeface="Google Sans Text"/>
+                      </a:endParaRPr>
+                    </a:p>
+                  </a:txBody>
+                  <a:tcPr marL="46868" marR="29293" marT="39057" marB="39057" anchor="ctr">
+                    <a:lnL w="4763" cap="flat" cmpd="sng" algn="ctr">
+                      <a:solidFill>
+                        <a:schemeClr val="bg1"/>
+                      </a:solidFill>
+                      <a:prstDash val="solid"/>
+                      <a:round/>
+                      <a:headEnd type="none" w="med" len="med"/>
+                      <a:tailEnd type="none" w="med" len="med"/>
+                    </a:lnL>
+                    <a:lnR w="4763" cap="flat" cmpd="sng" algn="ctr">
+                      <a:solidFill>
+                        <a:schemeClr val="bg1"/>
+                      </a:solidFill>
+                      <a:prstDash val="solid"/>
+                      <a:round/>
+                      <a:headEnd type="none" w="med" len="med"/>
+                      <a:tailEnd type="none" w="med" len="med"/>
+                    </a:lnR>
+                    <a:lnT w="4763" cap="flat" cmpd="sng" algn="ctr">
+                      <a:solidFill>
+                        <a:schemeClr val="bg1"/>
+                      </a:solidFill>
+                      <a:prstDash val="solid"/>
+                      <a:round/>
+                      <a:headEnd type="none" w="med" len="med"/>
+                      <a:tailEnd type="none" w="med" len="med"/>
+                    </a:lnT>
+                    <a:lnB w="4763" cap="flat" cmpd="sng" algn="ctr">
+                      <a:solidFill>
+                        <a:schemeClr val="bg1"/>
+                      </a:solidFill>
+                      <a:prstDash val="solid"/>
+                      <a:round/>
+                      <a:headEnd type="none" w="med" len="med"/>
+                      <a:tailEnd type="none" w="med" len="med"/>
+                    </a:lnB>
+                    <a:noFill/>
+                  </a:tcPr>
+                </a:tc>
+                <a:extLst>
+                  <a:ext uri="{0D108BD9-81ED-4DB2-BD59-A6C34878D82A}">
+                    <a16:rowId xmlns:a16="http://schemas.microsoft.com/office/drawing/2014/main" val="1947384881"/>
+                  </a:ext>
+                </a:extLst>
+              </a:tr>
+              <a:tr h="544878">
+                <a:tc>
+                  <a:txBody>
+                    <a:bodyPr/>
+                    <a:lstStyle/>
+                    <a:p>
+                      <a:pPr rtl="0">
+                        <a:buNone/>
+                      </a:pPr>
+                      <a:r>
+                        <a:rPr lang="en-IN" sz="1800" b="1">
+                          <a:solidFill>
+                            <a:srgbClr val="1F1F1F"/>
+                          </a:solidFill>
+                          <a:effectLst/>
+                          <a:latin typeface="Google Sans Text"/>
+                        </a:rPr>
+                        <a:t>0x2002</a:t>
+                      </a:r>
+                      <a:endParaRPr lang="en-IN" sz="1800">
+                        <a:solidFill>
+                          <a:srgbClr val="1F1F1F"/>
+                        </a:solidFill>
+                        <a:effectLst/>
+                        <a:latin typeface="Google Sans Text"/>
+                      </a:endParaRPr>
+                    </a:p>
+                  </a:txBody>
+                  <a:tcPr marL="46868" marR="29293" marT="39057" marB="39057" anchor="ctr">
+                    <a:lnL w="4763" cap="flat" cmpd="sng" algn="ctr">
+                      <a:solidFill>
+                        <a:schemeClr val="bg1"/>
+                      </a:solidFill>
+                      <a:prstDash val="solid"/>
+                      <a:round/>
+                      <a:headEnd type="none" w="med" len="med"/>
+                      <a:tailEnd type="none" w="med" len="med"/>
+                    </a:lnL>
+                    <a:lnR w="4763" cap="flat" cmpd="sng" algn="ctr">
+                      <a:solidFill>
+                        <a:schemeClr val="bg1"/>
+                      </a:solidFill>
+                      <a:prstDash val="solid"/>
+                      <a:round/>
+                      <a:headEnd type="none" w="med" len="med"/>
+                      <a:tailEnd type="none" w="med" len="med"/>
+                    </a:lnR>
+                    <a:lnT w="4763" cap="flat" cmpd="sng" algn="ctr">
+                      <a:solidFill>
+                        <a:schemeClr val="bg1"/>
+                      </a:solidFill>
+                      <a:prstDash val="solid"/>
+                      <a:round/>
+                      <a:headEnd type="none" w="med" len="med"/>
+                      <a:tailEnd type="none" w="med" len="med"/>
+                    </a:lnT>
+                    <a:lnB w="4763" cap="flat" cmpd="sng" algn="ctr">
+                      <a:solidFill>
+                        <a:schemeClr val="bg1"/>
+                      </a:solidFill>
+                      <a:prstDash val="solid"/>
+                      <a:round/>
+                      <a:headEnd type="none" w="med" len="med"/>
+                      <a:tailEnd type="none" w="med" len="med"/>
+                    </a:lnB>
+                    <a:noFill/>
+                  </a:tcPr>
+                </a:tc>
+                <a:tc>
+                  <a:txBody>
+                    <a:bodyPr/>
+                    <a:lstStyle/>
+                    <a:p>
+                      <a:pPr algn="r" rtl="0">
+                        <a:buNone/>
+                      </a:pPr>
+                      <a:r>
+                        <a:rPr lang="en-IN" sz="1800" dirty="0">
+                          <a:solidFill>
+                            <a:srgbClr val="444746"/>
+                          </a:solidFill>
+                          <a:effectLst/>
+                          <a:latin typeface="Google Sans Text"/>
+                        </a:rPr>
+                        <a:t>0x8D</a:t>
+                      </a:r>
+                      <a:endParaRPr lang="en-IN" sz="1800" dirty="0">
+                        <a:solidFill>
+                          <a:srgbClr val="1F1F1F"/>
+                        </a:solidFill>
+                        <a:effectLst/>
+                        <a:latin typeface="Google Sans Text"/>
+                      </a:endParaRPr>
+                    </a:p>
+                  </a:txBody>
+                  <a:tcPr marL="46868" marR="29293" marT="39057" marB="39057" anchor="ctr">
+                    <a:lnL w="4763" cap="flat" cmpd="sng" algn="ctr">
+                      <a:solidFill>
+                        <a:schemeClr val="bg1"/>
+                      </a:solidFill>
+                      <a:prstDash val="solid"/>
+                      <a:round/>
+                      <a:headEnd type="none" w="med" len="med"/>
+                      <a:tailEnd type="none" w="med" len="med"/>
+                    </a:lnL>
+                    <a:lnR w="4763" cap="flat" cmpd="sng" algn="ctr">
+                      <a:solidFill>
+                        <a:schemeClr val="bg1"/>
+                      </a:solidFill>
+                      <a:prstDash val="solid"/>
+                      <a:round/>
+                      <a:headEnd type="none" w="med" len="med"/>
+                      <a:tailEnd type="none" w="med" len="med"/>
+                    </a:lnR>
+                    <a:lnT w="4763" cap="flat" cmpd="sng" algn="ctr">
+                      <a:solidFill>
+                        <a:schemeClr val="bg1"/>
+                      </a:solidFill>
+                      <a:prstDash val="solid"/>
+                      <a:round/>
+                      <a:headEnd type="none" w="med" len="med"/>
+                      <a:tailEnd type="none" w="med" len="med"/>
+                    </a:lnT>
+                    <a:lnB w="4763" cap="flat" cmpd="sng" algn="ctr">
+                      <a:solidFill>
+                        <a:schemeClr val="bg1"/>
+                      </a:solidFill>
+                      <a:prstDash val="solid"/>
+                      <a:round/>
+                      <a:headEnd type="none" w="med" len="med"/>
+                      <a:tailEnd type="none" w="med" len="med"/>
+                    </a:lnB>
+                    <a:noFill/>
+                  </a:tcPr>
+                </a:tc>
+                <a:extLst>
+                  <a:ext uri="{0D108BD9-81ED-4DB2-BD59-A6C34878D82A}">
+                    <a16:rowId xmlns:a16="http://schemas.microsoft.com/office/drawing/2014/main" val="474446581"/>
+                  </a:ext>
+                </a:extLst>
+              </a:tr>
+              <a:tr h="544878">
+                <a:tc>
+                  <a:txBody>
+                    <a:bodyPr/>
+                    <a:lstStyle/>
+                    <a:p>
+                      <a:pPr rtl="0">
+                        <a:buNone/>
+                      </a:pPr>
+                      <a:r>
+                        <a:rPr lang="en-IN" sz="1800" b="1">
+                          <a:solidFill>
+                            <a:srgbClr val="1F1F1F"/>
+                          </a:solidFill>
+                          <a:effectLst/>
+                          <a:latin typeface="Google Sans Text"/>
+                        </a:rPr>
+                        <a:t>0x2003</a:t>
+                      </a:r>
+                      <a:endParaRPr lang="en-IN" sz="1800">
+                        <a:solidFill>
+                          <a:srgbClr val="1F1F1F"/>
+                        </a:solidFill>
+                        <a:effectLst/>
+                        <a:latin typeface="Google Sans Text"/>
+                      </a:endParaRPr>
+                    </a:p>
+                  </a:txBody>
+                  <a:tcPr marL="46868" marR="29293" marT="39057" marB="39057" anchor="ctr">
+                    <a:lnL w="4763" cap="flat" cmpd="sng" algn="ctr">
+                      <a:solidFill>
+                        <a:schemeClr val="bg1"/>
+                      </a:solidFill>
+                      <a:prstDash val="solid"/>
+                      <a:round/>
+                      <a:headEnd type="none" w="med" len="med"/>
+                      <a:tailEnd type="none" w="med" len="med"/>
+                    </a:lnL>
+                    <a:lnR w="4763" cap="flat" cmpd="sng" algn="ctr">
+                      <a:solidFill>
+                        <a:schemeClr val="bg1"/>
+                      </a:solidFill>
+                      <a:prstDash val="solid"/>
+                      <a:round/>
+                      <a:headEnd type="none" w="med" len="med"/>
+                      <a:tailEnd type="none" w="med" len="med"/>
+                    </a:lnR>
+                    <a:lnT w="4763" cap="flat" cmpd="sng" algn="ctr">
+                      <a:solidFill>
+                        <a:schemeClr val="bg1"/>
+                      </a:solidFill>
+                      <a:prstDash val="solid"/>
+                      <a:round/>
+                      <a:headEnd type="none" w="med" len="med"/>
+                      <a:tailEnd type="none" w="med" len="med"/>
+                    </a:lnT>
+                    <a:lnB w="4763" cap="flat" cmpd="sng" algn="ctr">
+                      <a:solidFill>
+                        <a:schemeClr val="bg1"/>
+                      </a:solidFill>
+                      <a:prstDash val="solid"/>
+                      <a:round/>
+                      <a:headEnd type="none" w="med" len="med"/>
+                      <a:tailEnd type="none" w="med" len="med"/>
+                    </a:lnB>
+                    <a:noFill/>
+                  </a:tcPr>
+                </a:tc>
+                <a:tc>
+                  <a:txBody>
+                    <a:bodyPr/>
+                    <a:lstStyle/>
+                    <a:p>
+                      <a:pPr algn="r" rtl="0">
+                        <a:buNone/>
+                      </a:pPr>
+                      <a:r>
+                        <a:rPr lang="en-IN" sz="1800" dirty="0">
+                          <a:solidFill>
+                            <a:srgbClr val="444746"/>
+                          </a:solidFill>
+                          <a:effectLst/>
+                          <a:latin typeface="Google Sans Text"/>
+                        </a:rPr>
+                        <a:t>0x09</a:t>
+                      </a:r>
+                      <a:endParaRPr lang="en-IN" sz="1800" dirty="0">
+                        <a:solidFill>
+                          <a:srgbClr val="1F1F1F"/>
+                        </a:solidFill>
+                        <a:effectLst/>
+                        <a:latin typeface="Google Sans Text"/>
+                      </a:endParaRPr>
+                    </a:p>
+                  </a:txBody>
+                  <a:tcPr marL="46868" marR="29293" marT="39057" marB="39057" anchor="ctr">
+                    <a:lnL w="4763" cap="flat" cmpd="sng" algn="ctr">
+                      <a:solidFill>
+                        <a:schemeClr val="bg1"/>
+                      </a:solidFill>
+                      <a:prstDash val="solid"/>
+                      <a:round/>
+                      <a:headEnd type="none" w="med" len="med"/>
+                      <a:tailEnd type="none" w="med" len="med"/>
+                    </a:lnL>
+                    <a:lnR w="4763" cap="flat" cmpd="sng" algn="ctr">
+                      <a:solidFill>
+                        <a:schemeClr val="bg1"/>
+                      </a:solidFill>
+                      <a:prstDash val="solid"/>
+                      <a:round/>
+                      <a:headEnd type="none" w="med" len="med"/>
+                      <a:tailEnd type="none" w="med" len="med"/>
+                    </a:lnR>
+                    <a:lnT w="4763" cap="flat" cmpd="sng" algn="ctr">
+                      <a:solidFill>
+                        <a:schemeClr val="bg1"/>
+                      </a:solidFill>
+                      <a:prstDash val="solid"/>
+                      <a:round/>
+                      <a:headEnd type="none" w="med" len="med"/>
+                      <a:tailEnd type="none" w="med" len="med"/>
+                    </a:lnT>
+                    <a:lnB w="4763" cap="flat" cmpd="sng" algn="ctr">
+                      <a:solidFill>
+                        <a:schemeClr val="bg1"/>
+                      </a:solidFill>
+                      <a:prstDash val="solid"/>
+                      <a:round/>
+                      <a:headEnd type="none" w="med" len="med"/>
+                      <a:tailEnd type="none" w="med" len="med"/>
+                    </a:lnB>
+                    <a:noFill/>
+                  </a:tcPr>
+                </a:tc>
+                <a:extLst>
+                  <a:ext uri="{0D108BD9-81ED-4DB2-BD59-A6C34878D82A}">
+                    <a16:rowId xmlns:a16="http://schemas.microsoft.com/office/drawing/2014/main" val="2913795105"/>
+                  </a:ext>
+                </a:extLst>
+              </a:tr>
+            </a:tbl>
+          </a:graphicData>
+        </a:graphic>
+      </p:graphicFrame>
+    </p:spTree>
+    <p:extLst>
+      <p:ext uri="{BB962C8B-B14F-4D97-AF65-F5344CB8AC3E}">
+        <p14:creationId xmlns:p14="http://schemas.microsoft.com/office/powerpoint/2010/main" val="3725342190"/>
+      </p:ext>
+    </p:extLst>
+  </p:cSld>
+  <p:clrMapOvr>
+    <a:masterClrMapping/>
+  </p:clrMapOvr>
+</p:sld>
+</file>
+
+<file path=ppt/slides/slide38.xml><?xml version="1.0" encoding="utf-8"?>
+<p:sld xmlns:a="http://schemas.openxmlformats.org/drawingml/2006/main" xmlns:r="http://schemas.openxmlformats.org/officeDocument/2006/relationships" xmlns:p="http://schemas.openxmlformats.org/presentationml/2006/main">
+  <p:cSld>
+    <p:spTree>
+      <p:nvGrpSpPr>
         <p:cNvPr id="1" name=""/>
         <p:cNvGrpSpPr/>
         <p:nvPr/>
@@ -21695,7 +24468,7 @@
           <a:p>
             <a:fld id="{B4B13859-67C5-4393-B6C2-556CF3F770C0}" type="datetime3">
               <a:rPr lang="en-US" smtClean="0"/>
-              <a:t>22 April 2026</a:t>
+              <a:t>24 April 2026</a:t>
             </a:fld>
             <a:endParaRPr lang="en-US"/>
           </a:p>
@@ -21724,7 +24497,7 @@
           <a:p>
             <a:fld id="{98AC3541-01C1-4CA5-B68F-FEE868C7D1AF}" type="slidenum">
               <a:rPr lang="en-US" smtClean="0"/>
-              <a:t>37</a:t>
+              <a:t>38</a:t>
             </a:fld>
             <a:endParaRPr lang="en-US"/>
           </a:p>
@@ -21743,7 +24516,7 @@
 </p:sld>
 </file>
 
-<file path=ppt/slides/slide38.xml><?xml version="1.0" encoding="utf-8"?>
+<file path=ppt/slides/slide39.xml><?xml version="1.0" encoding="utf-8"?>
 <p:sld xmlns:a="http://schemas.openxmlformats.org/drawingml/2006/main" xmlns:r="http://schemas.openxmlformats.org/officeDocument/2006/relationships" xmlns:p="http://schemas.openxmlformats.org/presentationml/2006/main">
   <p:cSld>
     <p:spTree>
@@ -21898,7 +24671,7 @@
           <a:p>
             <a:fld id="{B4B13859-67C5-4393-B6C2-556CF3F770C0}" type="datetime3">
               <a:rPr lang="en-US" smtClean="0"/>
-              <a:t>22 April 2026</a:t>
+              <a:t>24 April 2026</a:t>
             </a:fld>
             <a:endParaRPr lang="en-US"/>
           </a:p>
@@ -21927,7 +24700,7 @@
           <a:p>
             <a:fld id="{98AC3541-01C1-4CA5-B68F-FEE868C7D1AF}" type="slidenum">
               <a:rPr lang="en-US" smtClean="0"/>
-              <a:t>38</a:t>
+              <a:t>39</a:t>
             </a:fld>
             <a:endParaRPr lang="en-US"/>
           </a:p>
@@ -22431,7 +25204,514 @@
 </p:sld>
 </file>
 
-<file path=ppt/slides/slide39.xml><?xml version="1.0" encoding="utf-8"?>
+<file path=ppt/slides/slide4.xml><?xml version="1.0" encoding="utf-8"?>
+<p:sld xmlns:a="http://schemas.openxmlformats.org/drawingml/2006/main" xmlns:r="http://schemas.openxmlformats.org/officeDocument/2006/relationships" xmlns:p="http://schemas.openxmlformats.org/presentationml/2006/main">
+  <p:cSld>
+    <p:spTree>
+      <p:nvGrpSpPr>
+        <p:cNvPr id="1" name=""/>
+        <p:cNvGrpSpPr/>
+        <p:nvPr/>
+      </p:nvGrpSpPr>
+      <p:grpSpPr>
+        <a:xfrm>
+          <a:off x="0" y="0"/>
+          <a:ext cx="0" cy="0"/>
+          <a:chOff x="0" y="0"/>
+          <a:chExt cx="0" cy="0"/>
+        </a:xfrm>
+      </p:grpSpPr>
+      <p:sp>
+        <p:nvSpPr>
+          <p:cNvPr id="2" name="Title 1">
+            <a:extLst>
+              <a:ext uri="{FF2B5EF4-FFF2-40B4-BE49-F238E27FC236}">
+                <a16:creationId xmlns:a16="http://schemas.microsoft.com/office/drawing/2014/main" id="{DFA3CF93-EBA1-558C-5A72-9AFC3671D1E9}"/>
+              </a:ext>
+            </a:extLst>
+          </p:cNvPr>
+          <p:cNvSpPr>
+            <a:spLocks noGrp="1"/>
+          </p:cNvSpPr>
+          <p:nvPr>
+            <p:ph type="title"/>
+          </p:nvPr>
+        </p:nvSpPr>
+        <p:spPr/>
+        <p:txBody>
+          <a:bodyPr/>
+          <a:lstStyle/>
+          <a:p>
+            <a:r>
+              <a:rPr lang="en-US" dirty="0"/>
+              <a:t>What does the OS do?</a:t>
+            </a:r>
+          </a:p>
+        </p:txBody>
+      </p:sp>
+      <p:sp>
+        <p:nvSpPr>
+          <p:cNvPr id="3" name="Content Placeholder 2">
+            <a:extLst>
+              <a:ext uri="{FF2B5EF4-FFF2-40B4-BE49-F238E27FC236}">
+                <a16:creationId xmlns:a16="http://schemas.microsoft.com/office/drawing/2014/main" id="{698826CD-1BAE-BA00-5C19-1B6DC4FD5F04}"/>
+              </a:ext>
+            </a:extLst>
+          </p:cNvPr>
+          <p:cNvSpPr>
+            <a:spLocks noGrp="1"/>
+          </p:cNvSpPr>
+          <p:nvPr>
+            <p:ph idx="1"/>
+          </p:nvPr>
+        </p:nvSpPr>
+        <p:spPr/>
+        <p:txBody>
+          <a:bodyPr>
+            <a:normAutofit lnSpcReduction="10000"/>
+          </a:bodyPr>
+          <a:lstStyle/>
+          <a:p>
+            <a:r>
+              <a:rPr lang="en-US" dirty="0"/>
+              <a:t>One of the first things that runs when your computer starts (right after firmware/bootloader)</a:t>
+            </a:r>
+          </a:p>
+          <a:p>
+            <a:r>
+              <a:rPr lang="en-US" dirty="0"/>
+              <a:t>Loads, runs and manages programs:</a:t>
+            </a:r>
+          </a:p>
+          <a:p>
+            <a:pPr lvl="1"/>
+            <a:r>
+              <a:rPr lang="en-US" dirty="0"/>
+              <a:t>Multiple programs at the same time (time-sharing)</a:t>
+            </a:r>
+          </a:p>
+          <a:p>
+            <a:pPr lvl="1"/>
+            <a:r>
+              <a:rPr lang="en-US" dirty="0"/>
+              <a:t>Isolate programs from each other (isolation)</a:t>
+            </a:r>
+          </a:p>
+          <a:p>
+            <a:pPr lvl="1"/>
+            <a:r>
+              <a:rPr lang="en-US" dirty="0"/>
+              <a:t>Multiplex resources between applications (e.g., devices)</a:t>
+            </a:r>
+          </a:p>
+          <a:p>
+            <a:r>
+              <a:rPr lang="en-US" dirty="0"/>
+              <a:t>Services: File System, Network stack, etc.</a:t>
+            </a:r>
+          </a:p>
+          <a:p>
+            <a:r>
+              <a:rPr lang="en-US" dirty="0"/>
+              <a:t>Finds and controls all the devices in the machine in a general way (using “device drivers”)</a:t>
+            </a:r>
+          </a:p>
+        </p:txBody>
+      </p:sp>
+      <p:sp>
+        <p:nvSpPr>
+          <p:cNvPr id="4" name="Date Placeholder 3">
+            <a:extLst>
+              <a:ext uri="{FF2B5EF4-FFF2-40B4-BE49-F238E27FC236}">
+                <a16:creationId xmlns:a16="http://schemas.microsoft.com/office/drawing/2014/main" id="{34C0336F-B645-6D71-273E-401AA3CE8713}"/>
+              </a:ext>
+            </a:extLst>
+          </p:cNvPr>
+          <p:cNvSpPr>
+            <a:spLocks noGrp="1"/>
+          </p:cNvSpPr>
+          <p:nvPr>
+            <p:ph type="dt" sz="half" idx="10"/>
+          </p:nvPr>
+        </p:nvSpPr>
+        <p:spPr/>
+        <p:txBody>
+          <a:bodyPr/>
+          <a:lstStyle/>
+          <a:p>
+            <a:fld id="{B4B13859-67C5-4393-B6C2-556CF3F770C0}" type="datetime3">
+              <a:rPr lang="en-US" smtClean="0"/>
+              <a:t>24 April 2026</a:t>
+            </a:fld>
+            <a:endParaRPr lang="en-US"/>
+          </a:p>
+        </p:txBody>
+      </p:sp>
+      <p:sp>
+        <p:nvSpPr>
+          <p:cNvPr id="6" name="Slide Number Placeholder 5">
+            <a:extLst>
+              <a:ext uri="{FF2B5EF4-FFF2-40B4-BE49-F238E27FC236}">
+                <a16:creationId xmlns:a16="http://schemas.microsoft.com/office/drawing/2014/main" id="{83FF9866-CFD8-9EA9-25DA-FD07DB2BDFEF}"/>
+              </a:ext>
+            </a:extLst>
+          </p:cNvPr>
+          <p:cNvSpPr>
+            <a:spLocks noGrp="1"/>
+          </p:cNvSpPr>
+          <p:nvPr>
+            <p:ph type="sldNum" sz="quarter" idx="12"/>
+          </p:nvPr>
+        </p:nvSpPr>
+        <p:spPr/>
+        <p:txBody>
+          <a:bodyPr/>
+          <a:lstStyle/>
+          <a:p>
+            <a:fld id="{98AC3541-01C1-4CA5-B68F-FEE868C7D1AF}" type="slidenum">
+              <a:rPr lang="en-US" smtClean="0"/>
+              <a:t>4</a:t>
+            </a:fld>
+            <a:endParaRPr lang="en-US"/>
+          </a:p>
+        </p:txBody>
+      </p:sp>
+    </p:spTree>
+    <p:extLst>
+      <p:ext uri="{BB962C8B-B14F-4D97-AF65-F5344CB8AC3E}">
+        <p14:creationId xmlns:p14="http://schemas.microsoft.com/office/powerpoint/2010/main" val="517393758"/>
+      </p:ext>
+    </p:extLst>
+  </p:cSld>
+  <p:clrMapOvr>
+    <a:masterClrMapping/>
+  </p:clrMapOvr>
+  <p:timing>
+    <p:tnLst>
+      <p:par>
+        <p:cTn id="1" dur="indefinite" restart="never" nodeType="tmRoot">
+          <p:childTnLst>
+            <p:seq concurrent="1" nextAc="seek">
+              <p:cTn id="2" dur="indefinite" nodeType="mainSeq">
+                <p:childTnLst>
+                  <p:par>
+                    <p:cTn id="3" fill="hold">
+                      <p:stCondLst>
+                        <p:cond delay="indefinite"/>
+                      </p:stCondLst>
+                      <p:childTnLst>
+                        <p:par>
+                          <p:cTn id="4" fill="hold">
+                            <p:stCondLst>
+                              <p:cond delay="0"/>
+                            </p:stCondLst>
+                            <p:childTnLst>
+                              <p:par>
+                                <p:cTn id="5" presetID="1" presetClass="entr" presetSubtype="0" fill="hold" grpId="0" nodeType="clickEffect">
+                                  <p:stCondLst>
+                                    <p:cond delay="0"/>
+                                  </p:stCondLst>
+                                  <p:childTnLst>
+                                    <p:set>
+                                      <p:cBhvr>
+                                        <p:cTn id="6" dur="1" fill="hold">
+                                          <p:stCondLst>
+                                            <p:cond delay="0"/>
+                                          </p:stCondLst>
+                                        </p:cTn>
+                                        <p:tgtEl>
+                                          <p:spTgt spid="3">
+                                            <p:txEl>
+                                              <p:pRg st="0" end="0"/>
+                                            </p:txEl>
+                                          </p:spTgt>
+                                        </p:tgtEl>
+                                        <p:attrNameLst>
+                                          <p:attrName>style.visibility</p:attrName>
+                                        </p:attrNameLst>
+                                      </p:cBhvr>
+                                      <p:to>
+                                        <p:strVal val="visible"/>
+                                      </p:to>
+                                    </p:set>
+                                  </p:childTnLst>
+                                </p:cTn>
+                              </p:par>
+                            </p:childTnLst>
+                          </p:cTn>
+                        </p:par>
+                      </p:childTnLst>
+                    </p:cTn>
+                  </p:par>
+                  <p:par>
+                    <p:cTn id="7" fill="hold">
+                      <p:stCondLst>
+                        <p:cond delay="indefinite"/>
+                      </p:stCondLst>
+                      <p:childTnLst>
+                        <p:par>
+                          <p:cTn id="8" fill="hold">
+                            <p:stCondLst>
+                              <p:cond delay="0"/>
+                            </p:stCondLst>
+                            <p:childTnLst>
+                              <p:par>
+                                <p:cTn id="9" presetID="1" presetClass="entr" presetSubtype="0" fill="hold" grpId="0" nodeType="clickEffect">
+                                  <p:stCondLst>
+                                    <p:cond delay="0"/>
+                                  </p:stCondLst>
+                                  <p:childTnLst>
+                                    <p:set>
+                                      <p:cBhvr>
+                                        <p:cTn id="10" dur="1" fill="hold">
+                                          <p:stCondLst>
+                                            <p:cond delay="0"/>
+                                          </p:stCondLst>
+                                        </p:cTn>
+                                        <p:tgtEl>
+                                          <p:spTgt spid="3">
+                                            <p:txEl>
+                                              <p:pRg st="1" end="1"/>
+                                            </p:txEl>
+                                          </p:spTgt>
+                                        </p:tgtEl>
+                                        <p:attrNameLst>
+                                          <p:attrName>style.visibility</p:attrName>
+                                        </p:attrNameLst>
+                                      </p:cBhvr>
+                                      <p:to>
+                                        <p:strVal val="visible"/>
+                                      </p:to>
+                                    </p:set>
+                                  </p:childTnLst>
+                                </p:cTn>
+                              </p:par>
+                              <p:par>
+                                <p:cTn id="11" presetID="1" presetClass="entr" presetSubtype="0" fill="hold" grpId="0" nodeType="withEffect">
+                                  <p:stCondLst>
+                                    <p:cond delay="0"/>
+                                  </p:stCondLst>
+                                  <p:childTnLst>
+                                    <p:set>
+                                      <p:cBhvr>
+                                        <p:cTn id="12" dur="1" fill="hold">
+                                          <p:stCondLst>
+                                            <p:cond delay="0"/>
+                                          </p:stCondLst>
+                                        </p:cTn>
+                                        <p:tgtEl>
+                                          <p:spTgt spid="3">
+                                            <p:txEl>
+                                              <p:pRg st="2" end="2"/>
+                                            </p:txEl>
+                                          </p:spTgt>
+                                        </p:tgtEl>
+                                        <p:attrNameLst>
+                                          <p:attrName>style.visibility</p:attrName>
+                                        </p:attrNameLst>
+                                      </p:cBhvr>
+                                      <p:to>
+                                        <p:strVal val="visible"/>
+                                      </p:to>
+                                    </p:set>
+                                  </p:childTnLst>
+                                </p:cTn>
+                              </p:par>
+                              <p:par>
+                                <p:cTn id="13" presetID="1" presetClass="entr" presetSubtype="0" fill="hold" grpId="0" nodeType="withEffect">
+                                  <p:stCondLst>
+                                    <p:cond delay="0"/>
+                                  </p:stCondLst>
+                                  <p:childTnLst>
+                                    <p:set>
+                                      <p:cBhvr>
+                                        <p:cTn id="14" dur="1" fill="hold">
+                                          <p:stCondLst>
+                                            <p:cond delay="0"/>
+                                          </p:stCondLst>
+                                        </p:cTn>
+                                        <p:tgtEl>
+                                          <p:spTgt spid="3">
+                                            <p:txEl>
+                                              <p:pRg st="3" end="3"/>
+                                            </p:txEl>
+                                          </p:spTgt>
+                                        </p:tgtEl>
+                                        <p:attrNameLst>
+                                          <p:attrName>style.visibility</p:attrName>
+                                        </p:attrNameLst>
+                                      </p:cBhvr>
+                                      <p:to>
+                                        <p:strVal val="visible"/>
+                                      </p:to>
+                                    </p:set>
+                                  </p:childTnLst>
+                                </p:cTn>
+                              </p:par>
+                              <p:par>
+                                <p:cTn id="15" presetID="1" presetClass="entr" presetSubtype="0" fill="hold" grpId="0" nodeType="withEffect">
+                                  <p:stCondLst>
+                                    <p:cond delay="0"/>
+                                  </p:stCondLst>
+                                  <p:childTnLst>
+                                    <p:set>
+                                      <p:cBhvr>
+                                        <p:cTn id="16" dur="1" fill="hold">
+                                          <p:stCondLst>
+                                            <p:cond delay="0"/>
+                                          </p:stCondLst>
+                                        </p:cTn>
+                                        <p:tgtEl>
+                                          <p:spTgt spid="3">
+                                            <p:txEl>
+                                              <p:pRg st="4" end="4"/>
+                                            </p:txEl>
+                                          </p:spTgt>
+                                        </p:tgtEl>
+                                        <p:attrNameLst>
+                                          <p:attrName>style.visibility</p:attrName>
+                                        </p:attrNameLst>
+                                      </p:cBhvr>
+                                      <p:to>
+                                        <p:strVal val="visible"/>
+                                      </p:to>
+                                    </p:set>
+                                  </p:childTnLst>
+                                </p:cTn>
+                              </p:par>
+                            </p:childTnLst>
+                          </p:cTn>
+                        </p:par>
+                      </p:childTnLst>
+                    </p:cTn>
+                  </p:par>
+                  <p:par>
+                    <p:cTn id="17" fill="hold">
+                      <p:stCondLst>
+                        <p:cond delay="indefinite"/>
+                      </p:stCondLst>
+                      <p:childTnLst>
+                        <p:par>
+                          <p:cTn id="18" fill="hold">
+                            <p:stCondLst>
+                              <p:cond delay="0"/>
+                            </p:stCondLst>
+                            <p:childTnLst>
+                              <p:par>
+                                <p:cTn id="19" presetID="1" presetClass="entr" presetSubtype="0" fill="hold" grpId="0" nodeType="clickEffect">
+                                  <p:stCondLst>
+                                    <p:cond delay="0"/>
+                                  </p:stCondLst>
+                                  <p:childTnLst>
+                                    <p:set>
+                                      <p:cBhvr>
+                                        <p:cTn id="20" dur="1" fill="hold">
+                                          <p:stCondLst>
+                                            <p:cond delay="0"/>
+                                          </p:stCondLst>
+                                        </p:cTn>
+                                        <p:tgtEl>
+                                          <p:spTgt spid="3">
+                                            <p:txEl>
+                                              <p:pRg st="5" end="5"/>
+                                            </p:txEl>
+                                          </p:spTgt>
+                                        </p:tgtEl>
+                                        <p:attrNameLst>
+                                          <p:attrName>style.visibility</p:attrName>
+                                        </p:attrNameLst>
+                                      </p:cBhvr>
+                                      <p:to>
+                                        <p:strVal val="visible"/>
+                                      </p:to>
+                                    </p:set>
+                                  </p:childTnLst>
+                                </p:cTn>
+                              </p:par>
+                            </p:childTnLst>
+                          </p:cTn>
+                        </p:par>
+                      </p:childTnLst>
+                    </p:cTn>
+                  </p:par>
+                  <p:par>
+                    <p:cTn id="21" fill="hold">
+                      <p:stCondLst>
+                        <p:cond delay="indefinite"/>
+                      </p:stCondLst>
+                      <p:childTnLst>
+                        <p:par>
+                          <p:cTn id="22" fill="hold">
+                            <p:stCondLst>
+                              <p:cond delay="0"/>
+                            </p:stCondLst>
+                            <p:childTnLst>
+                              <p:par>
+                                <p:cTn id="23" presetID="1" presetClass="entr" presetSubtype="0" fill="hold" grpId="0" nodeType="clickEffect">
+                                  <p:stCondLst>
+                                    <p:cond delay="0"/>
+                                  </p:stCondLst>
+                                  <p:childTnLst>
+                                    <p:set>
+                                      <p:cBhvr>
+                                        <p:cTn id="24" dur="1" fill="hold">
+                                          <p:stCondLst>
+                                            <p:cond delay="0"/>
+                                          </p:stCondLst>
+                                        </p:cTn>
+                                        <p:tgtEl>
+                                          <p:spTgt spid="3">
+                                            <p:txEl>
+                                              <p:pRg st="6" end="6"/>
+                                            </p:txEl>
+                                          </p:spTgt>
+                                        </p:tgtEl>
+                                        <p:attrNameLst>
+                                          <p:attrName>style.visibility</p:attrName>
+                                        </p:attrNameLst>
+                                      </p:cBhvr>
+                                      <p:to>
+                                        <p:strVal val="visible"/>
+                                      </p:to>
+                                    </p:set>
+                                  </p:childTnLst>
+                                </p:cTn>
+                              </p:par>
+                            </p:childTnLst>
+                          </p:cTn>
+                        </p:par>
+                      </p:childTnLst>
+                    </p:cTn>
+                  </p:par>
+                </p:childTnLst>
+              </p:cTn>
+              <p:prevCondLst>
+                <p:cond evt="onPrev" delay="0">
+                  <p:tgtEl>
+                    <p:sldTgt/>
+                  </p:tgtEl>
+                </p:cond>
+              </p:prevCondLst>
+              <p:nextCondLst>
+                <p:cond evt="onNext" delay="0">
+                  <p:tgtEl>
+                    <p:sldTgt/>
+                  </p:tgtEl>
+                </p:cond>
+              </p:nextCondLst>
+            </p:seq>
+          </p:childTnLst>
+        </p:cTn>
+      </p:par>
+    </p:tnLst>
+    <p:bldLst>
+      <p:bldP spid="3" grpId="0" build="p"/>
+    </p:bldLst>
+  </p:timing>
+</p:sld>
+</file>
+
+<file path=ppt/slides/slide40.xml><?xml version="1.0" encoding="utf-8"?>
 <p:sld xmlns:a="http://schemas.openxmlformats.org/drawingml/2006/main" xmlns:r="http://schemas.openxmlformats.org/officeDocument/2006/relationships" xmlns:p="http://schemas.openxmlformats.org/presentationml/2006/main">
   <p:cSld>
     <p:spTree>
@@ -22533,7 +25813,7 @@
           <a:p>
             <a:fld id="{B4B13859-67C5-4393-B6C2-556CF3F770C0}" type="datetime3">
               <a:rPr lang="en-US" smtClean="0"/>
-              <a:t>22 April 2026</a:t>
+              <a:t>24 April 2026</a:t>
             </a:fld>
             <a:endParaRPr lang="en-US"/>
           </a:p>
@@ -22562,7 +25842,7 @@
           <a:p>
             <a:fld id="{98AC3541-01C1-4CA5-B68F-FEE868C7D1AF}" type="slidenum">
               <a:rPr lang="en-US" smtClean="0"/>
-              <a:t>39</a:t>
+              <a:t>40</a:t>
             </a:fld>
             <a:endParaRPr lang="en-US"/>
           </a:p>
@@ -23485,514 +26765,7 @@
 </p:sld>
 </file>
 
-<file path=ppt/slides/slide4.xml><?xml version="1.0" encoding="utf-8"?>
-<p:sld xmlns:a="http://schemas.openxmlformats.org/drawingml/2006/main" xmlns:r="http://schemas.openxmlformats.org/officeDocument/2006/relationships" xmlns:p="http://schemas.openxmlformats.org/presentationml/2006/main">
-  <p:cSld>
-    <p:spTree>
-      <p:nvGrpSpPr>
-        <p:cNvPr id="1" name=""/>
-        <p:cNvGrpSpPr/>
-        <p:nvPr/>
-      </p:nvGrpSpPr>
-      <p:grpSpPr>
-        <a:xfrm>
-          <a:off x="0" y="0"/>
-          <a:ext cx="0" cy="0"/>
-          <a:chOff x="0" y="0"/>
-          <a:chExt cx="0" cy="0"/>
-        </a:xfrm>
-      </p:grpSpPr>
-      <p:sp>
-        <p:nvSpPr>
-          <p:cNvPr id="2" name="Title 1">
-            <a:extLst>
-              <a:ext uri="{FF2B5EF4-FFF2-40B4-BE49-F238E27FC236}">
-                <a16:creationId xmlns:a16="http://schemas.microsoft.com/office/drawing/2014/main" id="{DFA3CF93-EBA1-558C-5A72-9AFC3671D1E9}"/>
-              </a:ext>
-            </a:extLst>
-          </p:cNvPr>
-          <p:cNvSpPr>
-            <a:spLocks noGrp="1"/>
-          </p:cNvSpPr>
-          <p:nvPr>
-            <p:ph type="title"/>
-          </p:nvPr>
-        </p:nvSpPr>
-        <p:spPr/>
-        <p:txBody>
-          <a:bodyPr/>
-          <a:lstStyle/>
-          <a:p>
-            <a:r>
-              <a:rPr lang="en-US" dirty="0"/>
-              <a:t>What does the OS do?</a:t>
-            </a:r>
-          </a:p>
-        </p:txBody>
-      </p:sp>
-      <p:sp>
-        <p:nvSpPr>
-          <p:cNvPr id="3" name="Content Placeholder 2">
-            <a:extLst>
-              <a:ext uri="{FF2B5EF4-FFF2-40B4-BE49-F238E27FC236}">
-                <a16:creationId xmlns:a16="http://schemas.microsoft.com/office/drawing/2014/main" id="{698826CD-1BAE-BA00-5C19-1B6DC4FD5F04}"/>
-              </a:ext>
-            </a:extLst>
-          </p:cNvPr>
-          <p:cNvSpPr>
-            <a:spLocks noGrp="1"/>
-          </p:cNvSpPr>
-          <p:nvPr>
-            <p:ph idx="1"/>
-          </p:nvPr>
-        </p:nvSpPr>
-        <p:spPr/>
-        <p:txBody>
-          <a:bodyPr>
-            <a:normAutofit lnSpcReduction="10000"/>
-          </a:bodyPr>
-          <a:lstStyle/>
-          <a:p>
-            <a:r>
-              <a:rPr lang="en-US" dirty="0"/>
-              <a:t>One of the first things that runs when your computer starts (right after firmware/bootloader)</a:t>
-            </a:r>
-          </a:p>
-          <a:p>
-            <a:r>
-              <a:rPr lang="en-US" dirty="0"/>
-              <a:t>Loads, runs and manages programs:</a:t>
-            </a:r>
-          </a:p>
-          <a:p>
-            <a:pPr lvl="1"/>
-            <a:r>
-              <a:rPr lang="en-US" dirty="0"/>
-              <a:t>Multiple programs at the same time (time-sharing)</a:t>
-            </a:r>
-          </a:p>
-          <a:p>
-            <a:pPr lvl="1"/>
-            <a:r>
-              <a:rPr lang="en-US" dirty="0"/>
-              <a:t>Isolate programs from each other (isolation)</a:t>
-            </a:r>
-          </a:p>
-          <a:p>
-            <a:pPr lvl="1"/>
-            <a:r>
-              <a:rPr lang="en-US" dirty="0"/>
-              <a:t>Multiplex resources between applications (e.g., devices)</a:t>
-            </a:r>
-          </a:p>
-          <a:p>
-            <a:r>
-              <a:rPr lang="en-US" dirty="0"/>
-              <a:t>Services: File System, Network stack, etc.</a:t>
-            </a:r>
-          </a:p>
-          <a:p>
-            <a:r>
-              <a:rPr lang="en-US" dirty="0"/>
-              <a:t>Finds and controls all the devices in the machine in a general way (using “device drivers”)</a:t>
-            </a:r>
-          </a:p>
-        </p:txBody>
-      </p:sp>
-      <p:sp>
-        <p:nvSpPr>
-          <p:cNvPr id="4" name="Date Placeholder 3">
-            <a:extLst>
-              <a:ext uri="{FF2B5EF4-FFF2-40B4-BE49-F238E27FC236}">
-                <a16:creationId xmlns:a16="http://schemas.microsoft.com/office/drawing/2014/main" id="{34C0336F-B645-6D71-273E-401AA3CE8713}"/>
-              </a:ext>
-            </a:extLst>
-          </p:cNvPr>
-          <p:cNvSpPr>
-            <a:spLocks noGrp="1"/>
-          </p:cNvSpPr>
-          <p:nvPr>
-            <p:ph type="dt" sz="half" idx="10"/>
-          </p:nvPr>
-        </p:nvSpPr>
-        <p:spPr/>
-        <p:txBody>
-          <a:bodyPr/>
-          <a:lstStyle/>
-          <a:p>
-            <a:fld id="{B4B13859-67C5-4393-B6C2-556CF3F770C0}" type="datetime3">
-              <a:rPr lang="en-US" smtClean="0"/>
-              <a:t>22 April 2026</a:t>
-            </a:fld>
-            <a:endParaRPr lang="en-US"/>
-          </a:p>
-        </p:txBody>
-      </p:sp>
-      <p:sp>
-        <p:nvSpPr>
-          <p:cNvPr id="6" name="Slide Number Placeholder 5">
-            <a:extLst>
-              <a:ext uri="{FF2B5EF4-FFF2-40B4-BE49-F238E27FC236}">
-                <a16:creationId xmlns:a16="http://schemas.microsoft.com/office/drawing/2014/main" id="{83FF9866-CFD8-9EA9-25DA-FD07DB2BDFEF}"/>
-              </a:ext>
-            </a:extLst>
-          </p:cNvPr>
-          <p:cNvSpPr>
-            <a:spLocks noGrp="1"/>
-          </p:cNvSpPr>
-          <p:nvPr>
-            <p:ph type="sldNum" sz="quarter" idx="12"/>
-          </p:nvPr>
-        </p:nvSpPr>
-        <p:spPr/>
-        <p:txBody>
-          <a:bodyPr/>
-          <a:lstStyle/>
-          <a:p>
-            <a:fld id="{98AC3541-01C1-4CA5-B68F-FEE868C7D1AF}" type="slidenum">
-              <a:rPr lang="en-US" smtClean="0"/>
-              <a:t>4</a:t>
-            </a:fld>
-            <a:endParaRPr lang="en-US"/>
-          </a:p>
-        </p:txBody>
-      </p:sp>
-    </p:spTree>
-    <p:extLst>
-      <p:ext uri="{BB962C8B-B14F-4D97-AF65-F5344CB8AC3E}">
-        <p14:creationId xmlns:p14="http://schemas.microsoft.com/office/powerpoint/2010/main" val="517393758"/>
-      </p:ext>
-    </p:extLst>
-  </p:cSld>
-  <p:clrMapOvr>
-    <a:masterClrMapping/>
-  </p:clrMapOvr>
-  <p:timing>
-    <p:tnLst>
-      <p:par>
-        <p:cTn id="1" dur="indefinite" restart="never" nodeType="tmRoot">
-          <p:childTnLst>
-            <p:seq concurrent="1" nextAc="seek">
-              <p:cTn id="2" dur="indefinite" nodeType="mainSeq">
-                <p:childTnLst>
-                  <p:par>
-                    <p:cTn id="3" fill="hold">
-                      <p:stCondLst>
-                        <p:cond delay="indefinite"/>
-                      </p:stCondLst>
-                      <p:childTnLst>
-                        <p:par>
-                          <p:cTn id="4" fill="hold">
-                            <p:stCondLst>
-                              <p:cond delay="0"/>
-                            </p:stCondLst>
-                            <p:childTnLst>
-                              <p:par>
-                                <p:cTn id="5" presetID="1" presetClass="entr" presetSubtype="0" fill="hold" grpId="0" nodeType="clickEffect">
-                                  <p:stCondLst>
-                                    <p:cond delay="0"/>
-                                  </p:stCondLst>
-                                  <p:childTnLst>
-                                    <p:set>
-                                      <p:cBhvr>
-                                        <p:cTn id="6" dur="1" fill="hold">
-                                          <p:stCondLst>
-                                            <p:cond delay="0"/>
-                                          </p:stCondLst>
-                                        </p:cTn>
-                                        <p:tgtEl>
-                                          <p:spTgt spid="3">
-                                            <p:txEl>
-                                              <p:pRg st="0" end="0"/>
-                                            </p:txEl>
-                                          </p:spTgt>
-                                        </p:tgtEl>
-                                        <p:attrNameLst>
-                                          <p:attrName>style.visibility</p:attrName>
-                                        </p:attrNameLst>
-                                      </p:cBhvr>
-                                      <p:to>
-                                        <p:strVal val="visible"/>
-                                      </p:to>
-                                    </p:set>
-                                  </p:childTnLst>
-                                </p:cTn>
-                              </p:par>
-                            </p:childTnLst>
-                          </p:cTn>
-                        </p:par>
-                      </p:childTnLst>
-                    </p:cTn>
-                  </p:par>
-                  <p:par>
-                    <p:cTn id="7" fill="hold">
-                      <p:stCondLst>
-                        <p:cond delay="indefinite"/>
-                      </p:stCondLst>
-                      <p:childTnLst>
-                        <p:par>
-                          <p:cTn id="8" fill="hold">
-                            <p:stCondLst>
-                              <p:cond delay="0"/>
-                            </p:stCondLst>
-                            <p:childTnLst>
-                              <p:par>
-                                <p:cTn id="9" presetID="1" presetClass="entr" presetSubtype="0" fill="hold" grpId="0" nodeType="clickEffect">
-                                  <p:stCondLst>
-                                    <p:cond delay="0"/>
-                                  </p:stCondLst>
-                                  <p:childTnLst>
-                                    <p:set>
-                                      <p:cBhvr>
-                                        <p:cTn id="10" dur="1" fill="hold">
-                                          <p:stCondLst>
-                                            <p:cond delay="0"/>
-                                          </p:stCondLst>
-                                        </p:cTn>
-                                        <p:tgtEl>
-                                          <p:spTgt spid="3">
-                                            <p:txEl>
-                                              <p:pRg st="1" end="1"/>
-                                            </p:txEl>
-                                          </p:spTgt>
-                                        </p:tgtEl>
-                                        <p:attrNameLst>
-                                          <p:attrName>style.visibility</p:attrName>
-                                        </p:attrNameLst>
-                                      </p:cBhvr>
-                                      <p:to>
-                                        <p:strVal val="visible"/>
-                                      </p:to>
-                                    </p:set>
-                                  </p:childTnLst>
-                                </p:cTn>
-                              </p:par>
-                              <p:par>
-                                <p:cTn id="11" presetID="1" presetClass="entr" presetSubtype="0" fill="hold" grpId="0" nodeType="withEffect">
-                                  <p:stCondLst>
-                                    <p:cond delay="0"/>
-                                  </p:stCondLst>
-                                  <p:childTnLst>
-                                    <p:set>
-                                      <p:cBhvr>
-                                        <p:cTn id="12" dur="1" fill="hold">
-                                          <p:stCondLst>
-                                            <p:cond delay="0"/>
-                                          </p:stCondLst>
-                                        </p:cTn>
-                                        <p:tgtEl>
-                                          <p:spTgt spid="3">
-                                            <p:txEl>
-                                              <p:pRg st="2" end="2"/>
-                                            </p:txEl>
-                                          </p:spTgt>
-                                        </p:tgtEl>
-                                        <p:attrNameLst>
-                                          <p:attrName>style.visibility</p:attrName>
-                                        </p:attrNameLst>
-                                      </p:cBhvr>
-                                      <p:to>
-                                        <p:strVal val="visible"/>
-                                      </p:to>
-                                    </p:set>
-                                  </p:childTnLst>
-                                </p:cTn>
-                              </p:par>
-                              <p:par>
-                                <p:cTn id="13" presetID="1" presetClass="entr" presetSubtype="0" fill="hold" grpId="0" nodeType="withEffect">
-                                  <p:stCondLst>
-                                    <p:cond delay="0"/>
-                                  </p:stCondLst>
-                                  <p:childTnLst>
-                                    <p:set>
-                                      <p:cBhvr>
-                                        <p:cTn id="14" dur="1" fill="hold">
-                                          <p:stCondLst>
-                                            <p:cond delay="0"/>
-                                          </p:stCondLst>
-                                        </p:cTn>
-                                        <p:tgtEl>
-                                          <p:spTgt spid="3">
-                                            <p:txEl>
-                                              <p:pRg st="3" end="3"/>
-                                            </p:txEl>
-                                          </p:spTgt>
-                                        </p:tgtEl>
-                                        <p:attrNameLst>
-                                          <p:attrName>style.visibility</p:attrName>
-                                        </p:attrNameLst>
-                                      </p:cBhvr>
-                                      <p:to>
-                                        <p:strVal val="visible"/>
-                                      </p:to>
-                                    </p:set>
-                                  </p:childTnLst>
-                                </p:cTn>
-                              </p:par>
-                              <p:par>
-                                <p:cTn id="15" presetID="1" presetClass="entr" presetSubtype="0" fill="hold" grpId="0" nodeType="withEffect">
-                                  <p:stCondLst>
-                                    <p:cond delay="0"/>
-                                  </p:stCondLst>
-                                  <p:childTnLst>
-                                    <p:set>
-                                      <p:cBhvr>
-                                        <p:cTn id="16" dur="1" fill="hold">
-                                          <p:stCondLst>
-                                            <p:cond delay="0"/>
-                                          </p:stCondLst>
-                                        </p:cTn>
-                                        <p:tgtEl>
-                                          <p:spTgt spid="3">
-                                            <p:txEl>
-                                              <p:pRg st="4" end="4"/>
-                                            </p:txEl>
-                                          </p:spTgt>
-                                        </p:tgtEl>
-                                        <p:attrNameLst>
-                                          <p:attrName>style.visibility</p:attrName>
-                                        </p:attrNameLst>
-                                      </p:cBhvr>
-                                      <p:to>
-                                        <p:strVal val="visible"/>
-                                      </p:to>
-                                    </p:set>
-                                  </p:childTnLst>
-                                </p:cTn>
-                              </p:par>
-                            </p:childTnLst>
-                          </p:cTn>
-                        </p:par>
-                      </p:childTnLst>
-                    </p:cTn>
-                  </p:par>
-                  <p:par>
-                    <p:cTn id="17" fill="hold">
-                      <p:stCondLst>
-                        <p:cond delay="indefinite"/>
-                      </p:stCondLst>
-                      <p:childTnLst>
-                        <p:par>
-                          <p:cTn id="18" fill="hold">
-                            <p:stCondLst>
-                              <p:cond delay="0"/>
-                            </p:stCondLst>
-                            <p:childTnLst>
-                              <p:par>
-                                <p:cTn id="19" presetID="1" presetClass="entr" presetSubtype="0" fill="hold" grpId="0" nodeType="clickEffect">
-                                  <p:stCondLst>
-                                    <p:cond delay="0"/>
-                                  </p:stCondLst>
-                                  <p:childTnLst>
-                                    <p:set>
-                                      <p:cBhvr>
-                                        <p:cTn id="20" dur="1" fill="hold">
-                                          <p:stCondLst>
-                                            <p:cond delay="0"/>
-                                          </p:stCondLst>
-                                        </p:cTn>
-                                        <p:tgtEl>
-                                          <p:spTgt spid="3">
-                                            <p:txEl>
-                                              <p:pRg st="5" end="5"/>
-                                            </p:txEl>
-                                          </p:spTgt>
-                                        </p:tgtEl>
-                                        <p:attrNameLst>
-                                          <p:attrName>style.visibility</p:attrName>
-                                        </p:attrNameLst>
-                                      </p:cBhvr>
-                                      <p:to>
-                                        <p:strVal val="visible"/>
-                                      </p:to>
-                                    </p:set>
-                                  </p:childTnLst>
-                                </p:cTn>
-                              </p:par>
-                            </p:childTnLst>
-                          </p:cTn>
-                        </p:par>
-                      </p:childTnLst>
-                    </p:cTn>
-                  </p:par>
-                  <p:par>
-                    <p:cTn id="21" fill="hold">
-                      <p:stCondLst>
-                        <p:cond delay="indefinite"/>
-                      </p:stCondLst>
-                      <p:childTnLst>
-                        <p:par>
-                          <p:cTn id="22" fill="hold">
-                            <p:stCondLst>
-                              <p:cond delay="0"/>
-                            </p:stCondLst>
-                            <p:childTnLst>
-                              <p:par>
-                                <p:cTn id="23" presetID="1" presetClass="entr" presetSubtype="0" fill="hold" grpId="0" nodeType="clickEffect">
-                                  <p:stCondLst>
-                                    <p:cond delay="0"/>
-                                  </p:stCondLst>
-                                  <p:childTnLst>
-                                    <p:set>
-                                      <p:cBhvr>
-                                        <p:cTn id="24" dur="1" fill="hold">
-                                          <p:stCondLst>
-                                            <p:cond delay="0"/>
-                                          </p:stCondLst>
-                                        </p:cTn>
-                                        <p:tgtEl>
-                                          <p:spTgt spid="3">
-                                            <p:txEl>
-                                              <p:pRg st="6" end="6"/>
-                                            </p:txEl>
-                                          </p:spTgt>
-                                        </p:tgtEl>
-                                        <p:attrNameLst>
-                                          <p:attrName>style.visibility</p:attrName>
-                                        </p:attrNameLst>
-                                      </p:cBhvr>
-                                      <p:to>
-                                        <p:strVal val="visible"/>
-                                      </p:to>
-                                    </p:set>
-                                  </p:childTnLst>
-                                </p:cTn>
-                              </p:par>
-                            </p:childTnLst>
-                          </p:cTn>
-                        </p:par>
-                      </p:childTnLst>
-                    </p:cTn>
-                  </p:par>
-                </p:childTnLst>
-              </p:cTn>
-              <p:prevCondLst>
-                <p:cond evt="onPrev" delay="0">
-                  <p:tgtEl>
-                    <p:sldTgt/>
-                  </p:tgtEl>
-                </p:cond>
-              </p:prevCondLst>
-              <p:nextCondLst>
-                <p:cond evt="onNext" delay="0">
-                  <p:tgtEl>
-                    <p:sldTgt/>
-                  </p:tgtEl>
-                </p:cond>
-              </p:nextCondLst>
-            </p:seq>
-          </p:childTnLst>
-        </p:cTn>
-      </p:par>
-    </p:tnLst>
-    <p:bldLst>
-      <p:bldP spid="3" grpId="0" build="p"/>
-    </p:bldLst>
-  </p:timing>
-</p:sld>
-</file>
-
-<file path=ppt/slides/slide40.xml><?xml version="1.0" encoding="utf-8"?>
+<file path=ppt/slides/slide41.xml><?xml version="1.0" encoding="utf-8"?>
 <p:sld xmlns:a="http://schemas.openxmlformats.org/drawingml/2006/main" xmlns:r="http://schemas.openxmlformats.org/officeDocument/2006/relationships" xmlns:p="http://schemas.openxmlformats.org/presentationml/2006/main">
   <p:cSld>
     <p:spTree>
@@ -24180,7 +26953,7 @@
           <a:p>
             <a:fld id="{B4B13859-67C5-4393-B6C2-556CF3F770C0}" type="datetime3">
               <a:rPr lang="en-US" smtClean="0"/>
-              <a:t>22 April 2026</a:t>
+              <a:t>24 April 2026</a:t>
             </a:fld>
             <a:endParaRPr lang="en-US"/>
           </a:p>
@@ -24209,7 +26982,7 @@
           <a:p>
             <a:fld id="{98AC3541-01C1-4CA5-B68F-FEE868C7D1AF}" type="slidenum">
               <a:rPr lang="en-US" smtClean="0"/>
-              <a:t>40</a:t>
+              <a:t>41</a:t>
             </a:fld>
             <a:endParaRPr lang="en-US"/>
           </a:p>
@@ -24258,7 +27031,7 @@
 </p:sld>
 </file>
 
-<file path=ppt/slides/slide41.xml><?xml version="1.0" encoding="utf-8"?>
+<file path=ppt/slides/slide42.xml><?xml version="1.0" encoding="utf-8"?>
 <p:sld xmlns:a="http://schemas.openxmlformats.org/drawingml/2006/main" xmlns:r="http://schemas.openxmlformats.org/officeDocument/2006/relationships" xmlns:p="http://schemas.openxmlformats.org/presentationml/2006/main">
   <p:cSld>
     <p:spTree>
@@ -24403,7 +27176,7 @@
           <a:p>
             <a:fld id="{B4B13859-67C5-4393-B6C2-556CF3F770C0}" type="datetime3">
               <a:rPr lang="en-US" smtClean="0"/>
-              <a:t>22 April 2026</a:t>
+              <a:t>24 April 2026</a:t>
             </a:fld>
             <a:endParaRPr lang="en-US"/>
           </a:p>
@@ -24432,7 +27205,7 @@
           <a:p>
             <a:fld id="{98AC3541-01C1-4CA5-B68F-FEE868C7D1AF}" type="slidenum">
               <a:rPr lang="en-US" smtClean="0"/>
-              <a:t>41</a:t>
+              <a:t>42</a:t>
             </a:fld>
             <a:endParaRPr lang="en-US"/>
           </a:p>
@@ -24873,7 +27646,7 @@
 </p:sld>
 </file>
 
-<file path=ppt/slides/slide42.xml><?xml version="1.0" encoding="utf-8"?>
+<file path=ppt/slides/slide43.xml><?xml version="1.0" encoding="utf-8"?>
 <p:sld xmlns:a="http://schemas.openxmlformats.org/drawingml/2006/main" xmlns:r="http://schemas.openxmlformats.org/officeDocument/2006/relationships" xmlns:p="http://schemas.openxmlformats.org/presentationml/2006/main">
   <p:cSld>
     <p:spTree>
@@ -25013,7 +27786,7 @@
           <a:p>
             <a:fld id="{B4B13859-67C5-4393-B6C2-556CF3F770C0}" type="datetime3">
               <a:rPr lang="en-US" smtClean="0"/>
-              <a:t>22 April 2026</a:t>
+              <a:t>24 April 2026</a:t>
             </a:fld>
             <a:endParaRPr lang="en-US"/>
           </a:p>
@@ -25042,7 +27815,7 @@
           <a:p>
             <a:fld id="{98AC3541-01C1-4CA5-B68F-FEE868C7D1AF}" type="slidenum">
               <a:rPr lang="en-US" smtClean="0"/>
-              <a:t>42</a:t>
+              <a:t>43</a:t>
             </a:fld>
             <a:endParaRPr lang="en-US"/>
           </a:p>
@@ -25437,7 +28210,7 @@
 </p:sld>
 </file>
 
-<file path=ppt/slides/slide43.xml><?xml version="1.0" encoding="utf-8"?>
+<file path=ppt/slides/slide44.xml><?xml version="1.0" encoding="utf-8"?>
 <p:sld xmlns:a="http://schemas.openxmlformats.org/drawingml/2006/main" xmlns:r="http://schemas.openxmlformats.org/officeDocument/2006/relationships" xmlns:p="http://schemas.openxmlformats.org/presentationml/2006/main">
   <p:cSld>
     <p:spTree>
@@ -25562,7 +28335,7 @@
           <a:p>
             <a:fld id="{B4B13859-67C5-4393-B6C2-556CF3F770C0}" type="datetime3">
               <a:rPr lang="en-US" smtClean="0"/>
-              <a:t>22 April 2026</a:t>
+              <a:t>24 April 2026</a:t>
             </a:fld>
             <a:endParaRPr lang="en-US"/>
           </a:p>
@@ -25591,7 +28364,7 @@
           <a:p>
             <a:fld id="{98AC3541-01C1-4CA5-B68F-FEE868C7D1AF}" type="slidenum">
               <a:rPr lang="en-US" smtClean="0"/>
-              <a:t>43</a:t>
+              <a:t>44</a:t>
             </a:fld>
             <a:endParaRPr lang="en-US"/>
           </a:p>
@@ -26131,7 +28904,7 @@
 </p:sld>
 </file>
 
-<file path=ppt/slides/slide44.xml><?xml version="1.0" encoding="utf-8"?>
+<file path=ppt/slides/slide45.xml><?xml version="1.0" encoding="utf-8"?>
 <p:sld xmlns:a="http://schemas.openxmlformats.org/drawingml/2006/main" xmlns:r="http://schemas.openxmlformats.org/officeDocument/2006/relationships" xmlns:p="http://schemas.openxmlformats.org/presentationml/2006/main">
   <p:cSld>
     <p:spTree>
@@ -26315,7 +29088,7 @@
           <a:p>
             <a:fld id="{07E0464C-7207-4298-A27C-0CEAF85D3DD1}" type="datetime3">
               <a:rPr lang="en-US" smtClean="0"/>
-              <a:t>22 April 2026</a:t>
+              <a:t>24 April 2026</a:t>
             </a:fld>
             <a:endParaRPr lang="en-US"/>
           </a:p>
@@ -26344,7 +29117,7 @@
           <a:p>
             <a:fld id="{98AC3541-01C1-4CA5-B68F-FEE868C7D1AF}" type="slidenum">
               <a:rPr lang="en-US" smtClean="0"/>
-              <a:t>44</a:t>
+              <a:t>45</a:t>
             </a:fld>
             <a:endParaRPr lang="en-US"/>
           </a:p>
@@ -27580,7 +30353,7 @@
 </p:sld>
 </file>
 
-<file path=ppt/slides/slide45.xml><?xml version="1.0" encoding="utf-8"?>
+<file path=ppt/slides/slide46.xml><?xml version="1.0" encoding="utf-8"?>
 <p:sld xmlns:a="http://schemas.openxmlformats.org/drawingml/2006/main" xmlns:r="http://schemas.openxmlformats.org/officeDocument/2006/relationships" xmlns:p="http://schemas.openxmlformats.org/presentationml/2006/main">
   <p:cSld>
     <p:spTree>
@@ -27780,7 +30553,7 @@
           <a:p>
             <a:fld id="{B4B13859-67C5-4393-B6C2-556CF3F770C0}" type="datetime3">
               <a:rPr lang="en-US" smtClean="0"/>
-              <a:t>22 April 2026</a:t>
+              <a:t>24 April 2026</a:t>
             </a:fld>
             <a:endParaRPr lang="en-US"/>
           </a:p>
@@ -27809,7 +30582,7 @@
           <a:p>
             <a:fld id="{98AC3541-01C1-4CA5-B68F-FEE868C7D1AF}" type="slidenum">
               <a:rPr lang="en-US" smtClean="0"/>
-              <a:t>45</a:t>
+              <a:t>46</a:t>
             </a:fld>
             <a:endParaRPr lang="en-US"/>
           </a:p>
@@ -27828,7 +30601,7 @@
 </p:sld>
 </file>
 
-<file path=ppt/slides/slide46.xml><?xml version="1.0" encoding="utf-8"?>
+<file path=ppt/slides/slide47.xml><?xml version="1.0" encoding="utf-8"?>
 <p:sld xmlns:a="http://schemas.openxmlformats.org/drawingml/2006/main" xmlns:r="http://schemas.openxmlformats.org/officeDocument/2006/relationships" xmlns:p="http://schemas.openxmlformats.org/presentationml/2006/main">
   <p:cSld>
     <p:spTree>
@@ -27925,7 +30698,7 @@
           <a:p>
             <a:fld id="{B4B13859-67C5-4393-B6C2-556CF3F770C0}" type="datetime3">
               <a:rPr lang="en-US" smtClean="0"/>
-              <a:t>22 April 2026</a:t>
+              <a:t>24 April 2026</a:t>
             </a:fld>
             <a:endParaRPr lang="en-US"/>
           </a:p>
@@ -27954,7 +30727,7 @@
           <a:p>
             <a:fld id="{98AC3541-01C1-4CA5-B68F-FEE868C7D1AF}" type="slidenum">
               <a:rPr lang="en-US" smtClean="0"/>
-              <a:t>46</a:t>
+              <a:t>47</a:t>
             </a:fld>
             <a:endParaRPr lang="en-US"/>
           </a:p>
@@ -28118,7 +30891,7 @@
           <a:p>
             <a:fld id="{B4B13859-67C5-4393-B6C2-556CF3F770C0}" type="datetime3">
               <a:rPr lang="en-US" smtClean="0"/>
-              <a:t>22 April 2026</a:t>
+              <a:t>24 April 2026</a:t>
             </a:fld>
             <a:endParaRPr lang="en-US"/>
           </a:p>
@@ -28644,7 +31417,7 @@
           <a:p>
             <a:fld id="{B4B13859-67C5-4393-B6C2-556CF3F770C0}" type="datetime3">
               <a:rPr lang="en-US" smtClean="0"/>
-              <a:t>22 April 2026</a:t>
+              <a:t>24 April 2026</a:t>
             </a:fld>
             <a:endParaRPr lang="en-US"/>
           </a:p>
@@ -29366,7 +32139,7 @@
           <a:p>
             <a:fld id="{B4B13859-67C5-4393-B6C2-556CF3F770C0}" type="datetime3">
               <a:rPr lang="en-US" smtClean="0"/>
-              <a:t>22 April 2026</a:t>
+              <a:t>24 April 2026</a:t>
             </a:fld>
             <a:endParaRPr lang="en-US"/>
           </a:p>
@@ -29957,7 +32730,7 @@
           <a:p>
             <a:fld id="{B4B13859-67C5-4393-B6C2-556CF3F770C0}" type="datetime3">
               <a:rPr lang="en-US" smtClean="0"/>
-              <a:t>22 April 2026</a:t>
+              <a:t>24 April 2026</a:t>
             </a:fld>
             <a:endParaRPr lang="en-US"/>
           </a:p>
@@ -30115,7 +32888,7 @@
           <a:p>
             <a:fld id="{B4B13859-67C5-4393-B6C2-556CF3F770C0}" type="datetime3">
               <a:rPr lang="en-US" smtClean="0"/>
-              <a:t>22 April 2026</a:t>
+              <a:t>24 April 2026</a:t>
             </a:fld>
             <a:endParaRPr lang="en-US"/>
           </a:p>
